--- a/presentation/FRB_project.pptx
+++ b/presentation/FRB_project.pptx
@@ -207,7 +207,7 @@
           <a:p>
             <a:fld id="{7452E638-4A18-B24D-841C-B7AA22B6187A}" type="datetimeFigureOut">
               <a:rPr lang="en-DE" smtClean="0"/>
-              <a:t>24.09.26</a:t>
+              <a:t>05.10.26</a:t>
             </a:fld>
             <a:endParaRPr lang="en-DE"/>
           </a:p>
@@ -1725,7 +1725,7 @@
           <a:p>
             <a:fld id="{87F987B8-30A4-044B-B021-0E4FEA54139B}" type="datetime1">
               <a:rPr lang="de-DE" smtClean="0"/>
-              <a:t>24.09.26</a:t>
+              <a:t>05.10.26</a:t>
             </a:fld>
             <a:endParaRPr lang="en-DE"/>
           </a:p>
@@ -1899,7 +1899,7 @@
           <a:p>
             <a:fld id="{1AB9055D-9A9B-0745-B98B-ABAE59D3B794}" type="datetime1">
               <a:rPr lang="de-DE" smtClean="0"/>
-              <a:t>24.09.26</a:t>
+              <a:t>05.10.26</a:t>
             </a:fld>
             <a:endParaRPr lang="en-DE"/>
           </a:p>
@@ -2083,7 +2083,7 @@
           <a:p>
             <a:fld id="{DC5738BC-1EE9-3C4F-A3D2-D98FF4219397}" type="datetime1">
               <a:rPr lang="de-DE" smtClean="0"/>
-              <a:t>24.09.26</a:t>
+              <a:t>05.10.26</a:t>
             </a:fld>
             <a:endParaRPr lang="en-DE"/>
           </a:p>
@@ -2257,7 +2257,7 @@
           <a:p>
             <a:fld id="{4112787C-F246-2344-9E35-42282032FB1D}" type="datetime1">
               <a:rPr lang="de-DE" smtClean="0"/>
-              <a:t>24.09.26</a:t>
+              <a:t>05.10.26</a:t>
             </a:fld>
             <a:endParaRPr lang="en-DE"/>
           </a:p>
@@ -2507,7 +2507,7 @@
           <a:p>
             <a:fld id="{9B073C96-97C0-3C4D-8E73-DF5539BB1A4C}" type="datetime1">
               <a:rPr lang="de-DE" smtClean="0"/>
-              <a:t>24.09.26</a:t>
+              <a:t>05.10.26</a:t>
             </a:fld>
             <a:endParaRPr lang="en-DE"/>
           </a:p>
@@ -2743,7 +2743,7 @@
           <a:p>
             <a:fld id="{9760B672-8DC5-C04F-8747-05D9B7A997FB}" type="datetime1">
               <a:rPr lang="de-DE" smtClean="0"/>
-              <a:t>24.09.26</a:t>
+              <a:t>05.10.26</a:t>
             </a:fld>
             <a:endParaRPr lang="en-DE"/>
           </a:p>
@@ -3114,7 +3114,7 @@
           <a:p>
             <a:fld id="{61CC0A0A-985B-4547-B2CD-9D8D6E09CF2A}" type="datetime1">
               <a:rPr lang="de-DE" smtClean="0"/>
-              <a:t>24.09.26</a:t>
+              <a:t>05.10.26</a:t>
             </a:fld>
             <a:endParaRPr lang="en-DE"/>
           </a:p>
@@ -3236,7 +3236,7 @@
           <a:p>
             <a:fld id="{488B59F8-6EB7-EC4A-B43C-0D35C17E4E71}" type="datetime1">
               <a:rPr lang="de-DE" smtClean="0"/>
-              <a:t>24.09.26</a:t>
+              <a:t>05.10.26</a:t>
             </a:fld>
             <a:endParaRPr lang="en-DE"/>
           </a:p>
@@ -3335,7 +3335,7 @@
           <a:p>
             <a:fld id="{F48DC1E5-00C4-B64C-99BB-99E5A1760278}" type="datetime1">
               <a:rPr lang="de-DE" smtClean="0"/>
-              <a:t>24.09.26</a:t>
+              <a:t>05.10.26</a:t>
             </a:fld>
             <a:endParaRPr lang="en-DE"/>
           </a:p>
@@ -3616,7 +3616,7 @@
           <a:p>
             <a:fld id="{14774D7B-B803-B349-B7F4-3607601FA4C1}" type="datetime1">
               <a:rPr lang="de-DE" smtClean="0"/>
-              <a:t>24.09.26</a:t>
+              <a:t>05.10.26</a:t>
             </a:fld>
             <a:endParaRPr lang="en-DE"/>
           </a:p>
@@ -3877,7 +3877,7 @@
           <a:p>
             <a:fld id="{A072F288-7899-0540-A581-2843FFD9E2DE}" type="datetime1">
               <a:rPr lang="de-DE" smtClean="0"/>
-              <a:t>24.09.26</a:t>
+              <a:t>05.10.26</a:t>
             </a:fld>
             <a:endParaRPr lang="en-DE"/>
           </a:p>
@@ -4103,7 +4103,7 @@
           <a:p>
             <a:fld id="{4E215DEA-5C87-CC42-97A2-C776002BE5F5}" type="datetime1">
               <a:rPr lang="de-DE" smtClean="0"/>
-              <a:t>24.09.26</a:t>
+              <a:t>05.10.26</a:t>
             </a:fld>
             <a:endParaRPr lang="en-DE"/>
           </a:p>
@@ -4920,36 +4920,6 @@
           </a:p>
         </p:txBody>
       </p:sp>
-      <p:pic>
-        <p:nvPicPr>
-          <p:cNvPr id="8" name="Picture 7" descr="fisher_kids_vs_lsst_2x2.png">
-            <a:extLst>
-              <a:ext uri="{FF2B5EF4-FFF2-40B4-BE49-F238E27FC236}">
-                <a16:creationId xmlns:a16="http://schemas.microsoft.com/office/drawing/2014/main" id="{86016607-C708-A5F8-A1A5-BEF66953BBA9}"/>
-              </a:ext>
-            </a:extLst>
-          </p:cNvPr>
-          <p:cNvPicPr>
-            <a:picLocks noChangeAspect="1"/>
-          </p:cNvPicPr>
-          <p:nvPr/>
-        </p:nvPicPr>
-        <p:blipFill>
-          <a:blip r:embed="rId3"/>
-          <a:stretch>
-            <a:fillRect/>
-          </a:stretch>
-        </p:blipFill>
-        <p:spPr>
-          <a:xfrm>
-            <a:off x="1178792" y="1417320"/>
-            <a:ext cx="5872015" cy="4892040"/>
-          </a:xfrm>
-          <a:prstGeom prst="rect">
-            <a:avLst/>
-          </a:prstGeom>
-        </p:spPr>
-      </p:pic>
       <p:sp>
         <p:nvSpPr>
           <p:cNvPr id="9" name="Rounded Rectangle 8">
@@ -5491,6 +5461,36 @@
           </a:p>
         </p:txBody>
       </p:sp>
+      <p:pic>
+        <p:nvPicPr>
+          <p:cNvPr id="3" name="Picture 2">
+            <a:extLst>
+              <a:ext uri="{FF2B5EF4-FFF2-40B4-BE49-F238E27FC236}">
+                <a16:creationId xmlns:a16="http://schemas.microsoft.com/office/drawing/2014/main" id="{F326BDE6-6959-0A62-DECC-667916F4CBE1}"/>
+              </a:ext>
+            </a:extLst>
+          </p:cNvPr>
+          <p:cNvPicPr>
+            <a:picLocks noChangeAspect="1"/>
+          </p:cNvPicPr>
+          <p:nvPr/>
+        </p:nvPicPr>
+        <p:blipFill>
+          <a:blip r:embed="rId3"/>
+          <a:stretch>
+            <a:fillRect/>
+          </a:stretch>
+        </p:blipFill>
+        <p:spPr>
+          <a:xfrm>
+            <a:off x="838200" y="1346209"/>
+            <a:ext cx="6085005" cy="5070838"/>
+          </a:xfrm>
+          <a:prstGeom prst="rect">
+            <a:avLst/>
+          </a:prstGeom>
+        </p:spPr>
+      </p:pic>
     </p:spTree>
     <p:extLst>
       <p:ext uri="{BB962C8B-B14F-4D97-AF65-F5344CB8AC3E}">
@@ -6918,8 +6918,8 @@
           </a:p>
         </p:txBody>
       </p:sp>
-      <mc:AlternateContent xmlns:mc="http://schemas.openxmlformats.org/markup-compatibility/2006">
-        <mc:Choice xmlns:a14="http://schemas.microsoft.com/office/drawing/2010/main" Requires="a14">
+      <mc:AlternateContent xmlns:mc="http://schemas.openxmlformats.org/markup-compatibility/2006" xmlns:a14="http://schemas.microsoft.com/office/drawing/2010/main">
+        <mc:Choice Requires="a14">
           <p:sp>
             <p:nvSpPr>
               <p:cNvPr id="3" name="Content Placeholder 2">
@@ -7009,7 +7009,7 @@
             </p:txBody>
           </p:sp>
         </mc:Choice>
-        <mc:Fallback>
+        <mc:Fallback xmlns="">
           <p:sp>
             <p:nvSpPr>
               <p:cNvPr id="3" name="Content Placeholder 2">
@@ -7713,8 +7713,8 @@
           </a:p>
         </p:txBody>
       </p:sp>
-      <mc:AlternateContent xmlns:mc="http://schemas.openxmlformats.org/markup-compatibility/2006">
-        <mc:Choice xmlns:a14="http://schemas.microsoft.com/office/drawing/2010/main" Requires="a14">
+      <mc:AlternateContent xmlns:mc="http://schemas.openxmlformats.org/markup-compatibility/2006" xmlns:a14="http://schemas.microsoft.com/office/drawing/2010/main">
+        <mc:Choice Requires="a14">
           <p:sp>
             <p:nvSpPr>
               <p:cNvPr id="20" name="TextBox 19">
@@ -7743,6 +7743,7 @@
               </a:bodyPr>
               <a:lstStyle/>
               <a:p>
+                <a:pPr/>
                 <a14:m>
                   <m:oMathPara xmlns:m="http://schemas.openxmlformats.org/officeDocument/2006/math">
                     <m:oMath>
@@ -7881,7 +7882,7 @@
             </p:txBody>
           </p:sp>
         </mc:Choice>
-        <mc:Fallback>
+        <mc:Fallback xmlns="">
           <p:sp>
             <p:nvSpPr>
               <p:cNvPr id="20" name="TextBox 19">
@@ -10434,36 +10435,6 @@
           </a:p>
         </p:txBody>
       </p:sp>
-      <p:pic>
-        <p:nvPicPr>
-          <p:cNvPr id="13" name="Picture 12" descr="fisher_comparison_2x2.png">
-            <a:extLst>
-              <a:ext uri="{FF2B5EF4-FFF2-40B4-BE49-F238E27FC236}">
-                <a16:creationId xmlns:a16="http://schemas.microsoft.com/office/drawing/2014/main" id="{4927B330-1C46-5B0F-DFA2-98792069F594}"/>
-              </a:ext>
-            </a:extLst>
-          </p:cNvPr>
-          <p:cNvPicPr>
-            <a:picLocks noChangeAspect="1"/>
-          </p:cNvPicPr>
-          <p:nvPr/>
-        </p:nvPicPr>
-        <p:blipFill>
-          <a:blip r:embed="rId3"/>
-          <a:stretch>
-            <a:fillRect/>
-          </a:stretch>
-        </p:blipFill>
-        <p:spPr>
-          <a:xfrm>
-            <a:off x="1107449" y="1389888"/>
-            <a:ext cx="6014700" cy="5010912"/>
-          </a:xfrm>
-          <a:prstGeom prst="rect">
-            <a:avLst/>
-          </a:prstGeom>
-        </p:spPr>
-      </p:pic>
       <p:sp>
         <p:nvSpPr>
           <p:cNvPr id="14" name="Rounded Rectangle 13">
@@ -11020,6 +10991,36 @@
           </a:p>
         </p:txBody>
       </p:sp>
+      <p:pic>
+        <p:nvPicPr>
+          <p:cNvPr id="3" name="Picture 2">
+            <a:extLst>
+              <a:ext uri="{FF2B5EF4-FFF2-40B4-BE49-F238E27FC236}">
+                <a16:creationId xmlns:a16="http://schemas.microsoft.com/office/drawing/2014/main" id="{C1A01015-9570-616C-C767-947ADB0A51AE}"/>
+              </a:ext>
+            </a:extLst>
+          </p:cNvPr>
+          <p:cNvPicPr>
+            <a:picLocks noChangeAspect="1"/>
+          </p:cNvPicPr>
+          <p:nvPr/>
+        </p:nvPicPr>
+        <p:blipFill>
+          <a:blip r:embed="rId3"/>
+          <a:stretch>
+            <a:fillRect/>
+          </a:stretch>
+        </p:blipFill>
+        <p:spPr>
+          <a:xfrm>
+            <a:off x="1045029" y="1449534"/>
+            <a:ext cx="5919107" cy="4932590"/>
+          </a:xfrm>
+          <a:prstGeom prst="rect">
+            <a:avLst/>
+          </a:prstGeom>
+        </p:spPr>
+      </p:pic>
     </p:spTree>
     <p:extLst>
       <p:ext uri="{BB962C8B-B14F-4D97-AF65-F5344CB8AC3E}">

--- a/presentation/FRB_project.pptx
+++ b/presentation/FRB_project.pptx
@@ -5,20 +5,19 @@
     <p:sldMasterId id="2147483924" r:id="rId1"/>
   </p:sldMasterIdLst>
   <p:notesMasterIdLst>
-    <p:notesMasterId r:id="rId13"/>
+    <p:notesMasterId r:id="rId12"/>
   </p:notesMasterIdLst>
   <p:sldIdLst>
     <p:sldId id="256" r:id="rId2"/>
     <p:sldId id="302" r:id="rId3"/>
     <p:sldId id="303" r:id="rId4"/>
-    <p:sldId id="304" r:id="rId5"/>
-    <p:sldId id="305" r:id="rId6"/>
-    <p:sldId id="306" r:id="rId7"/>
-    <p:sldId id="307" r:id="rId8"/>
-    <p:sldId id="308" r:id="rId9"/>
-    <p:sldId id="309" r:id="rId10"/>
-    <p:sldId id="310" r:id="rId11"/>
-    <p:sldId id="311" r:id="rId12"/>
+    <p:sldId id="305" r:id="rId5"/>
+    <p:sldId id="306" r:id="rId6"/>
+    <p:sldId id="307" r:id="rId7"/>
+    <p:sldId id="308" r:id="rId8"/>
+    <p:sldId id="309" r:id="rId9"/>
+    <p:sldId id="310" r:id="rId10"/>
+    <p:sldId id="311" r:id="rId11"/>
   </p:sldIdLst>
   <p:sldSz cx="12192000" cy="6858000"/>
   <p:notesSz cx="6858000" cy="9144000"/>
@@ -519,56 +518,6 @@
           <a:bodyPr/>
           <a:lstStyle/>
           <a:p>
-            <a:r>
-              <a:rPr lang="en-DE" sz="1200" b="0" kern="1200" dirty="0">
-                <a:solidFill>
-                  <a:schemeClr val="tx1"/>
-                </a:solidFill>
-                <a:effectLst/>
-                <a:latin typeface="+mn-lt"/>
-                <a:ea typeface="+mn-ea"/>
-                <a:cs typeface="+mn-cs"/>
-              </a:rPr>
-              <a:t>Fast Radio Bursts last only milliseconds or less, but release an enormous amount of energy during that short interval. One important observable is dispersion: lower radio frequencies arrive later than higher frequencies because the signal travels through ionised matter. For many FRBs, the resulting dispersion measure is much larger than the contribution expected from the Milky Way alone. This shows that most sources are extragalactic and are often located at cosmological distances.</a:t>
-            </a:r>
-          </a:p>
-          <a:p>
-            <a:br>
-              <a:rPr lang="en-DE" sz="1200" b="0" kern="1200" dirty="0">
-                <a:solidFill>
-                  <a:schemeClr val="tx1"/>
-                </a:solidFill>
-                <a:effectLst/>
-                <a:latin typeface="+mn-lt"/>
-                <a:ea typeface="+mn-ea"/>
-                <a:cs typeface="+mn-cs"/>
-              </a:rPr>
-            </a:br>
-            <a:endParaRPr lang="en-DE" sz="1200" b="0" kern="1200" dirty="0">
-              <a:solidFill>
-                <a:schemeClr val="tx1"/>
-              </a:solidFill>
-              <a:effectLst/>
-              <a:latin typeface="+mn-lt"/>
-              <a:ea typeface="+mn-ea"/>
-              <a:cs typeface="+mn-cs"/>
-            </a:endParaRPr>
-          </a:p>
-          <a:p>
-            <a:r>
-              <a:rPr lang="en-DE" sz="1200" b="0" kern="1200" dirty="0">
-                <a:solidFill>
-                  <a:schemeClr val="tx1"/>
-                </a:solidFill>
-                <a:effectLst/>
-                <a:latin typeface="+mn-lt"/>
-                <a:ea typeface="+mn-ea"/>
-                <a:cs typeface="+mn-cs"/>
-              </a:rPr>
-              <a:t>CHIME has dramatically increased the number of observations. The latest catalogue considered in this thesis contains 4,539 bursts from 3,641 distinct sources. Nevertheless, their emission mechanisms and progenitors remain uncertain. Precisely localising individual bursts and assigning them to host galaxies is difficult. A statistical approach therefore offers an alternative: even without an individual redshift for every FRB, the population as a whole can be compared with the known large-scale distribution of galaxies.</a:t>
-            </a:r>
-          </a:p>
-          <a:p>
             <a:endParaRPr lang="en-DE" dirty="0"/>
           </a:p>
         </p:txBody>
@@ -590,7 +539,7 @@
           <a:p>
             <a:fld id="{274690B4-CF9E-4043-AF95-44FD24F986C4}" type="slidenum">
               <a:rPr lang="en-DE" smtClean="0"/>
-              <a:t>2</a:t>
+              <a:t>1</a:t>
             </a:fld>
             <a:endParaRPr lang="en-DE"/>
           </a:p>
@@ -599,7 +548,7 @@
     </p:spTree>
     <p:extLst>
       <p:ext uri="{BB962C8B-B14F-4D97-AF65-F5344CB8AC3E}">
-        <p14:creationId xmlns:p14="http://schemas.microsoft.com/office/powerpoint/2010/main" val="3588913757"/>
+        <p14:creationId xmlns:p14="http://schemas.microsoft.com/office/powerpoint/2010/main" val="3293861348"/>
       </p:ext>
     </p:extLst>
   </p:cSld>
@@ -663,7 +612,7 @@
                 <a:ea typeface="+mn-ea"/>
                 <a:cs typeface="+mn-cs"/>
               </a:rPr>
-              <a:t>In this thesis, I compare two simplified classes of possible progenitors. The first model describes young magnetars. They are primarily formed through the collapse of massive stars and should therefore follow the cosmic star-formation rate with little delay. This interpretation is also supported by the detection of an FRB-like burst from the Galactic magnetar SGR 1935+2154.</a:t>
+              <a:t>Fast Radio Bursts last only milliseconds or less, but release an enormous amount of energy during that short interval. One important observable is dispersion: lower radio frequencies arrive later than higher frequencies because the signal travels through ionised matter. For many FRBs, the resulting dispersion measure is much larger than the contribution expected from the Milky Way alone. This shows that most sources are extragalactic and are often located at cosmological distances.</a:t>
             </a:r>
           </a:p>
           <a:p>
@@ -699,43 +648,7 @@
                 <a:ea typeface="+mn-ea"/>
                 <a:cs typeface="+mn-cs"/>
               </a:rPr>
-              <a:t>The second model represents delayed neutron-star channels, such as compact-object mergers or accretion-induced collapse. These events may occur billions of years after the original star formation and can therefore also be found in older galaxy populations.</a:t>
-            </a:r>
-          </a:p>
-          <a:p>
-            <a:br>
-              <a:rPr lang="en-DE" sz="1200" b="0" kern="1200" dirty="0">
-                <a:solidFill>
-                  <a:schemeClr val="tx1"/>
-                </a:solidFill>
-                <a:effectLst/>
-                <a:latin typeface="+mn-lt"/>
-                <a:ea typeface="+mn-ea"/>
-                <a:cs typeface="+mn-cs"/>
-              </a:rPr>
-            </a:br>
-            <a:endParaRPr lang="en-DE" sz="1200" b="0" kern="1200" dirty="0">
-              <a:solidFill>
-                <a:schemeClr val="tx1"/>
-              </a:solidFill>
-              <a:effectLst/>
-              <a:latin typeface="+mn-lt"/>
-              <a:ea typeface="+mn-ea"/>
-              <a:cs typeface="+mn-cs"/>
-            </a:endParaRPr>
-          </a:p>
-          <a:p>
-            <a:r>
-              <a:rPr lang="en-DE" sz="1200" b="0" kern="1200" dirty="0">
-                <a:solidFill>
-                  <a:schemeClr val="tx1"/>
-                </a:solidFill>
-                <a:effectLst/>
-                <a:latin typeface="+mn-lt"/>
-                <a:ea typeface="+mn-ea"/>
-                <a:cs typeface="+mn-cs"/>
-              </a:rPr>
-              <a:t>Their different evolution is represented by a linear tracer bias, $b(z)=b_0(1+z)^\delta$. Here, $b_0$ sets the present-day amplitude, while $\delta$ determines how strongly the bias grows with redshift. The two models consequently leave different signatures in their spatial distributions. The goal of the cross-correlation analysis is to constrain these two bias parameters.</a:t>
+              <a:t>CHIME has dramatically increased the number of observations. The latest catalogue considered in this thesis contains 4,539 bursts from 3,641 distinct sources. Nevertheless, their emission mechanisms and progenitors remain uncertain. Precisely localising individual bursts and assigning them to host galaxies is difficult. A statistical approach therefore offers an alternative: even without an individual redshift for every FRB, the population as a whole can be compared with the known large-scale distribution of galaxies.</a:t>
             </a:r>
           </a:p>
           <a:p>
@@ -760,7 +673,7 @@
           <a:p>
             <a:fld id="{274690B4-CF9E-4043-AF95-44FD24F986C4}" type="slidenum">
               <a:rPr lang="en-DE" smtClean="0"/>
-              <a:t>3</a:t>
+              <a:t>2</a:t>
             </a:fld>
             <a:endParaRPr lang="en-DE"/>
           </a:p>
@@ -769,7 +682,7 @@
     </p:spTree>
     <p:extLst>
       <p:ext uri="{BB962C8B-B14F-4D97-AF65-F5344CB8AC3E}">
-        <p14:creationId xmlns:p14="http://schemas.microsoft.com/office/powerpoint/2010/main" val="4010310290"/>
+        <p14:creationId xmlns:p14="http://schemas.microsoft.com/office/powerpoint/2010/main" val="3588913757"/>
       </p:ext>
     </p:extLst>
   </p:cSld>
@@ -824,30 +737,88 @@
           <a:lstStyle/>
           <a:p>
             <a:r>
-              <a:rPr lang="en-GB" dirty="0"/>
-              <a:t>The basic idea is that both galaxies and FRB host objects trace the same underlying matter distribution. If a region of the sky contains more galaxies than average and we also observe more FRBs there, this produces a positive cross-correlation signal.</a:t>
-            </a:r>
-          </a:p>
-          <a:p>
-            <a:endParaRPr lang="en-GB" dirty="0"/>
-          </a:p>
-          <a:p>
-            <a:r>
-              <a:rPr lang="en-GB" dirty="0"/>
-              <a:t>This signal is quantified by the angular power spectrum, $C_\ell$. Small multipoles correspond to large angular structures, while large multipoles probe small angular scales. The overlap along the line of sight is crucial: a low-redshift galaxy population only correlates with the fraction of FRBs located in the same redshift range.</a:t>
-            </a:r>
-          </a:p>
-          <a:p>
-            <a:endParaRPr lang="en-GB" dirty="0"/>
-          </a:p>
-          <a:p>
-            <a:r>
-              <a:rPr lang="en-GB" dirty="0" err="1"/>
-              <a:t>KiDS</a:t>
-            </a:r>
-            <a:r>
-              <a:rPr lang="en-GB" dirty="0"/>
-              <a:t> divides its galaxies into six tomographic redshift bins. This means that FRB clustering is measured through six different radial weighting functions instead of one integrated projection. The resulting redshift information should help separate the overall bias amplitude, $b_0$, from its redshift evolution, $\delta$.</a:t>
+              <a:rPr lang="en-DE" sz="1200" b="0" kern="1200" dirty="0">
+                <a:solidFill>
+                  <a:schemeClr val="tx1"/>
+                </a:solidFill>
+                <a:effectLst/>
+                <a:latin typeface="+mn-lt"/>
+                <a:ea typeface="+mn-ea"/>
+                <a:cs typeface="+mn-cs"/>
+              </a:rPr>
+              <a:t>In this thesis, I compare two simplified classes of possible progenitors. The first model describes young magnetars. They are primarily formed through the collapse of massive stars and should therefore follow the cosmic star-formation rate with little delay. This interpretation is also supported by the detection of an FRB-like burst from the Galactic magnetar SGR 1935+2154.</a:t>
+            </a:r>
+          </a:p>
+          <a:p>
+            <a:br>
+              <a:rPr lang="en-DE" sz="1200" b="0" kern="1200" dirty="0">
+                <a:solidFill>
+                  <a:schemeClr val="tx1"/>
+                </a:solidFill>
+                <a:effectLst/>
+                <a:latin typeface="+mn-lt"/>
+                <a:ea typeface="+mn-ea"/>
+                <a:cs typeface="+mn-cs"/>
+              </a:rPr>
+            </a:br>
+            <a:endParaRPr lang="en-DE" sz="1200" b="0" kern="1200" dirty="0">
+              <a:solidFill>
+                <a:schemeClr val="tx1"/>
+              </a:solidFill>
+              <a:effectLst/>
+              <a:latin typeface="+mn-lt"/>
+              <a:ea typeface="+mn-ea"/>
+              <a:cs typeface="+mn-cs"/>
+            </a:endParaRPr>
+          </a:p>
+          <a:p>
+            <a:r>
+              <a:rPr lang="en-DE" sz="1200" b="0" kern="1200" dirty="0">
+                <a:solidFill>
+                  <a:schemeClr val="tx1"/>
+                </a:solidFill>
+                <a:effectLst/>
+                <a:latin typeface="+mn-lt"/>
+                <a:ea typeface="+mn-ea"/>
+                <a:cs typeface="+mn-cs"/>
+              </a:rPr>
+              <a:t>The second model represents delayed neutron-star channels, such as compact-object mergers or accretion-induced collapse. These events may occur billions of years after the original star formation and can therefore also be found in older galaxy populations.</a:t>
+            </a:r>
+          </a:p>
+          <a:p>
+            <a:br>
+              <a:rPr lang="en-DE" sz="1200" b="0" kern="1200" dirty="0">
+                <a:solidFill>
+                  <a:schemeClr val="tx1"/>
+                </a:solidFill>
+                <a:effectLst/>
+                <a:latin typeface="+mn-lt"/>
+                <a:ea typeface="+mn-ea"/>
+                <a:cs typeface="+mn-cs"/>
+              </a:rPr>
+            </a:br>
+            <a:endParaRPr lang="en-DE" sz="1200" b="0" kern="1200" dirty="0">
+              <a:solidFill>
+                <a:schemeClr val="tx1"/>
+              </a:solidFill>
+              <a:effectLst/>
+              <a:latin typeface="+mn-lt"/>
+              <a:ea typeface="+mn-ea"/>
+              <a:cs typeface="+mn-cs"/>
+            </a:endParaRPr>
+          </a:p>
+          <a:p>
+            <a:r>
+              <a:rPr lang="en-DE" sz="1200" b="0" kern="1200" dirty="0">
+                <a:solidFill>
+                  <a:schemeClr val="tx1"/>
+                </a:solidFill>
+                <a:effectLst/>
+                <a:latin typeface="+mn-lt"/>
+                <a:ea typeface="+mn-ea"/>
+                <a:cs typeface="+mn-cs"/>
+              </a:rPr>
+              <a:t>Their different evolution is represented by a linear tracer bias, $b(z)=b_0(1+z)^\delta$. Here, $b_0$ sets the present-day amplitude, while $\delta$ determines how strongly the bias grows with redshift. The two models consequently leave different signatures in their spatial distributions. The goal of the cross-correlation analysis is to constrain these two bias parameters.</a:t>
             </a:r>
           </a:p>
           <a:p>
@@ -872,7 +843,7 @@
           <a:p>
             <a:fld id="{274690B4-CF9E-4043-AF95-44FD24F986C4}" type="slidenum">
               <a:rPr lang="en-DE" smtClean="0"/>
-              <a:t>4</a:t>
+              <a:t>3</a:t>
             </a:fld>
             <a:endParaRPr lang="en-DE"/>
           </a:p>
@@ -881,7 +852,7 @@
     </p:spTree>
     <p:extLst>
       <p:ext uri="{BB962C8B-B14F-4D97-AF65-F5344CB8AC3E}">
-        <p14:creationId xmlns:p14="http://schemas.microsoft.com/office/powerpoint/2010/main" val="2483216734"/>
+        <p14:creationId xmlns:p14="http://schemas.microsoft.com/office/powerpoint/2010/main" val="4010310290"/>
       </p:ext>
     </p:extLst>
   </p:cSld>
@@ -995,7 +966,7 @@
           <a:p>
             <a:fld id="{274690B4-CF9E-4043-AF95-44FD24F986C4}" type="slidenum">
               <a:rPr lang="en-DE" smtClean="0"/>
-              <a:t>5</a:t>
+              <a:t>4</a:t>
             </a:fld>
             <a:endParaRPr lang="en-DE"/>
           </a:p>
@@ -1135,7 +1106,7 @@
           <a:p>
             <a:fld id="{274690B4-CF9E-4043-AF95-44FD24F986C4}" type="slidenum">
               <a:rPr lang="en-DE" smtClean="0"/>
-              <a:t>6</a:t>
+              <a:t>5</a:t>
             </a:fld>
             <a:endParaRPr lang="en-DE"/>
           </a:p>
@@ -1243,7 +1214,7 @@
           <a:p>
             <a:fld id="{274690B4-CF9E-4043-AF95-44FD24F986C4}" type="slidenum">
               <a:rPr lang="en-DE" smtClean="0"/>
-              <a:t>7</a:t>
+              <a:t>6</a:t>
             </a:fld>
             <a:endParaRPr lang="en-DE"/>
           </a:p>
@@ -1367,7 +1338,7 @@
           <a:p>
             <a:fld id="{274690B4-CF9E-4043-AF95-44FD24F986C4}" type="slidenum">
               <a:rPr lang="en-DE" smtClean="0"/>
-              <a:t>8</a:t>
+              <a:t>7</a:t>
             </a:fld>
             <a:endParaRPr lang="en-DE"/>
           </a:p>
@@ -1451,7 +1422,7 @@
           <a:p>
             <a:fld id="{274690B4-CF9E-4043-AF95-44FD24F986C4}" type="slidenum">
               <a:rPr lang="en-DE" smtClean="0"/>
-              <a:t>9</a:t>
+              <a:t>8</a:t>
             </a:fld>
             <a:endParaRPr lang="en-DE"/>
           </a:p>
@@ -1575,7 +1546,7 @@
           <a:p>
             <a:fld id="{274690B4-CF9E-4043-AF95-44FD24F986C4}" type="slidenum">
               <a:rPr lang="en-DE" smtClean="0"/>
-              <a:t>10</a:t>
+              <a:t>9</a:t>
             </a:fld>
             <a:endParaRPr lang="en-DE"/>
           </a:p>
@@ -4528,7 +4499,7 @@
           <p:nvPr/>
         </p:nvPicPr>
         <p:blipFill rotWithShape="1">
-          <a:blip r:embed="rId2"/>
+          <a:blip r:embed="rId3"/>
           <a:srcRect l="3789" t="21269" r="19693" b="1873"/>
           <a:stretch>
             <a:fillRect/>
@@ -4842,7 +4813,7 @@
           <p:cNvPr id="5" name="Slide Number Placeholder 4">
             <a:extLst>
               <a:ext uri="{FF2B5EF4-FFF2-40B4-BE49-F238E27FC236}">
-                <a16:creationId xmlns:a16="http://schemas.microsoft.com/office/drawing/2014/main" id="{F0C56DF0-A3B7-DBDE-36A3-9CF51387443A}"/>
+                <a16:creationId xmlns:a16="http://schemas.microsoft.com/office/drawing/2014/main" id="{2B954FFC-143D-2C2C-F06D-C5CBE9C10F2F}"/>
               </a:ext>
             </a:extLst>
           </p:cNvPr>
@@ -4861,690 +4832,6 @@
             <a:fld id="{D3D74EA4-B172-9A48-808A-923F6A4D31D8}" type="slidenum">
               <a:rPr lang="en-DE" smtClean="0"/>
               <a:t>10</a:t>
-            </a:fld>
-            <a:endParaRPr lang="en-DE"/>
-          </a:p>
-        </p:txBody>
-      </p:sp>
-      <p:sp>
-        <p:nvSpPr>
-          <p:cNvPr id="6" name="TextBox 5">
-            <a:extLst>
-              <a:ext uri="{FF2B5EF4-FFF2-40B4-BE49-F238E27FC236}">
-                <a16:creationId xmlns:a16="http://schemas.microsoft.com/office/drawing/2014/main" id="{1866AF25-CB5E-4CFE-6C8C-364BCF1A4F62}"/>
-              </a:ext>
-            </a:extLst>
-          </p:cNvPr>
-          <p:cNvSpPr txBox="1"/>
-          <p:nvPr/>
-        </p:nvSpPr>
-        <p:spPr>
-          <a:xfrm>
-            <a:off x="502920" y="676656"/>
-            <a:ext cx="10881360" cy="750975"/>
-          </a:xfrm>
-          <a:prstGeom prst="rect">
-            <a:avLst/>
-          </a:prstGeom>
-          <a:noFill/>
-        </p:spPr>
-        <p:txBody>
-          <a:bodyPr wrap="square" lIns="36576" tIns="36576" rIns="36576" bIns="36576" anchor="t">
-            <a:spAutoFit/>
-          </a:bodyPr>
-          <a:lstStyle/>
-          <a:p>
-            <a:pPr algn="l">
-              <a:spcAft>
-                <a:spcPts val="0"/>
-              </a:spcAft>
-            </a:pPr>
-            <a:r>
-              <a:rPr sz="4400" b="1" dirty="0">
-                <a:latin typeface="Aptos Display"/>
-              </a:rPr>
-              <a:t>From </a:t>
-            </a:r>
-            <a:r>
-              <a:rPr sz="4400" b="1" dirty="0" err="1">
-                <a:latin typeface="Aptos Display"/>
-              </a:rPr>
-              <a:t>KiDS</a:t>
-            </a:r>
-            <a:r>
-              <a:rPr sz="4400" b="1" dirty="0">
-                <a:latin typeface="Aptos Display"/>
-              </a:rPr>
-              <a:t> to LSST</a:t>
-            </a:r>
-          </a:p>
-        </p:txBody>
-      </p:sp>
-      <p:sp>
-        <p:nvSpPr>
-          <p:cNvPr id="9" name="Rounded Rectangle 8">
-            <a:extLst>
-              <a:ext uri="{FF2B5EF4-FFF2-40B4-BE49-F238E27FC236}">
-                <a16:creationId xmlns:a16="http://schemas.microsoft.com/office/drawing/2014/main" id="{2D87BFD9-2651-B57C-2138-07541E89D091}"/>
-              </a:ext>
-            </a:extLst>
-          </p:cNvPr>
-          <p:cNvSpPr/>
-          <p:nvPr/>
-        </p:nvSpPr>
-        <p:spPr>
-          <a:xfrm>
-            <a:off x="8092440" y="1664208"/>
-            <a:ext cx="3337560" cy="4434840"/>
-          </a:xfrm>
-          <a:prstGeom prst="roundRect">
-            <a:avLst>
-              <a:gd name="adj" fmla="val 8000"/>
-            </a:avLst>
-          </a:prstGeom>
-          <a:solidFill>
-            <a:srgbClr val="FFFFFF"/>
-          </a:solidFill>
-          <a:ln>
-            <a:solidFill>
-              <a:srgbClr val="D2D7D7"/>
-            </a:solidFill>
-          </a:ln>
-        </p:spPr>
-        <p:style>
-          <a:lnRef idx="1">
-            <a:schemeClr val="accent1"/>
-          </a:lnRef>
-          <a:fillRef idx="3">
-            <a:schemeClr val="accent1"/>
-          </a:fillRef>
-          <a:effectRef idx="2">
-            <a:schemeClr val="accent1"/>
-          </a:effectRef>
-          <a:fontRef idx="minor">
-            <a:schemeClr val="lt1"/>
-          </a:fontRef>
-        </p:style>
-        <p:txBody>
-          <a:bodyPr rtlCol="0" anchor="ctr"/>
-          <a:lstStyle/>
-          <a:p>
-            <a:pPr algn="ctr"/>
-            <a:endParaRPr/>
-          </a:p>
-        </p:txBody>
-      </p:sp>
-      <p:sp>
-        <p:nvSpPr>
-          <p:cNvPr id="10" name="TextBox 9">
-            <a:extLst>
-              <a:ext uri="{FF2B5EF4-FFF2-40B4-BE49-F238E27FC236}">
-                <a16:creationId xmlns:a16="http://schemas.microsoft.com/office/drawing/2014/main" id="{3A74D675-7303-571B-2043-43DA51EFAB8F}"/>
-              </a:ext>
-            </a:extLst>
-          </p:cNvPr>
-          <p:cNvSpPr txBox="1"/>
-          <p:nvPr/>
-        </p:nvSpPr>
-        <p:spPr>
-          <a:xfrm>
-            <a:off x="8394192" y="1938528"/>
-            <a:ext cx="2560320" cy="256032"/>
-          </a:xfrm>
-          <a:prstGeom prst="rect">
-            <a:avLst/>
-          </a:prstGeom>
-          <a:noFill/>
-        </p:spPr>
-        <p:txBody>
-          <a:bodyPr wrap="square" lIns="36576" tIns="36576" rIns="36576" bIns="36576" anchor="t">
-            <a:spAutoFit/>
-          </a:bodyPr>
-          <a:lstStyle/>
-          <a:p>
-            <a:pPr algn="l">
-              <a:spcAft>
-                <a:spcPts val="0"/>
-              </a:spcAft>
-            </a:pPr>
-            <a:r>
-              <a:rPr sz="1100" b="1">
-                <a:solidFill>
-                  <a:srgbClr val="5B6771"/>
-                </a:solidFill>
-                <a:latin typeface="Aptos"/>
-              </a:rPr>
-              <a:t>SURVEY SCALE</a:t>
-            </a:r>
-          </a:p>
-        </p:txBody>
-      </p:sp>
-      <p:sp>
-        <p:nvSpPr>
-          <p:cNvPr id="11" name="TextBox 10">
-            <a:extLst>
-              <a:ext uri="{FF2B5EF4-FFF2-40B4-BE49-F238E27FC236}">
-                <a16:creationId xmlns:a16="http://schemas.microsoft.com/office/drawing/2014/main" id="{AD30205B-C647-A939-1509-C1D2284235AA}"/>
-              </a:ext>
-            </a:extLst>
-          </p:cNvPr>
-          <p:cNvSpPr txBox="1"/>
-          <p:nvPr/>
-        </p:nvSpPr>
-        <p:spPr>
-          <a:xfrm>
-            <a:off x="8394192" y="2359152"/>
-            <a:ext cx="2651760" cy="457200"/>
-          </a:xfrm>
-          <a:prstGeom prst="rect">
-            <a:avLst/>
-          </a:prstGeom>
-          <a:noFill/>
-        </p:spPr>
-        <p:txBody>
-          <a:bodyPr wrap="square" lIns="27432" tIns="18288" rIns="27432" bIns="18288">
-            <a:spAutoFit/>
-          </a:bodyPr>
-          <a:lstStyle/>
-          <a:p>
-            <a:pPr algn="l">
-              <a:spcAft>
-                <a:spcPts val="0"/>
-              </a:spcAft>
-            </a:pPr>
-            <a:r>
-              <a:rPr sz="2300" b="1">
-                <a:solidFill>
-                  <a:srgbClr val="1C3750"/>
-                </a:solidFill>
-                <a:latin typeface="Aptos"/>
-              </a:rPr>
-              <a:t>1,347</a:t>
-            </a:r>
-            <a:r>
-              <a:rPr sz="2300" b="0">
-                <a:solidFill>
-                  <a:srgbClr val="5B6771"/>
-                </a:solidFill>
-                <a:latin typeface="Aptos"/>
-              </a:rPr>
-              <a:t> → </a:t>
-            </a:r>
-            <a:r>
-              <a:rPr sz="2300" b="1">
-                <a:solidFill>
-                  <a:srgbClr val="188985"/>
-                </a:solidFill>
-                <a:latin typeface="Aptos"/>
-              </a:rPr>
-              <a:t>18,000</a:t>
-            </a:r>
-            <a:r>
-              <a:rPr sz="2300" b="0">
-                <a:solidFill>
-                  <a:srgbClr val="5B6771"/>
-                </a:solidFill>
-                <a:latin typeface="Aptos"/>
-              </a:rPr>
-              <a:t> deg²</a:t>
-            </a:r>
-          </a:p>
-        </p:txBody>
-      </p:sp>
-      <p:sp>
-        <p:nvSpPr>
-          <p:cNvPr id="12" name="TextBox 11">
-            <a:extLst>
-              <a:ext uri="{FF2B5EF4-FFF2-40B4-BE49-F238E27FC236}">
-                <a16:creationId xmlns:a16="http://schemas.microsoft.com/office/drawing/2014/main" id="{8F65297E-7921-B4E1-0879-EBA3B1A67208}"/>
-              </a:ext>
-            </a:extLst>
-          </p:cNvPr>
-          <p:cNvSpPr txBox="1"/>
-          <p:nvPr/>
-        </p:nvSpPr>
-        <p:spPr>
-          <a:xfrm>
-            <a:off x="8394192" y="2880360"/>
-            <a:ext cx="2651760" cy="457200"/>
-          </a:xfrm>
-          <a:prstGeom prst="rect">
-            <a:avLst/>
-          </a:prstGeom>
-          <a:noFill/>
-        </p:spPr>
-        <p:txBody>
-          <a:bodyPr wrap="square" lIns="27432" tIns="18288" rIns="27432" bIns="18288">
-            <a:spAutoFit/>
-          </a:bodyPr>
-          <a:lstStyle/>
-          <a:p>
-            <a:pPr algn="l">
-              <a:spcAft>
-                <a:spcPts val="0"/>
-              </a:spcAft>
-            </a:pPr>
-            <a:r>
-              <a:rPr sz="2300" b="1">
-                <a:solidFill>
-                  <a:srgbClr val="1C3750"/>
-                </a:solidFill>
-                <a:latin typeface="Aptos"/>
-              </a:rPr>
-              <a:t>6</a:t>
-            </a:r>
-            <a:r>
-              <a:rPr sz="2300" b="0">
-                <a:solidFill>
-                  <a:srgbClr val="5B6771"/>
-                </a:solidFill>
-                <a:latin typeface="Aptos"/>
-              </a:rPr>
-              <a:t> → </a:t>
-            </a:r>
-            <a:r>
-              <a:rPr sz="2300" b="1">
-                <a:solidFill>
-                  <a:srgbClr val="188985"/>
-                </a:solidFill>
-                <a:latin typeface="Aptos"/>
-              </a:rPr>
-              <a:t>10</a:t>
-            </a:r>
-            <a:r>
-              <a:rPr sz="2300" b="0">
-                <a:solidFill>
-                  <a:srgbClr val="5B6771"/>
-                </a:solidFill>
-                <a:latin typeface="Aptos"/>
-              </a:rPr>
-              <a:t> bins</a:t>
-            </a:r>
-          </a:p>
-        </p:txBody>
-      </p:sp>
-      <p:sp>
-        <p:nvSpPr>
-          <p:cNvPr id="13" name="Rectangle 12">
-            <a:extLst>
-              <a:ext uri="{FF2B5EF4-FFF2-40B4-BE49-F238E27FC236}">
-                <a16:creationId xmlns:a16="http://schemas.microsoft.com/office/drawing/2014/main" id="{B5DCD1CA-029B-8549-B729-8FB4814016D3}"/>
-              </a:ext>
-            </a:extLst>
-          </p:cNvPr>
-          <p:cNvSpPr/>
-          <p:nvPr/>
-        </p:nvSpPr>
-        <p:spPr>
-          <a:xfrm>
-            <a:off x="8394192" y="3529584"/>
-            <a:ext cx="2423160" cy="36576"/>
-          </a:xfrm>
-          <a:prstGeom prst="rect">
-            <a:avLst/>
-          </a:prstGeom>
-          <a:solidFill>
-            <a:srgbClr val="D2D7D7"/>
-          </a:solidFill>
-          <a:ln>
-            <a:solidFill>
-              <a:srgbClr val="D2D7D7"/>
-            </a:solidFill>
-          </a:ln>
-        </p:spPr>
-        <p:style>
-          <a:lnRef idx="1">
-            <a:schemeClr val="accent1"/>
-          </a:lnRef>
-          <a:fillRef idx="3">
-            <a:schemeClr val="accent1"/>
-          </a:fillRef>
-          <a:effectRef idx="2">
-            <a:schemeClr val="accent1"/>
-          </a:effectRef>
-          <a:fontRef idx="minor">
-            <a:schemeClr val="lt1"/>
-          </a:fontRef>
-        </p:style>
-        <p:txBody>
-          <a:bodyPr rtlCol="0" anchor="ctr"/>
-          <a:lstStyle/>
-          <a:p>
-            <a:pPr algn="ctr"/>
-            <a:endParaRPr/>
-          </a:p>
-        </p:txBody>
-      </p:sp>
-      <p:sp>
-        <p:nvSpPr>
-          <p:cNvPr id="14" name="TextBox 13">
-            <a:extLst>
-              <a:ext uri="{FF2B5EF4-FFF2-40B4-BE49-F238E27FC236}">
-                <a16:creationId xmlns:a16="http://schemas.microsoft.com/office/drawing/2014/main" id="{86647549-33DD-242D-4064-9A623E372E41}"/>
-              </a:ext>
-            </a:extLst>
-          </p:cNvPr>
-          <p:cNvSpPr txBox="1"/>
-          <p:nvPr/>
-        </p:nvSpPr>
-        <p:spPr>
-          <a:xfrm>
-            <a:off x="8394192" y="3822191"/>
-            <a:ext cx="2377440" cy="256032"/>
-          </a:xfrm>
-          <a:prstGeom prst="rect">
-            <a:avLst/>
-          </a:prstGeom>
-          <a:noFill/>
-        </p:spPr>
-        <p:txBody>
-          <a:bodyPr wrap="square" lIns="36576" tIns="36576" rIns="36576" bIns="36576" anchor="t">
-            <a:spAutoFit/>
-          </a:bodyPr>
-          <a:lstStyle/>
-          <a:p>
-            <a:pPr algn="l">
-              <a:spcAft>
-                <a:spcPts val="0"/>
-              </a:spcAft>
-            </a:pPr>
-            <a:r>
-              <a:rPr sz="1100" b="1">
-                <a:solidFill>
-                  <a:srgbClr val="DD5B4A"/>
-                </a:solidFill>
-                <a:latin typeface="Aptos"/>
-              </a:rPr>
-              <a:t>DEEP MAGNETAR</a:t>
-            </a:r>
-          </a:p>
-        </p:txBody>
-      </p:sp>
-      <p:sp>
-        <p:nvSpPr>
-          <p:cNvPr id="15" name="TextBox 14">
-            <a:extLst>
-              <a:ext uri="{FF2B5EF4-FFF2-40B4-BE49-F238E27FC236}">
-                <a16:creationId xmlns:a16="http://schemas.microsoft.com/office/drawing/2014/main" id="{75A2CE20-BB79-53D1-7469-10C98F243867}"/>
-              </a:ext>
-            </a:extLst>
-          </p:cNvPr>
-          <p:cNvSpPr txBox="1"/>
-          <p:nvPr/>
-        </p:nvSpPr>
-        <p:spPr>
-          <a:xfrm>
-            <a:off x="8394192" y="4224528"/>
-            <a:ext cx="2468880" cy="335476"/>
-          </a:xfrm>
-          <a:prstGeom prst="rect">
-            <a:avLst/>
-          </a:prstGeom>
-          <a:noFill/>
-        </p:spPr>
-        <p:txBody>
-          <a:bodyPr wrap="square" lIns="36576" tIns="36576" rIns="36576" bIns="36576" anchor="t">
-            <a:spAutoFit/>
-          </a:bodyPr>
-          <a:lstStyle/>
-          <a:p>
-            <a:pPr algn="l">
-              <a:spcAft>
-                <a:spcPts val="0"/>
-              </a:spcAft>
-            </a:pPr>
-            <a:r>
-              <a:rPr sz="1700" b="1" dirty="0" err="1">
-                <a:solidFill>
-                  <a:srgbClr val="1C3750"/>
-                </a:solidFill>
-                <a:latin typeface="Aptos"/>
-              </a:rPr>
-              <a:t>σ</a:t>
-            </a:r>
-            <a:r>
-              <a:rPr sz="1700" b="1" dirty="0">
-                <a:solidFill>
-                  <a:srgbClr val="1C3750"/>
-                </a:solidFill>
-                <a:latin typeface="Aptos"/>
-              </a:rPr>
-              <a:t>(b₀)  1.27 → 0.</a:t>
-            </a:r>
-            <a:r>
-              <a:rPr lang="nl-NL" sz="1700" b="1" dirty="0">
-                <a:solidFill>
-                  <a:srgbClr val="1C3750"/>
-                </a:solidFill>
-                <a:latin typeface="Aptos"/>
-              </a:rPr>
-              <a:t>43</a:t>
-            </a:r>
-            <a:endParaRPr sz="1700" b="1" dirty="0">
-              <a:solidFill>
-                <a:srgbClr val="1C3750"/>
-              </a:solidFill>
-              <a:latin typeface="Aptos"/>
-            </a:endParaRPr>
-          </a:p>
-        </p:txBody>
-      </p:sp>
-      <p:sp>
-        <p:nvSpPr>
-          <p:cNvPr id="16" name="TextBox 15">
-            <a:extLst>
-              <a:ext uri="{FF2B5EF4-FFF2-40B4-BE49-F238E27FC236}">
-                <a16:creationId xmlns:a16="http://schemas.microsoft.com/office/drawing/2014/main" id="{8D8984B3-23E2-49A2-A37D-4A27483E5125}"/>
-              </a:ext>
-            </a:extLst>
-          </p:cNvPr>
-          <p:cNvSpPr txBox="1"/>
-          <p:nvPr/>
-        </p:nvSpPr>
-        <p:spPr>
-          <a:xfrm>
-            <a:off x="8394192" y="4681728"/>
-            <a:ext cx="2468880" cy="335476"/>
-          </a:xfrm>
-          <a:prstGeom prst="rect">
-            <a:avLst/>
-          </a:prstGeom>
-          <a:noFill/>
-        </p:spPr>
-        <p:txBody>
-          <a:bodyPr wrap="square" lIns="36576" tIns="36576" rIns="36576" bIns="36576" anchor="t">
-            <a:spAutoFit/>
-          </a:bodyPr>
-          <a:lstStyle/>
-          <a:p>
-            <a:pPr algn="l">
-              <a:spcAft>
-                <a:spcPts val="0"/>
-              </a:spcAft>
-            </a:pPr>
-            <a:r>
-              <a:rPr sz="1700" b="1" dirty="0" err="1">
-                <a:solidFill>
-                  <a:srgbClr val="1C3750"/>
-                </a:solidFill>
-                <a:latin typeface="Aptos"/>
-              </a:rPr>
-              <a:t>FoM</a:t>
-            </a:r>
-            <a:r>
-              <a:rPr sz="1700" b="1" dirty="0">
-                <a:solidFill>
-                  <a:srgbClr val="1C3750"/>
-                </a:solidFill>
-                <a:latin typeface="Aptos"/>
-              </a:rPr>
-              <a:t>     1.59 → </a:t>
-            </a:r>
-            <a:r>
-              <a:rPr lang="nl-NL" sz="1700" b="1" dirty="0">
-                <a:solidFill>
-                  <a:srgbClr val="1C3750"/>
-                </a:solidFill>
-                <a:latin typeface="Aptos"/>
-              </a:rPr>
-              <a:t>1</a:t>
-            </a:r>
-            <a:r>
-              <a:rPr sz="1700" b="1" dirty="0">
-                <a:solidFill>
-                  <a:srgbClr val="1C3750"/>
-                </a:solidFill>
-                <a:latin typeface="Aptos"/>
-              </a:rPr>
-              <a:t>4</a:t>
-            </a:r>
-            <a:r>
-              <a:rPr lang="nl-NL" sz="1700" b="1" dirty="0">
-                <a:solidFill>
-                  <a:srgbClr val="1C3750"/>
-                </a:solidFill>
-                <a:latin typeface="Aptos"/>
-              </a:rPr>
-              <a:t>.56</a:t>
-            </a:r>
-            <a:endParaRPr sz="1700" b="1" dirty="0">
-              <a:solidFill>
-                <a:srgbClr val="1C3750"/>
-              </a:solidFill>
-              <a:latin typeface="Aptos"/>
-            </a:endParaRPr>
-          </a:p>
-        </p:txBody>
-      </p:sp>
-      <p:sp>
-        <p:nvSpPr>
-          <p:cNvPr id="17" name="TextBox 16">
-            <a:extLst>
-              <a:ext uri="{FF2B5EF4-FFF2-40B4-BE49-F238E27FC236}">
-                <a16:creationId xmlns:a16="http://schemas.microsoft.com/office/drawing/2014/main" id="{E76781B5-0ABB-1222-4905-65CA122120A5}"/>
-              </a:ext>
-            </a:extLst>
-          </p:cNvPr>
-          <p:cNvSpPr txBox="1"/>
-          <p:nvPr/>
-        </p:nvSpPr>
-        <p:spPr>
-          <a:xfrm>
-            <a:off x="8394192" y="5285232"/>
-            <a:ext cx="2423160" cy="320040"/>
-          </a:xfrm>
-          <a:prstGeom prst="rect">
-            <a:avLst/>
-          </a:prstGeom>
-          <a:noFill/>
-        </p:spPr>
-        <p:txBody>
-          <a:bodyPr wrap="square" lIns="36576" tIns="36576" rIns="36576" bIns="36576" anchor="t">
-            <a:spAutoFit/>
-          </a:bodyPr>
-          <a:lstStyle/>
-          <a:p>
-            <a:pPr algn="l">
-              <a:spcAft>
-                <a:spcPts val="0"/>
-              </a:spcAft>
-            </a:pPr>
-            <a:r>
-              <a:rPr sz="1400" b="1">
-                <a:solidFill>
-                  <a:srgbClr val="188985"/>
-                </a:solidFill>
-                <a:latin typeface="Aptos"/>
-              </a:rPr>
-              <a:t>Models separate at 1σ</a:t>
-            </a:r>
-          </a:p>
-        </p:txBody>
-      </p:sp>
-      <p:pic>
-        <p:nvPicPr>
-          <p:cNvPr id="3" name="Picture 2">
-            <a:extLst>
-              <a:ext uri="{FF2B5EF4-FFF2-40B4-BE49-F238E27FC236}">
-                <a16:creationId xmlns:a16="http://schemas.microsoft.com/office/drawing/2014/main" id="{F326BDE6-6959-0A62-DECC-667916F4CBE1}"/>
-              </a:ext>
-            </a:extLst>
-          </p:cNvPr>
-          <p:cNvPicPr>
-            <a:picLocks noChangeAspect="1"/>
-          </p:cNvPicPr>
-          <p:nvPr/>
-        </p:nvPicPr>
-        <p:blipFill>
-          <a:blip r:embed="rId3"/>
-          <a:stretch>
-            <a:fillRect/>
-          </a:stretch>
-        </p:blipFill>
-        <p:spPr>
-          <a:xfrm>
-            <a:off x="838200" y="1346209"/>
-            <a:ext cx="6085005" cy="5070838"/>
-          </a:xfrm>
-          <a:prstGeom prst="rect">
-            <a:avLst/>
-          </a:prstGeom>
-        </p:spPr>
-      </p:pic>
-    </p:spTree>
-    <p:extLst>
-      <p:ext uri="{BB962C8B-B14F-4D97-AF65-F5344CB8AC3E}">
-        <p14:creationId xmlns:p14="http://schemas.microsoft.com/office/powerpoint/2010/main" val="3609588216"/>
-      </p:ext>
-    </p:extLst>
-  </p:cSld>
-  <p:clrMapOvr>
-    <a:masterClrMapping/>
-  </p:clrMapOvr>
-</p:sld>
-</file>
-
-<file path=ppt/slides/slide11.xml><?xml version="1.0" encoding="utf-8"?>
-<p:sld xmlns:a="http://schemas.openxmlformats.org/drawingml/2006/main" xmlns:r="http://schemas.openxmlformats.org/officeDocument/2006/relationships" xmlns:p="http://schemas.openxmlformats.org/presentationml/2006/main">
-  <p:cSld>
-    <p:spTree>
-      <p:nvGrpSpPr>
-        <p:cNvPr id="1" name=""/>
-        <p:cNvGrpSpPr/>
-        <p:nvPr/>
-      </p:nvGrpSpPr>
-      <p:grpSpPr>
-        <a:xfrm>
-          <a:off x="0" y="0"/>
-          <a:ext cx="0" cy="0"/>
-          <a:chOff x="0" y="0"/>
-          <a:chExt cx="0" cy="0"/>
-        </a:xfrm>
-      </p:grpSpPr>
-      <p:sp>
-        <p:nvSpPr>
-          <p:cNvPr id="5" name="Slide Number Placeholder 4">
-            <a:extLst>
-              <a:ext uri="{FF2B5EF4-FFF2-40B4-BE49-F238E27FC236}">
-                <a16:creationId xmlns:a16="http://schemas.microsoft.com/office/drawing/2014/main" id="{2B954FFC-143D-2C2C-F06D-C5CBE9C10F2F}"/>
-              </a:ext>
-            </a:extLst>
-          </p:cNvPr>
-          <p:cNvSpPr>
-            <a:spLocks noGrp="1"/>
-          </p:cNvSpPr>
-          <p:nvPr>
-            <p:ph type="sldNum" sz="quarter" idx="12"/>
-          </p:nvPr>
-        </p:nvSpPr>
-        <p:spPr/>
-        <p:txBody>
-          <a:bodyPr/>
-          <a:lstStyle/>
-          <a:p>
-            <a:fld id="{D3D74EA4-B172-9A48-808A-923F6A4D31D8}" type="slidenum">
-              <a:rPr lang="en-DE" smtClean="0"/>
-              <a:t>11</a:t>
             </a:fld>
             <a:endParaRPr lang="en-DE"/>
           </a:p>
@@ -6892,224 +6179,6 @@
       </p:grpSpPr>
       <p:sp>
         <p:nvSpPr>
-          <p:cNvPr id="2" name="Title 1">
-            <a:extLst>
-              <a:ext uri="{FF2B5EF4-FFF2-40B4-BE49-F238E27FC236}">
-                <a16:creationId xmlns:a16="http://schemas.microsoft.com/office/drawing/2014/main" id="{912C6545-5A3D-46D2-1B53-7A39929D2E4A}"/>
-              </a:ext>
-            </a:extLst>
-          </p:cNvPr>
-          <p:cNvSpPr>
-            <a:spLocks noGrp="1"/>
-          </p:cNvSpPr>
-          <p:nvPr>
-            <p:ph type="title"/>
-          </p:nvPr>
-        </p:nvSpPr>
-        <p:spPr/>
-        <p:txBody>
-          <a:bodyPr/>
-          <a:lstStyle/>
-          <a:p>
-            <a:r>
-              <a:rPr lang="en-DE" dirty="0"/>
-              <a:t>Cross Correlation</a:t>
-            </a:r>
-          </a:p>
-        </p:txBody>
-      </p:sp>
-      <mc:AlternateContent xmlns:mc="http://schemas.openxmlformats.org/markup-compatibility/2006" xmlns:a14="http://schemas.microsoft.com/office/drawing/2010/main">
-        <mc:Choice Requires="a14">
-          <p:sp>
-            <p:nvSpPr>
-              <p:cNvPr id="3" name="Content Placeholder 2">
-                <a:extLst>
-                  <a:ext uri="{FF2B5EF4-FFF2-40B4-BE49-F238E27FC236}">
-                    <a16:creationId xmlns:a16="http://schemas.microsoft.com/office/drawing/2014/main" id="{74CED974-75C2-26CE-382F-A2CF9DD0F2D8}"/>
-                  </a:ext>
-                </a:extLst>
-              </p:cNvPr>
-              <p:cNvSpPr>
-                <a:spLocks noGrp="1"/>
-              </p:cNvSpPr>
-              <p:nvPr>
-                <p:ph idx="1"/>
-              </p:nvPr>
-            </p:nvSpPr>
-            <p:spPr/>
-            <p:txBody>
-              <a:bodyPr/>
-              <a:lstStyle/>
-              <a:p>
-                <a:r>
-                  <a:rPr lang="en-DE" dirty="0"/>
-                  <a:t>FRBs and galaxies trace the same underlying matter distribution</a:t>
-                </a:r>
-              </a:p>
-              <a:p>
-                <a:r>
-                  <a:rPr lang="en-DE" dirty="0"/>
-                  <a:t>Angular power spectrum </a:t>
-                </a:r>
-                <a14:m>
-                  <m:oMath xmlns:m="http://schemas.openxmlformats.org/officeDocument/2006/math">
-                    <m:sSub>
-                      <m:sSubPr>
-                        <m:ctrlPr>
-                          <a:rPr lang="en-DE" i="1" dirty="0" smtClean="0">
-                            <a:latin typeface="Cambria Math" panose="02040503050406030204" pitchFamily="18" charset="0"/>
-                          </a:rPr>
-                        </m:ctrlPr>
-                      </m:sSubPr>
-                      <m:e>
-                        <m:r>
-                          <a:rPr lang="en-DE" i="1" dirty="0" smtClean="0">
-                            <a:latin typeface="Cambria Math" panose="02040503050406030204" pitchFamily="18" charset="0"/>
-                          </a:rPr>
-                          <m:t>𝐶</m:t>
-                        </m:r>
-                      </m:e>
-                      <m:sub>
-                        <m:r>
-                          <a:rPr lang="nl-NL" b="0" i="1" dirty="0" smtClean="0">
-                            <a:latin typeface="Cambria Math" panose="02040503050406030204" pitchFamily="18" charset="0"/>
-                          </a:rPr>
-                          <m:t>𝑙</m:t>
-                        </m:r>
-                      </m:sub>
-                    </m:sSub>
-                    <m:r>
-                      <a:rPr lang="en-DE" i="1" dirty="0" smtClean="0">
-                        <a:latin typeface="Cambria Math" panose="02040503050406030204" pitchFamily="18" charset="0"/>
-                      </a:rPr>
-                      <m:t>: </m:t>
-                    </m:r>
-                  </m:oMath>
-                </a14:m>
-                <a:r>
-                  <a:rPr lang="en-DE" dirty="0"/>
-                  <a:t>clustering as a function of angular scale</a:t>
-                </a:r>
-              </a:p>
-              <a:p>
-                <a:r>
-                  <a:rPr lang="en-DE" dirty="0"/>
-                  <a:t>A cross-signal requires spatial overlap</a:t>
-                </a:r>
-              </a:p>
-              <a:p>
-                <a:r>
-                  <a:rPr lang="en-DE" dirty="0"/>
-                  <a:t>Tomography provides several redshift windows</a:t>
-                </a:r>
-              </a:p>
-              <a:p>
-                <a:endParaRPr lang="en-DE" dirty="0"/>
-              </a:p>
-            </p:txBody>
-          </p:sp>
-        </mc:Choice>
-        <mc:Fallback xmlns="">
-          <p:sp>
-            <p:nvSpPr>
-              <p:cNvPr id="3" name="Content Placeholder 2">
-                <a:extLst>
-                  <a:ext uri="{FF2B5EF4-FFF2-40B4-BE49-F238E27FC236}">
-                    <a16:creationId xmlns:a16="http://schemas.microsoft.com/office/drawing/2014/main" id="{74CED974-75C2-26CE-382F-A2CF9DD0F2D8}"/>
-                  </a:ext>
-                </a:extLst>
-              </p:cNvPr>
-              <p:cNvSpPr>
-                <a:spLocks noGrp="1" noRot="1" noChangeAspect="1" noMove="1" noResize="1" noEditPoints="1" noAdjustHandles="1" noChangeArrowheads="1" noChangeShapeType="1" noTextEdit="1"/>
-              </p:cNvSpPr>
-              <p:nvPr>
-                <p:ph idx="1"/>
-              </p:nvPr>
-            </p:nvSpPr>
-            <p:spPr>
-              <a:blipFill>
-                <a:blip r:embed="rId3"/>
-                <a:stretch>
-                  <a:fillRect l="-1086" t="-2326"/>
-                </a:stretch>
-              </a:blipFill>
-            </p:spPr>
-            <p:txBody>
-              <a:bodyPr/>
-              <a:lstStyle/>
-              <a:p>
-                <a:r>
-                  <a:rPr lang="en-DE">
-                    <a:noFill/>
-                  </a:rPr>
-                  <a:t> </a:t>
-                </a:r>
-              </a:p>
-            </p:txBody>
-          </p:sp>
-        </mc:Fallback>
-      </mc:AlternateContent>
-      <p:sp>
-        <p:nvSpPr>
-          <p:cNvPr id="5" name="Slide Number Placeholder 4">
-            <a:extLst>
-              <a:ext uri="{FF2B5EF4-FFF2-40B4-BE49-F238E27FC236}">
-                <a16:creationId xmlns:a16="http://schemas.microsoft.com/office/drawing/2014/main" id="{F01AA30D-D09A-4947-5796-0CC9A34B4499}"/>
-              </a:ext>
-            </a:extLst>
-          </p:cNvPr>
-          <p:cNvSpPr>
-            <a:spLocks noGrp="1"/>
-          </p:cNvSpPr>
-          <p:nvPr>
-            <p:ph type="sldNum" sz="quarter" idx="12"/>
-          </p:nvPr>
-        </p:nvSpPr>
-        <p:spPr/>
-        <p:txBody>
-          <a:bodyPr/>
-          <a:lstStyle/>
-          <a:p>
-            <a:fld id="{D3D74EA4-B172-9A48-808A-923F6A4D31D8}" type="slidenum">
-              <a:rPr lang="en-DE" smtClean="0"/>
-              <a:t>4</a:t>
-            </a:fld>
-            <a:endParaRPr lang="en-DE"/>
-          </a:p>
-        </p:txBody>
-      </p:sp>
-    </p:spTree>
-    <p:extLst>
-      <p:ext uri="{BB962C8B-B14F-4D97-AF65-F5344CB8AC3E}">
-        <p14:creationId xmlns:p14="http://schemas.microsoft.com/office/powerpoint/2010/main" val="1447242949"/>
-      </p:ext>
-    </p:extLst>
-  </p:cSld>
-  <p:clrMapOvr>
-    <a:masterClrMapping/>
-  </p:clrMapOvr>
-</p:sld>
-</file>
-
-<file path=ppt/slides/slide5.xml><?xml version="1.0" encoding="utf-8"?>
-<p:sld xmlns:a="http://schemas.openxmlformats.org/drawingml/2006/main" xmlns:r="http://schemas.openxmlformats.org/officeDocument/2006/relationships" xmlns:p="http://schemas.openxmlformats.org/presentationml/2006/main">
-  <p:cSld>
-    <p:spTree>
-      <p:nvGrpSpPr>
-        <p:cNvPr id="1" name=""/>
-        <p:cNvGrpSpPr/>
-        <p:nvPr/>
-      </p:nvGrpSpPr>
-      <p:grpSpPr>
-        <a:xfrm>
-          <a:off x="0" y="0"/>
-          <a:ext cx="0" cy="0"/>
-          <a:chOff x="0" y="0"/>
-          <a:chExt cx="0" cy="0"/>
-        </a:xfrm>
-      </p:grpSpPr>
-      <p:sp>
-        <p:nvSpPr>
           <p:cNvPr id="13" name="Rounded Rectangle 12">
             <a:extLst>
               <a:ext uri="{FF2B5EF4-FFF2-40B4-BE49-F238E27FC236}">
@@ -7185,7 +6254,7 @@
           <a:p>
             <a:fld id="{D3D74EA4-B172-9A48-808A-923F6A4D31D8}" type="slidenum">
               <a:rPr lang="en-DE" smtClean="0"/>
-              <a:t>5</a:t>
+              <a:t>4</a:t>
             </a:fld>
             <a:endParaRPr lang="en-DE"/>
           </a:p>
@@ -7940,6 +7009,1538 @@
 </p:sld>
 </file>
 
+<file path=ppt/slides/slide5.xml><?xml version="1.0" encoding="utf-8"?>
+<p:sld xmlns:a="http://schemas.openxmlformats.org/drawingml/2006/main" xmlns:r="http://schemas.openxmlformats.org/officeDocument/2006/relationships" xmlns:p="http://schemas.openxmlformats.org/presentationml/2006/main">
+  <p:cSld>
+    <p:spTree>
+      <p:nvGrpSpPr>
+        <p:cNvPr id="1" name=""/>
+        <p:cNvGrpSpPr/>
+        <p:nvPr/>
+      </p:nvGrpSpPr>
+      <p:grpSpPr>
+        <a:xfrm>
+          <a:off x="0" y="0"/>
+          <a:ext cx="0" cy="0"/>
+          <a:chOff x="0" y="0"/>
+          <a:chExt cx="0" cy="0"/>
+        </a:xfrm>
+      </p:grpSpPr>
+      <p:sp>
+        <p:nvSpPr>
+          <p:cNvPr id="5" name="Slide Number Placeholder 4">
+            <a:extLst>
+              <a:ext uri="{FF2B5EF4-FFF2-40B4-BE49-F238E27FC236}">
+                <a16:creationId xmlns:a16="http://schemas.microsoft.com/office/drawing/2014/main" id="{E24AA21E-9992-DD87-D4E6-3B1CAD395283}"/>
+              </a:ext>
+            </a:extLst>
+          </p:cNvPr>
+          <p:cNvSpPr>
+            <a:spLocks noGrp="1"/>
+          </p:cNvSpPr>
+          <p:nvPr>
+            <p:ph type="sldNum" sz="quarter" idx="12"/>
+          </p:nvPr>
+        </p:nvSpPr>
+        <p:spPr/>
+        <p:txBody>
+          <a:bodyPr/>
+          <a:lstStyle/>
+          <a:p>
+            <a:fld id="{D3D74EA4-B172-9A48-808A-923F6A4D31D8}" type="slidenum">
+              <a:rPr lang="en-DE" smtClean="0"/>
+              <a:t>5</a:t>
+            </a:fld>
+            <a:endParaRPr lang="en-DE"/>
+          </a:p>
+        </p:txBody>
+      </p:sp>
+      <p:sp>
+        <p:nvSpPr>
+          <p:cNvPr id="9" name="TextBox 8">
+            <a:extLst>
+              <a:ext uri="{FF2B5EF4-FFF2-40B4-BE49-F238E27FC236}">
+                <a16:creationId xmlns:a16="http://schemas.microsoft.com/office/drawing/2014/main" id="{02063184-E09F-DBCA-C58B-753DAF5840BA}"/>
+              </a:ext>
+            </a:extLst>
+          </p:cNvPr>
+          <p:cNvSpPr txBox="1"/>
+          <p:nvPr/>
+        </p:nvSpPr>
+        <p:spPr>
+          <a:xfrm>
+            <a:off x="502920" y="676656"/>
+            <a:ext cx="10881360" cy="750975"/>
+          </a:xfrm>
+          <a:prstGeom prst="rect">
+            <a:avLst/>
+          </a:prstGeom>
+          <a:noFill/>
+        </p:spPr>
+        <p:txBody>
+          <a:bodyPr wrap="square" lIns="36576" tIns="36576" rIns="36576" bIns="36576" anchor="t">
+            <a:spAutoFit/>
+          </a:bodyPr>
+          <a:lstStyle/>
+          <a:p>
+            <a:pPr algn="l">
+              <a:spcAft>
+                <a:spcPts val="0"/>
+              </a:spcAft>
+            </a:pPr>
+            <a:r>
+              <a:rPr sz="4400" b="1" dirty="0">
+                <a:latin typeface="Aptos Display"/>
+              </a:rPr>
+              <a:t>Numerical Pipeline</a:t>
+            </a:r>
+          </a:p>
+        </p:txBody>
+      </p:sp>
+      <p:sp>
+        <p:nvSpPr>
+          <p:cNvPr id="11" name="Rounded Rectangle 10">
+            <a:extLst>
+              <a:ext uri="{FF2B5EF4-FFF2-40B4-BE49-F238E27FC236}">
+                <a16:creationId xmlns:a16="http://schemas.microsoft.com/office/drawing/2014/main" id="{CAA9A0F5-CBFE-7E03-86F6-0CEA88030AA9}"/>
+              </a:ext>
+            </a:extLst>
+          </p:cNvPr>
+          <p:cNvSpPr/>
+          <p:nvPr/>
+        </p:nvSpPr>
+        <p:spPr>
+          <a:xfrm>
+            <a:off x="566928" y="1691640"/>
+            <a:ext cx="1920240" cy="1280160"/>
+          </a:xfrm>
+          <a:prstGeom prst="roundRect">
+            <a:avLst>
+              <a:gd name="adj" fmla="val 8000"/>
+            </a:avLst>
+          </a:prstGeom>
+          <a:solidFill>
+            <a:srgbClr val="FFFFFF"/>
+          </a:solidFill>
+          <a:ln>
+            <a:solidFill>
+              <a:srgbClr val="D2D7D7"/>
+            </a:solidFill>
+          </a:ln>
+        </p:spPr>
+        <p:style>
+          <a:lnRef idx="1">
+            <a:schemeClr val="accent1"/>
+          </a:lnRef>
+          <a:fillRef idx="3">
+            <a:schemeClr val="accent1"/>
+          </a:fillRef>
+          <a:effectRef idx="2">
+            <a:schemeClr val="accent1"/>
+          </a:effectRef>
+          <a:fontRef idx="minor">
+            <a:schemeClr val="lt1"/>
+          </a:fontRef>
+        </p:style>
+        <p:txBody>
+          <a:bodyPr rtlCol="0" anchor="ctr"/>
+          <a:lstStyle/>
+          <a:p>
+            <a:pPr algn="ctr"/>
+            <a:endParaRPr/>
+          </a:p>
+        </p:txBody>
+      </p:sp>
+      <p:sp>
+        <p:nvSpPr>
+          <p:cNvPr id="12" name="TextBox 11">
+            <a:extLst>
+              <a:ext uri="{FF2B5EF4-FFF2-40B4-BE49-F238E27FC236}">
+                <a16:creationId xmlns:a16="http://schemas.microsoft.com/office/drawing/2014/main" id="{2353D306-1D06-9EDD-8311-6D39269BDA4F}"/>
+              </a:ext>
+            </a:extLst>
+          </p:cNvPr>
+          <p:cNvSpPr txBox="1"/>
+          <p:nvPr/>
+        </p:nvSpPr>
+        <p:spPr>
+          <a:xfrm>
+            <a:off x="722376" y="1874519"/>
+            <a:ext cx="384048" cy="274320"/>
+          </a:xfrm>
+          <a:prstGeom prst="rect">
+            <a:avLst/>
+          </a:prstGeom>
+          <a:noFill/>
+        </p:spPr>
+        <p:txBody>
+          <a:bodyPr wrap="square" lIns="36576" tIns="36576" rIns="36576" bIns="36576" anchor="t">
+            <a:spAutoFit/>
+          </a:bodyPr>
+          <a:lstStyle/>
+          <a:p>
+            <a:pPr algn="l">
+              <a:spcAft>
+                <a:spcPts val="0"/>
+              </a:spcAft>
+            </a:pPr>
+            <a:r>
+              <a:rPr sz="1100" b="1">
+                <a:solidFill>
+                  <a:srgbClr val="1C3750"/>
+                </a:solidFill>
+                <a:latin typeface="Aptos"/>
+              </a:rPr>
+              <a:t>01</a:t>
+            </a:r>
+          </a:p>
+        </p:txBody>
+      </p:sp>
+      <p:sp>
+        <p:nvSpPr>
+          <p:cNvPr id="13" name="TextBox 12">
+            <a:extLst>
+              <a:ext uri="{FF2B5EF4-FFF2-40B4-BE49-F238E27FC236}">
+                <a16:creationId xmlns:a16="http://schemas.microsoft.com/office/drawing/2014/main" id="{5C8993CD-FD44-D8D7-6141-7915DCB99042}"/>
+              </a:ext>
+            </a:extLst>
+          </p:cNvPr>
+          <p:cNvSpPr txBox="1"/>
+          <p:nvPr/>
+        </p:nvSpPr>
+        <p:spPr>
+          <a:xfrm>
+            <a:off x="722376" y="2212848"/>
+            <a:ext cx="1600200" cy="274320"/>
+          </a:xfrm>
+          <a:prstGeom prst="rect">
+            <a:avLst/>
+          </a:prstGeom>
+          <a:noFill/>
+        </p:spPr>
+        <p:txBody>
+          <a:bodyPr wrap="square" lIns="36576" tIns="36576" rIns="36576" bIns="36576" anchor="t">
+            <a:spAutoFit/>
+          </a:bodyPr>
+          <a:lstStyle/>
+          <a:p>
+            <a:pPr algn="l">
+              <a:spcAft>
+                <a:spcPts val="0"/>
+              </a:spcAft>
+            </a:pPr>
+            <a:r>
+              <a:rPr sz="1500" b="1">
+                <a:solidFill>
+                  <a:srgbClr val="1C3750"/>
+                </a:solidFill>
+                <a:latin typeface="Aptos"/>
+              </a:rPr>
+              <a:t>Planck 2018</a:t>
+            </a:r>
+          </a:p>
+        </p:txBody>
+      </p:sp>
+      <p:sp>
+        <p:nvSpPr>
+          <p:cNvPr id="14" name="TextBox 13">
+            <a:extLst>
+              <a:ext uri="{FF2B5EF4-FFF2-40B4-BE49-F238E27FC236}">
+                <a16:creationId xmlns:a16="http://schemas.microsoft.com/office/drawing/2014/main" id="{57823965-93A0-029E-1196-C2931958E6B7}"/>
+              </a:ext>
+            </a:extLst>
+          </p:cNvPr>
+          <p:cNvSpPr txBox="1"/>
+          <p:nvPr/>
+        </p:nvSpPr>
+        <p:spPr>
+          <a:xfrm>
+            <a:off x="722376" y="2578608"/>
+            <a:ext cx="1600200" cy="228600"/>
+          </a:xfrm>
+          <a:prstGeom prst="rect">
+            <a:avLst/>
+          </a:prstGeom>
+          <a:noFill/>
+        </p:spPr>
+        <p:txBody>
+          <a:bodyPr wrap="square" lIns="36576" tIns="36576" rIns="36576" bIns="36576" anchor="t">
+            <a:spAutoFit/>
+          </a:bodyPr>
+          <a:lstStyle/>
+          <a:p>
+            <a:pPr algn="l">
+              <a:spcAft>
+                <a:spcPts val="0"/>
+              </a:spcAft>
+            </a:pPr>
+            <a:r>
+              <a:rPr sz="1100" b="0">
+                <a:solidFill>
+                  <a:srgbClr val="5B6771"/>
+                </a:solidFill>
+                <a:latin typeface="Aptos"/>
+              </a:rPr>
+              <a:t>ΛCDM cosmology</a:t>
+            </a:r>
+          </a:p>
+        </p:txBody>
+      </p:sp>
+      <p:sp>
+        <p:nvSpPr>
+          <p:cNvPr id="15" name="TextBox 14">
+            <a:extLst>
+              <a:ext uri="{FF2B5EF4-FFF2-40B4-BE49-F238E27FC236}">
+                <a16:creationId xmlns:a16="http://schemas.microsoft.com/office/drawing/2014/main" id="{755ECB53-6089-EFB2-805E-0C86DA647475}"/>
+              </a:ext>
+            </a:extLst>
+          </p:cNvPr>
+          <p:cNvSpPr txBox="1"/>
+          <p:nvPr/>
+        </p:nvSpPr>
+        <p:spPr>
+          <a:xfrm>
+            <a:off x="2505456" y="2121408"/>
+            <a:ext cx="347472" cy="411480"/>
+          </a:xfrm>
+          <a:prstGeom prst="rect">
+            <a:avLst/>
+          </a:prstGeom>
+          <a:noFill/>
+        </p:spPr>
+        <p:txBody>
+          <a:bodyPr wrap="square" lIns="36576" tIns="36576" rIns="36576" bIns="36576" anchor="t">
+            <a:spAutoFit/>
+          </a:bodyPr>
+          <a:lstStyle/>
+          <a:p>
+            <a:pPr algn="ctr">
+              <a:spcAft>
+                <a:spcPts val="0"/>
+              </a:spcAft>
+            </a:pPr>
+            <a:r>
+              <a:rPr sz="2200" b="1">
+                <a:solidFill>
+                  <a:srgbClr val="D2D7D7"/>
+                </a:solidFill>
+                <a:latin typeface="Aptos"/>
+              </a:rPr>
+              <a:t>→</a:t>
+            </a:r>
+          </a:p>
+        </p:txBody>
+      </p:sp>
+      <p:sp>
+        <p:nvSpPr>
+          <p:cNvPr id="16" name="Rounded Rectangle 15">
+            <a:extLst>
+              <a:ext uri="{FF2B5EF4-FFF2-40B4-BE49-F238E27FC236}">
+                <a16:creationId xmlns:a16="http://schemas.microsoft.com/office/drawing/2014/main" id="{E2FC3EE9-D5FA-B6E9-2BE3-FE4194C0E503}"/>
+              </a:ext>
+            </a:extLst>
+          </p:cNvPr>
+          <p:cNvSpPr/>
+          <p:nvPr/>
+        </p:nvSpPr>
+        <p:spPr>
+          <a:xfrm>
+            <a:off x="2871216" y="1691640"/>
+            <a:ext cx="1920240" cy="1280160"/>
+          </a:xfrm>
+          <a:prstGeom prst="roundRect">
+            <a:avLst>
+              <a:gd name="adj" fmla="val 8000"/>
+            </a:avLst>
+          </a:prstGeom>
+          <a:solidFill>
+            <a:srgbClr val="FFFFFF"/>
+          </a:solidFill>
+          <a:ln>
+            <a:solidFill>
+              <a:srgbClr val="D2D7D7"/>
+            </a:solidFill>
+          </a:ln>
+        </p:spPr>
+        <p:style>
+          <a:lnRef idx="1">
+            <a:schemeClr val="accent1"/>
+          </a:lnRef>
+          <a:fillRef idx="3">
+            <a:schemeClr val="accent1"/>
+          </a:fillRef>
+          <a:effectRef idx="2">
+            <a:schemeClr val="accent1"/>
+          </a:effectRef>
+          <a:fontRef idx="minor">
+            <a:schemeClr val="lt1"/>
+          </a:fontRef>
+        </p:style>
+        <p:txBody>
+          <a:bodyPr rtlCol="0" anchor="ctr"/>
+          <a:lstStyle/>
+          <a:p>
+            <a:pPr algn="ctr"/>
+            <a:endParaRPr/>
+          </a:p>
+        </p:txBody>
+      </p:sp>
+      <p:sp>
+        <p:nvSpPr>
+          <p:cNvPr id="17" name="TextBox 16">
+            <a:extLst>
+              <a:ext uri="{FF2B5EF4-FFF2-40B4-BE49-F238E27FC236}">
+                <a16:creationId xmlns:a16="http://schemas.microsoft.com/office/drawing/2014/main" id="{2DDD3D45-24F2-03EA-6D17-837350F5A62C}"/>
+              </a:ext>
+            </a:extLst>
+          </p:cNvPr>
+          <p:cNvSpPr txBox="1"/>
+          <p:nvPr/>
+        </p:nvSpPr>
+        <p:spPr>
+          <a:xfrm>
+            <a:off x="3026664" y="1874519"/>
+            <a:ext cx="384048" cy="274320"/>
+          </a:xfrm>
+          <a:prstGeom prst="rect">
+            <a:avLst/>
+          </a:prstGeom>
+          <a:noFill/>
+        </p:spPr>
+        <p:txBody>
+          <a:bodyPr wrap="square" lIns="36576" tIns="36576" rIns="36576" bIns="36576" anchor="t">
+            <a:spAutoFit/>
+          </a:bodyPr>
+          <a:lstStyle/>
+          <a:p>
+            <a:pPr algn="l">
+              <a:spcAft>
+                <a:spcPts val="0"/>
+              </a:spcAft>
+            </a:pPr>
+            <a:r>
+              <a:rPr sz="1100" b="1">
+                <a:solidFill>
+                  <a:srgbClr val="188985"/>
+                </a:solidFill>
+                <a:latin typeface="Aptos"/>
+              </a:rPr>
+              <a:t>02</a:t>
+            </a:r>
+          </a:p>
+        </p:txBody>
+      </p:sp>
+      <p:sp>
+        <p:nvSpPr>
+          <p:cNvPr id="18" name="TextBox 17">
+            <a:extLst>
+              <a:ext uri="{FF2B5EF4-FFF2-40B4-BE49-F238E27FC236}">
+                <a16:creationId xmlns:a16="http://schemas.microsoft.com/office/drawing/2014/main" id="{CFFCCA75-2ED6-D00F-E1EF-358C8959BB9F}"/>
+              </a:ext>
+            </a:extLst>
+          </p:cNvPr>
+          <p:cNvSpPr txBox="1"/>
+          <p:nvPr/>
+        </p:nvSpPr>
+        <p:spPr>
+          <a:xfrm>
+            <a:off x="3026664" y="2212848"/>
+            <a:ext cx="1600200" cy="274320"/>
+          </a:xfrm>
+          <a:prstGeom prst="rect">
+            <a:avLst/>
+          </a:prstGeom>
+          <a:noFill/>
+        </p:spPr>
+        <p:txBody>
+          <a:bodyPr wrap="square" lIns="36576" tIns="36576" rIns="36576" bIns="36576" anchor="t">
+            <a:spAutoFit/>
+          </a:bodyPr>
+          <a:lstStyle/>
+          <a:p>
+            <a:pPr algn="l">
+              <a:spcAft>
+                <a:spcPts val="0"/>
+              </a:spcAft>
+            </a:pPr>
+            <a:r>
+              <a:rPr sz="1500" b="1">
+                <a:solidFill>
+                  <a:srgbClr val="1C3750"/>
+                </a:solidFill>
+                <a:latin typeface="Aptos"/>
+              </a:rPr>
+              <a:t>Matter field</a:t>
+            </a:r>
+          </a:p>
+        </p:txBody>
+      </p:sp>
+      <p:sp>
+        <p:nvSpPr>
+          <p:cNvPr id="19" name="TextBox 18">
+            <a:extLst>
+              <a:ext uri="{FF2B5EF4-FFF2-40B4-BE49-F238E27FC236}">
+                <a16:creationId xmlns:a16="http://schemas.microsoft.com/office/drawing/2014/main" id="{E8897D35-FC6A-C482-8AD3-6304B516D847}"/>
+              </a:ext>
+            </a:extLst>
+          </p:cNvPr>
+          <p:cNvSpPr txBox="1"/>
+          <p:nvPr/>
+        </p:nvSpPr>
+        <p:spPr>
+          <a:xfrm>
+            <a:off x="3026664" y="2578608"/>
+            <a:ext cx="1600200" cy="228600"/>
+          </a:xfrm>
+          <a:prstGeom prst="rect">
+            <a:avLst/>
+          </a:prstGeom>
+          <a:noFill/>
+        </p:spPr>
+        <p:txBody>
+          <a:bodyPr wrap="square" lIns="36576" tIns="36576" rIns="36576" bIns="36576" anchor="t">
+            <a:spAutoFit/>
+          </a:bodyPr>
+          <a:lstStyle/>
+          <a:p>
+            <a:pPr algn="l">
+              <a:spcAft>
+                <a:spcPts val="0"/>
+              </a:spcAft>
+            </a:pPr>
+            <a:r>
+              <a:rPr sz="1100" b="0">
+                <a:solidFill>
+                  <a:srgbClr val="5B6771"/>
+                </a:solidFill>
+                <a:latin typeface="Aptos"/>
+              </a:rPr>
+              <a:t>non-linear P(k,z)</a:t>
+            </a:r>
+          </a:p>
+        </p:txBody>
+      </p:sp>
+      <p:sp>
+        <p:nvSpPr>
+          <p:cNvPr id="20" name="TextBox 19">
+            <a:extLst>
+              <a:ext uri="{FF2B5EF4-FFF2-40B4-BE49-F238E27FC236}">
+                <a16:creationId xmlns:a16="http://schemas.microsoft.com/office/drawing/2014/main" id="{6F07F77C-5D10-185B-DD70-63C5BDEBB191}"/>
+              </a:ext>
+            </a:extLst>
+          </p:cNvPr>
+          <p:cNvSpPr txBox="1"/>
+          <p:nvPr/>
+        </p:nvSpPr>
+        <p:spPr>
+          <a:xfrm>
+            <a:off x="4809744" y="2121408"/>
+            <a:ext cx="347472" cy="411480"/>
+          </a:xfrm>
+          <a:prstGeom prst="rect">
+            <a:avLst/>
+          </a:prstGeom>
+          <a:noFill/>
+        </p:spPr>
+        <p:txBody>
+          <a:bodyPr wrap="square" lIns="36576" tIns="36576" rIns="36576" bIns="36576" anchor="t">
+            <a:spAutoFit/>
+          </a:bodyPr>
+          <a:lstStyle/>
+          <a:p>
+            <a:pPr algn="ctr">
+              <a:spcAft>
+                <a:spcPts val="0"/>
+              </a:spcAft>
+            </a:pPr>
+            <a:r>
+              <a:rPr sz="2200" b="1">
+                <a:solidFill>
+                  <a:srgbClr val="D2D7D7"/>
+                </a:solidFill>
+                <a:latin typeface="Aptos"/>
+              </a:rPr>
+              <a:t>→</a:t>
+            </a:r>
+          </a:p>
+        </p:txBody>
+      </p:sp>
+      <p:sp>
+        <p:nvSpPr>
+          <p:cNvPr id="21" name="Rounded Rectangle 20">
+            <a:extLst>
+              <a:ext uri="{FF2B5EF4-FFF2-40B4-BE49-F238E27FC236}">
+                <a16:creationId xmlns:a16="http://schemas.microsoft.com/office/drawing/2014/main" id="{B032E782-2695-8BB6-C946-54E3D5227A2C}"/>
+              </a:ext>
+            </a:extLst>
+          </p:cNvPr>
+          <p:cNvSpPr/>
+          <p:nvPr/>
+        </p:nvSpPr>
+        <p:spPr>
+          <a:xfrm>
+            <a:off x="5175504" y="1691640"/>
+            <a:ext cx="1920240" cy="1280160"/>
+          </a:xfrm>
+          <a:prstGeom prst="roundRect">
+            <a:avLst>
+              <a:gd name="adj" fmla="val 8000"/>
+            </a:avLst>
+          </a:prstGeom>
+          <a:solidFill>
+            <a:srgbClr val="FFFFFF"/>
+          </a:solidFill>
+          <a:ln>
+            <a:solidFill>
+              <a:srgbClr val="D2D7D7"/>
+            </a:solidFill>
+          </a:ln>
+        </p:spPr>
+        <p:style>
+          <a:lnRef idx="1">
+            <a:schemeClr val="accent1"/>
+          </a:lnRef>
+          <a:fillRef idx="3">
+            <a:schemeClr val="accent1"/>
+          </a:fillRef>
+          <a:effectRef idx="2">
+            <a:schemeClr val="accent1"/>
+          </a:effectRef>
+          <a:fontRef idx="minor">
+            <a:schemeClr val="lt1"/>
+          </a:fontRef>
+        </p:style>
+        <p:txBody>
+          <a:bodyPr rtlCol="0" anchor="ctr"/>
+          <a:lstStyle/>
+          <a:p>
+            <a:pPr algn="ctr"/>
+            <a:endParaRPr/>
+          </a:p>
+        </p:txBody>
+      </p:sp>
+      <p:sp>
+        <p:nvSpPr>
+          <p:cNvPr id="22" name="TextBox 21">
+            <a:extLst>
+              <a:ext uri="{FF2B5EF4-FFF2-40B4-BE49-F238E27FC236}">
+                <a16:creationId xmlns:a16="http://schemas.microsoft.com/office/drawing/2014/main" id="{49C14156-BF32-EB1B-C65E-F69B87C0BAF6}"/>
+              </a:ext>
+            </a:extLst>
+          </p:cNvPr>
+          <p:cNvSpPr txBox="1"/>
+          <p:nvPr/>
+        </p:nvSpPr>
+        <p:spPr>
+          <a:xfrm>
+            <a:off x="5330952" y="1874519"/>
+            <a:ext cx="384048" cy="274320"/>
+          </a:xfrm>
+          <a:prstGeom prst="rect">
+            <a:avLst/>
+          </a:prstGeom>
+          <a:noFill/>
+        </p:spPr>
+        <p:txBody>
+          <a:bodyPr wrap="square" lIns="36576" tIns="36576" rIns="36576" bIns="36576" anchor="t">
+            <a:spAutoFit/>
+          </a:bodyPr>
+          <a:lstStyle/>
+          <a:p>
+            <a:pPr algn="l">
+              <a:spcAft>
+                <a:spcPts val="0"/>
+              </a:spcAft>
+            </a:pPr>
+            <a:r>
+              <a:rPr sz="1100" b="1">
+                <a:solidFill>
+                  <a:srgbClr val="DD5B4A"/>
+                </a:solidFill>
+                <a:latin typeface="Aptos"/>
+              </a:rPr>
+              <a:t>03</a:t>
+            </a:r>
+          </a:p>
+        </p:txBody>
+      </p:sp>
+      <p:sp>
+        <p:nvSpPr>
+          <p:cNvPr id="23" name="TextBox 22">
+            <a:extLst>
+              <a:ext uri="{FF2B5EF4-FFF2-40B4-BE49-F238E27FC236}">
+                <a16:creationId xmlns:a16="http://schemas.microsoft.com/office/drawing/2014/main" id="{8CF2CF50-D8BD-9475-7C40-4BF6FD7DF391}"/>
+              </a:ext>
+            </a:extLst>
+          </p:cNvPr>
+          <p:cNvSpPr txBox="1"/>
+          <p:nvPr/>
+        </p:nvSpPr>
+        <p:spPr>
+          <a:xfrm>
+            <a:off x="5330952" y="2212848"/>
+            <a:ext cx="1600200" cy="274320"/>
+          </a:xfrm>
+          <a:prstGeom prst="rect">
+            <a:avLst/>
+          </a:prstGeom>
+          <a:noFill/>
+        </p:spPr>
+        <p:txBody>
+          <a:bodyPr wrap="square" lIns="36576" tIns="36576" rIns="36576" bIns="36576" anchor="t">
+            <a:spAutoFit/>
+          </a:bodyPr>
+          <a:lstStyle/>
+          <a:p>
+            <a:pPr algn="l">
+              <a:spcAft>
+                <a:spcPts val="0"/>
+              </a:spcAft>
+            </a:pPr>
+            <a:r>
+              <a:rPr sz="1500" b="1">
+                <a:solidFill>
+                  <a:srgbClr val="1C3750"/>
+                </a:solidFill>
+                <a:latin typeface="Aptos"/>
+              </a:rPr>
+              <a:t>Radial kernels</a:t>
+            </a:r>
+          </a:p>
+        </p:txBody>
+      </p:sp>
+      <p:sp>
+        <p:nvSpPr>
+          <p:cNvPr id="24" name="TextBox 23">
+            <a:extLst>
+              <a:ext uri="{FF2B5EF4-FFF2-40B4-BE49-F238E27FC236}">
+                <a16:creationId xmlns:a16="http://schemas.microsoft.com/office/drawing/2014/main" id="{8FBE7D53-13D6-947C-8171-801F678DFA4F}"/>
+              </a:ext>
+            </a:extLst>
+          </p:cNvPr>
+          <p:cNvSpPr txBox="1"/>
+          <p:nvPr/>
+        </p:nvSpPr>
+        <p:spPr>
+          <a:xfrm>
+            <a:off x="5330952" y="2578608"/>
+            <a:ext cx="1600200" cy="228600"/>
+          </a:xfrm>
+          <a:prstGeom prst="rect">
+            <a:avLst/>
+          </a:prstGeom>
+          <a:noFill/>
+        </p:spPr>
+        <p:txBody>
+          <a:bodyPr wrap="square" lIns="36576" tIns="36576" rIns="36576" bIns="36576" anchor="t">
+            <a:spAutoFit/>
+          </a:bodyPr>
+          <a:lstStyle/>
+          <a:p>
+            <a:pPr algn="l">
+              <a:spcAft>
+                <a:spcPts val="0"/>
+              </a:spcAft>
+            </a:pPr>
+            <a:r>
+              <a:rPr sz="1100" b="0">
+                <a:solidFill>
+                  <a:srgbClr val="5B6771"/>
+                </a:solidFill>
+                <a:latin typeface="Aptos"/>
+              </a:rPr>
+              <a:t>selection × bias</a:t>
+            </a:r>
+          </a:p>
+        </p:txBody>
+      </p:sp>
+      <p:sp>
+        <p:nvSpPr>
+          <p:cNvPr id="25" name="TextBox 24">
+            <a:extLst>
+              <a:ext uri="{FF2B5EF4-FFF2-40B4-BE49-F238E27FC236}">
+                <a16:creationId xmlns:a16="http://schemas.microsoft.com/office/drawing/2014/main" id="{BE7F4397-4B36-4617-DA92-CA5C44228B6B}"/>
+              </a:ext>
+            </a:extLst>
+          </p:cNvPr>
+          <p:cNvSpPr txBox="1"/>
+          <p:nvPr/>
+        </p:nvSpPr>
+        <p:spPr>
+          <a:xfrm>
+            <a:off x="7114032" y="2121408"/>
+            <a:ext cx="347472" cy="411480"/>
+          </a:xfrm>
+          <a:prstGeom prst="rect">
+            <a:avLst/>
+          </a:prstGeom>
+          <a:noFill/>
+        </p:spPr>
+        <p:txBody>
+          <a:bodyPr wrap="square" lIns="36576" tIns="36576" rIns="36576" bIns="36576" anchor="t">
+            <a:spAutoFit/>
+          </a:bodyPr>
+          <a:lstStyle/>
+          <a:p>
+            <a:pPr algn="ctr">
+              <a:spcAft>
+                <a:spcPts val="0"/>
+              </a:spcAft>
+            </a:pPr>
+            <a:r>
+              <a:rPr sz="2200" b="1">
+                <a:solidFill>
+                  <a:srgbClr val="D2D7D7"/>
+                </a:solidFill>
+                <a:latin typeface="Aptos"/>
+              </a:rPr>
+              <a:t>→</a:t>
+            </a:r>
+          </a:p>
+        </p:txBody>
+      </p:sp>
+      <p:sp>
+        <p:nvSpPr>
+          <p:cNvPr id="26" name="Rounded Rectangle 25">
+            <a:extLst>
+              <a:ext uri="{FF2B5EF4-FFF2-40B4-BE49-F238E27FC236}">
+                <a16:creationId xmlns:a16="http://schemas.microsoft.com/office/drawing/2014/main" id="{25EB2FD0-4829-6FD1-0381-412724241D80}"/>
+              </a:ext>
+            </a:extLst>
+          </p:cNvPr>
+          <p:cNvSpPr/>
+          <p:nvPr/>
+        </p:nvSpPr>
+        <p:spPr>
+          <a:xfrm>
+            <a:off x="7479792" y="1691640"/>
+            <a:ext cx="1920240" cy="1280160"/>
+          </a:xfrm>
+          <a:prstGeom prst="roundRect">
+            <a:avLst>
+              <a:gd name="adj" fmla="val 8000"/>
+            </a:avLst>
+          </a:prstGeom>
+          <a:solidFill>
+            <a:srgbClr val="FFFFFF"/>
+          </a:solidFill>
+          <a:ln>
+            <a:solidFill>
+              <a:srgbClr val="D2D7D7"/>
+            </a:solidFill>
+          </a:ln>
+        </p:spPr>
+        <p:style>
+          <a:lnRef idx="1">
+            <a:schemeClr val="accent1"/>
+          </a:lnRef>
+          <a:fillRef idx="3">
+            <a:schemeClr val="accent1"/>
+          </a:fillRef>
+          <a:effectRef idx="2">
+            <a:schemeClr val="accent1"/>
+          </a:effectRef>
+          <a:fontRef idx="minor">
+            <a:schemeClr val="lt1"/>
+          </a:fontRef>
+        </p:style>
+        <p:txBody>
+          <a:bodyPr rtlCol="0" anchor="ctr"/>
+          <a:lstStyle/>
+          <a:p>
+            <a:pPr algn="ctr"/>
+            <a:endParaRPr/>
+          </a:p>
+        </p:txBody>
+      </p:sp>
+      <p:sp>
+        <p:nvSpPr>
+          <p:cNvPr id="27" name="TextBox 26">
+            <a:extLst>
+              <a:ext uri="{FF2B5EF4-FFF2-40B4-BE49-F238E27FC236}">
+                <a16:creationId xmlns:a16="http://schemas.microsoft.com/office/drawing/2014/main" id="{EF743BDF-BE00-74E1-CEA2-413BB3084ABC}"/>
+              </a:ext>
+            </a:extLst>
+          </p:cNvPr>
+          <p:cNvSpPr txBox="1"/>
+          <p:nvPr/>
+        </p:nvSpPr>
+        <p:spPr>
+          <a:xfrm>
+            <a:off x="7635240" y="1874519"/>
+            <a:ext cx="384048" cy="274320"/>
+          </a:xfrm>
+          <a:prstGeom prst="rect">
+            <a:avLst/>
+          </a:prstGeom>
+          <a:noFill/>
+        </p:spPr>
+        <p:txBody>
+          <a:bodyPr wrap="square" lIns="36576" tIns="36576" rIns="36576" bIns="36576" anchor="t">
+            <a:spAutoFit/>
+          </a:bodyPr>
+          <a:lstStyle/>
+          <a:p>
+            <a:pPr algn="l">
+              <a:spcAft>
+                <a:spcPts val="0"/>
+              </a:spcAft>
+            </a:pPr>
+            <a:r>
+              <a:rPr sz="1100" b="1">
+                <a:solidFill>
+                  <a:srgbClr val="DDA33A"/>
+                </a:solidFill>
+                <a:latin typeface="Aptos"/>
+              </a:rPr>
+              <a:t>04</a:t>
+            </a:r>
+          </a:p>
+        </p:txBody>
+      </p:sp>
+      <p:sp>
+        <p:nvSpPr>
+          <p:cNvPr id="28" name="TextBox 27">
+            <a:extLst>
+              <a:ext uri="{FF2B5EF4-FFF2-40B4-BE49-F238E27FC236}">
+                <a16:creationId xmlns:a16="http://schemas.microsoft.com/office/drawing/2014/main" id="{BB224279-04AF-1011-738E-E1FCD3843DF0}"/>
+              </a:ext>
+            </a:extLst>
+          </p:cNvPr>
+          <p:cNvSpPr txBox="1"/>
+          <p:nvPr/>
+        </p:nvSpPr>
+        <p:spPr>
+          <a:xfrm>
+            <a:off x="7635240" y="2212848"/>
+            <a:ext cx="1600200" cy="274320"/>
+          </a:xfrm>
+          <a:prstGeom prst="rect">
+            <a:avLst/>
+          </a:prstGeom>
+          <a:noFill/>
+        </p:spPr>
+        <p:txBody>
+          <a:bodyPr wrap="square" lIns="36576" tIns="36576" rIns="36576" bIns="36576" anchor="t">
+            <a:spAutoFit/>
+          </a:bodyPr>
+          <a:lstStyle/>
+          <a:p>
+            <a:pPr algn="l">
+              <a:spcAft>
+                <a:spcPts val="0"/>
+              </a:spcAft>
+            </a:pPr>
+            <a:r>
+              <a:rPr sz="1500" b="1">
+                <a:solidFill>
+                  <a:srgbClr val="1C3750"/>
+                </a:solidFill>
+                <a:latin typeface="Aptos"/>
+              </a:rPr>
+              <a:t>Projection</a:t>
+            </a:r>
+          </a:p>
+        </p:txBody>
+      </p:sp>
+      <p:sp>
+        <p:nvSpPr>
+          <p:cNvPr id="29" name="TextBox 28">
+            <a:extLst>
+              <a:ext uri="{FF2B5EF4-FFF2-40B4-BE49-F238E27FC236}">
+                <a16:creationId xmlns:a16="http://schemas.microsoft.com/office/drawing/2014/main" id="{851C8EFB-F614-4C15-39F0-9AFE482AF5B4}"/>
+              </a:ext>
+            </a:extLst>
+          </p:cNvPr>
+          <p:cNvSpPr txBox="1"/>
+          <p:nvPr/>
+        </p:nvSpPr>
+        <p:spPr>
+          <a:xfrm>
+            <a:off x="7635240" y="2578608"/>
+            <a:ext cx="1600200" cy="228600"/>
+          </a:xfrm>
+          <a:prstGeom prst="rect">
+            <a:avLst/>
+          </a:prstGeom>
+          <a:noFill/>
+        </p:spPr>
+        <p:txBody>
+          <a:bodyPr wrap="square" lIns="36576" tIns="36576" rIns="36576" bIns="36576" anchor="t">
+            <a:spAutoFit/>
+          </a:bodyPr>
+          <a:lstStyle/>
+          <a:p>
+            <a:pPr algn="l">
+              <a:spcAft>
+                <a:spcPts val="0"/>
+              </a:spcAft>
+            </a:pPr>
+            <a:r>
+              <a:rPr sz="1100" b="0">
+                <a:solidFill>
+                  <a:srgbClr val="5B6771"/>
+                </a:solidFill>
+                <a:latin typeface="Aptos"/>
+              </a:rPr>
+              <a:t>Limber → Cℓ</a:t>
+            </a:r>
+          </a:p>
+        </p:txBody>
+      </p:sp>
+      <p:sp>
+        <p:nvSpPr>
+          <p:cNvPr id="30" name="TextBox 29">
+            <a:extLst>
+              <a:ext uri="{FF2B5EF4-FFF2-40B4-BE49-F238E27FC236}">
+                <a16:creationId xmlns:a16="http://schemas.microsoft.com/office/drawing/2014/main" id="{4F875C1E-EFD4-9070-3F7D-F5E288833486}"/>
+              </a:ext>
+            </a:extLst>
+          </p:cNvPr>
+          <p:cNvSpPr txBox="1"/>
+          <p:nvPr/>
+        </p:nvSpPr>
+        <p:spPr>
+          <a:xfrm>
+            <a:off x="9418320" y="2121408"/>
+            <a:ext cx="347472" cy="411480"/>
+          </a:xfrm>
+          <a:prstGeom prst="rect">
+            <a:avLst/>
+          </a:prstGeom>
+          <a:noFill/>
+        </p:spPr>
+        <p:txBody>
+          <a:bodyPr wrap="square" lIns="36576" tIns="36576" rIns="36576" bIns="36576" anchor="t">
+            <a:spAutoFit/>
+          </a:bodyPr>
+          <a:lstStyle/>
+          <a:p>
+            <a:pPr algn="ctr">
+              <a:spcAft>
+                <a:spcPts val="0"/>
+              </a:spcAft>
+            </a:pPr>
+            <a:r>
+              <a:rPr sz="2200" b="1">
+                <a:solidFill>
+                  <a:srgbClr val="D2D7D7"/>
+                </a:solidFill>
+                <a:latin typeface="Aptos"/>
+              </a:rPr>
+              <a:t>→</a:t>
+            </a:r>
+          </a:p>
+        </p:txBody>
+      </p:sp>
+      <p:sp>
+        <p:nvSpPr>
+          <p:cNvPr id="31" name="Rounded Rectangle 30">
+            <a:extLst>
+              <a:ext uri="{FF2B5EF4-FFF2-40B4-BE49-F238E27FC236}">
+                <a16:creationId xmlns:a16="http://schemas.microsoft.com/office/drawing/2014/main" id="{124EFA15-21C3-27B2-4754-DEDA23C73278}"/>
+              </a:ext>
+            </a:extLst>
+          </p:cNvPr>
+          <p:cNvSpPr/>
+          <p:nvPr/>
+        </p:nvSpPr>
+        <p:spPr>
+          <a:xfrm>
+            <a:off x="9784080" y="1691640"/>
+            <a:ext cx="1920240" cy="1280160"/>
+          </a:xfrm>
+          <a:prstGeom prst="roundRect">
+            <a:avLst>
+              <a:gd name="adj" fmla="val 8000"/>
+            </a:avLst>
+          </a:prstGeom>
+          <a:solidFill>
+            <a:srgbClr val="FFFFFF"/>
+          </a:solidFill>
+          <a:ln>
+            <a:solidFill>
+              <a:srgbClr val="D2D7D7"/>
+            </a:solidFill>
+          </a:ln>
+        </p:spPr>
+        <p:style>
+          <a:lnRef idx="1">
+            <a:schemeClr val="accent1"/>
+          </a:lnRef>
+          <a:fillRef idx="3">
+            <a:schemeClr val="accent1"/>
+          </a:fillRef>
+          <a:effectRef idx="2">
+            <a:schemeClr val="accent1"/>
+          </a:effectRef>
+          <a:fontRef idx="minor">
+            <a:schemeClr val="lt1"/>
+          </a:fontRef>
+        </p:style>
+        <p:txBody>
+          <a:bodyPr rtlCol="0" anchor="ctr"/>
+          <a:lstStyle/>
+          <a:p>
+            <a:pPr algn="ctr"/>
+            <a:endParaRPr/>
+          </a:p>
+        </p:txBody>
+      </p:sp>
+      <p:sp>
+        <p:nvSpPr>
+          <p:cNvPr id="32" name="TextBox 31">
+            <a:extLst>
+              <a:ext uri="{FF2B5EF4-FFF2-40B4-BE49-F238E27FC236}">
+                <a16:creationId xmlns:a16="http://schemas.microsoft.com/office/drawing/2014/main" id="{C116F9B0-0B67-321C-8252-A7B9FA726E3B}"/>
+              </a:ext>
+            </a:extLst>
+          </p:cNvPr>
+          <p:cNvSpPr txBox="1"/>
+          <p:nvPr/>
+        </p:nvSpPr>
+        <p:spPr>
+          <a:xfrm>
+            <a:off x="9939528" y="1874519"/>
+            <a:ext cx="384048" cy="274320"/>
+          </a:xfrm>
+          <a:prstGeom prst="rect">
+            <a:avLst/>
+          </a:prstGeom>
+          <a:noFill/>
+        </p:spPr>
+        <p:txBody>
+          <a:bodyPr wrap="square" lIns="36576" tIns="36576" rIns="36576" bIns="36576" anchor="t">
+            <a:spAutoFit/>
+          </a:bodyPr>
+          <a:lstStyle/>
+          <a:p>
+            <a:pPr algn="l">
+              <a:spcAft>
+                <a:spcPts val="0"/>
+              </a:spcAft>
+            </a:pPr>
+            <a:r>
+              <a:rPr sz="1100" b="1">
+                <a:solidFill>
+                  <a:srgbClr val="5C9BBD"/>
+                </a:solidFill>
+                <a:latin typeface="Aptos"/>
+              </a:rPr>
+              <a:t>05</a:t>
+            </a:r>
+          </a:p>
+        </p:txBody>
+      </p:sp>
+      <p:sp>
+        <p:nvSpPr>
+          <p:cNvPr id="33" name="TextBox 32">
+            <a:extLst>
+              <a:ext uri="{FF2B5EF4-FFF2-40B4-BE49-F238E27FC236}">
+                <a16:creationId xmlns:a16="http://schemas.microsoft.com/office/drawing/2014/main" id="{53914F12-6E9D-697F-8F75-C8B91B711F36}"/>
+              </a:ext>
+            </a:extLst>
+          </p:cNvPr>
+          <p:cNvSpPr txBox="1"/>
+          <p:nvPr/>
+        </p:nvSpPr>
+        <p:spPr>
+          <a:xfrm>
+            <a:off x="9939528" y="2212848"/>
+            <a:ext cx="1600200" cy="274320"/>
+          </a:xfrm>
+          <a:prstGeom prst="rect">
+            <a:avLst/>
+          </a:prstGeom>
+          <a:noFill/>
+        </p:spPr>
+        <p:txBody>
+          <a:bodyPr wrap="square" lIns="36576" tIns="36576" rIns="36576" bIns="36576" anchor="t">
+            <a:spAutoFit/>
+          </a:bodyPr>
+          <a:lstStyle/>
+          <a:p>
+            <a:pPr algn="l">
+              <a:spcAft>
+                <a:spcPts val="0"/>
+              </a:spcAft>
+            </a:pPr>
+            <a:r>
+              <a:rPr sz="1500" b="1">
+                <a:solidFill>
+                  <a:srgbClr val="1C3750"/>
+                </a:solidFill>
+                <a:latin typeface="Aptos"/>
+              </a:rPr>
+              <a:t>Forecast</a:t>
+            </a:r>
+          </a:p>
+        </p:txBody>
+      </p:sp>
+      <p:sp>
+        <p:nvSpPr>
+          <p:cNvPr id="34" name="TextBox 33">
+            <a:extLst>
+              <a:ext uri="{FF2B5EF4-FFF2-40B4-BE49-F238E27FC236}">
+                <a16:creationId xmlns:a16="http://schemas.microsoft.com/office/drawing/2014/main" id="{31236247-9BB3-7494-BE65-79D6F550F350}"/>
+              </a:ext>
+            </a:extLst>
+          </p:cNvPr>
+          <p:cNvSpPr txBox="1"/>
+          <p:nvPr/>
+        </p:nvSpPr>
+        <p:spPr>
+          <a:xfrm>
+            <a:off x="9939528" y="2578608"/>
+            <a:ext cx="1600200" cy="243143"/>
+          </a:xfrm>
+          <a:prstGeom prst="rect">
+            <a:avLst/>
+          </a:prstGeom>
+          <a:noFill/>
+        </p:spPr>
+        <p:txBody>
+          <a:bodyPr wrap="square" lIns="36576" tIns="36576" rIns="36576" bIns="36576" anchor="t">
+            <a:spAutoFit/>
+          </a:bodyPr>
+          <a:lstStyle/>
+          <a:p>
+            <a:pPr algn="l">
+              <a:spcAft>
+                <a:spcPts val="0"/>
+              </a:spcAft>
+            </a:pPr>
+            <a:r>
+              <a:rPr sz="1100" b="0" dirty="0">
+                <a:solidFill>
+                  <a:srgbClr val="5B6771"/>
+                </a:solidFill>
+                <a:latin typeface="Aptos"/>
+              </a:rPr>
+              <a:t>Fisher</a:t>
+            </a:r>
+          </a:p>
+        </p:txBody>
+      </p:sp>
+      <p:sp>
+        <p:nvSpPr>
+          <p:cNvPr id="35" name="Rounded Rectangle 34">
+            <a:extLst>
+              <a:ext uri="{FF2B5EF4-FFF2-40B4-BE49-F238E27FC236}">
+                <a16:creationId xmlns:a16="http://schemas.microsoft.com/office/drawing/2014/main" id="{7F7D3783-C22E-5EF7-E610-2A70B20D4A39}"/>
+              </a:ext>
+            </a:extLst>
+          </p:cNvPr>
+          <p:cNvSpPr/>
+          <p:nvPr/>
+        </p:nvSpPr>
+        <p:spPr>
+          <a:xfrm>
+            <a:off x="658368" y="3401568"/>
+            <a:ext cx="6537960" cy="2130552"/>
+          </a:xfrm>
+          <a:prstGeom prst="roundRect">
+            <a:avLst>
+              <a:gd name="adj" fmla="val 8000"/>
+            </a:avLst>
+          </a:prstGeom>
+          <a:solidFill>
+            <a:srgbClr val="E2EDF4"/>
+          </a:solidFill>
+          <a:ln>
+            <a:solidFill>
+              <a:srgbClr val="E2EDF4"/>
+            </a:solidFill>
+          </a:ln>
+        </p:spPr>
+        <p:style>
+          <a:lnRef idx="1">
+            <a:schemeClr val="accent1"/>
+          </a:lnRef>
+          <a:fillRef idx="3">
+            <a:schemeClr val="accent1"/>
+          </a:fillRef>
+          <a:effectRef idx="2">
+            <a:schemeClr val="accent1"/>
+          </a:effectRef>
+          <a:fontRef idx="minor">
+            <a:schemeClr val="lt1"/>
+          </a:fontRef>
+        </p:style>
+        <p:txBody>
+          <a:bodyPr rtlCol="0" anchor="ctr"/>
+          <a:lstStyle/>
+          <a:p>
+            <a:pPr algn="ctr"/>
+            <a:endParaRPr/>
+          </a:p>
+        </p:txBody>
+      </p:sp>
+      <p:sp>
+        <p:nvSpPr>
+          <p:cNvPr id="36" name="TextBox 35">
+            <a:extLst>
+              <a:ext uri="{FF2B5EF4-FFF2-40B4-BE49-F238E27FC236}">
+                <a16:creationId xmlns:a16="http://schemas.microsoft.com/office/drawing/2014/main" id="{A7C6E892-FD91-A527-98E2-B044B1074F27}"/>
+              </a:ext>
+            </a:extLst>
+          </p:cNvPr>
+          <p:cNvSpPr txBox="1"/>
+          <p:nvPr/>
+        </p:nvSpPr>
+        <p:spPr>
+          <a:xfrm>
+            <a:off x="960120" y="3703320"/>
+            <a:ext cx="1920240" cy="274320"/>
+          </a:xfrm>
+          <a:prstGeom prst="rect">
+            <a:avLst/>
+          </a:prstGeom>
+          <a:noFill/>
+        </p:spPr>
+        <p:txBody>
+          <a:bodyPr wrap="square" lIns="36576" tIns="36576" rIns="36576" bIns="36576" anchor="t">
+            <a:spAutoFit/>
+          </a:bodyPr>
+          <a:lstStyle/>
+          <a:p>
+            <a:pPr algn="l">
+              <a:spcAft>
+                <a:spcPts val="0"/>
+              </a:spcAft>
+            </a:pPr>
+            <a:r>
+              <a:rPr sz="1100" b="1">
+                <a:solidFill>
+                  <a:srgbClr val="5C9BBD"/>
+                </a:solidFill>
+                <a:latin typeface="Aptos"/>
+              </a:rPr>
+              <a:t>LIMBER PROJECTION</a:t>
+            </a:r>
+          </a:p>
+        </p:txBody>
+      </p:sp>
+      <p:sp>
+        <p:nvSpPr>
+          <p:cNvPr id="37" name="TextBox 36">
+            <a:extLst>
+              <a:ext uri="{FF2B5EF4-FFF2-40B4-BE49-F238E27FC236}">
+                <a16:creationId xmlns:a16="http://schemas.microsoft.com/office/drawing/2014/main" id="{59475D02-0163-82B5-352D-38596B45D924}"/>
+              </a:ext>
+            </a:extLst>
+          </p:cNvPr>
+          <p:cNvSpPr txBox="1"/>
+          <p:nvPr/>
+        </p:nvSpPr>
+        <p:spPr>
+          <a:xfrm>
+            <a:off x="960119" y="4160520"/>
+            <a:ext cx="7883843" cy="412421"/>
+          </a:xfrm>
+          <a:prstGeom prst="rect">
+            <a:avLst/>
+          </a:prstGeom>
+          <a:noFill/>
+        </p:spPr>
+        <p:txBody>
+          <a:bodyPr wrap="square" lIns="36576" tIns="36576" rIns="36576" bIns="36576" anchor="t">
+            <a:spAutoFit/>
+          </a:bodyPr>
+          <a:lstStyle/>
+          <a:p>
+            <a:pPr algn="l">
+              <a:spcAft>
+                <a:spcPts val="0"/>
+              </a:spcAft>
+            </a:pPr>
+            <a:r>
+              <a:rPr sz="2200" b="1" dirty="0">
+                <a:solidFill>
+                  <a:srgbClr val="1C3750"/>
+                </a:solidFill>
+                <a:latin typeface="Aptos Display"/>
+              </a:rPr>
+              <a:t>Cℓᴬᴮ ≈ ∫ </a:t>
+            </a:r>
+            <a:r>
+              <a:rPr sz="2200" b="1" dirty="0" err="1">
+                <a:solidFill>
+                  <a:srgbClr val="1C3750"/>
+                </a:solidFill>
+                <a:latin typeface="Aptos Display"/>
+              </a:rPr>
+              <a:t>dχ</a:t>
+            </a:r>
+            <a:r>
+              <a:rPr sz="2200" b="1" dirty="0">
+                <a:solidFill>
+                  <a:srgbClr val="1C3750"/>
+                </a:solidFill>
+                <a:latin typeface="Aptos Display"/>
+              </a:rPr>
+              <a:t> / χ²  Wᴬ(</a:t>
+            </a:r>
+            <a:r>
+              <a:rPr sz="2200" b="1" dirty="0" err="1">
+                <a:solidFill>
+                  <a:srgbClr val="1C3750"/>
+                </a:solidFill>
+                <a:latin typeface="Aptos Display"/>
+              </a:rPr>
+              <a:t>χ</a:t>
+            </a:r>
+            <a:r>
+              <a:rPr sz="2200" b="1" dirty="0">
+                <a:solidFill>
+                  <a:srgbClr val="1C3750"/>
+                </a:solidFill>
+                <a:latin typeface="Aptos Display"/>
+              </a:rPr>
+              <a:t>) Wᴮ(</a:t>
+            </a:r>
+            <a:r>
+              <a:rPr sz="2200" b="1" dirty="0" err="1">
+                <a:solidFill>
+                  <a:srgbClr val="1C3750"/>
+                </a:solidFill>
+                <a:latin typeface="Aptos Display"/>
+              </a:rPr>
+              <a:t>χ</a:t>
+            </a:r>
+            <a:r>
+              <a:rPr sz="2200" b="1" dirty="0">
+                <a:solidFill>
+                  <a:srgbClr val="1C3750"/>
+                </a:solidFill>
+                <a:latin typeface="Aptos Display"/>
+              </a:rPr>
+              <a:t>)</a:t>
+            </a:r>
+            <a:r>
+              <a:rPr lang="nl-NL" sz="2200" b="1" dirty="0">
+                <a:solidFill>
+                  <a:srgbClr val="1C3750"/>
+                </a:solidFill>
+                <a:latin typeface="Aptos Display"/>
+              </a:rPr>
+              <a:t> </a:t>
+            </a:r>
+            <a:r>
+              <a:rPr sz="2200" b="1" dirty="0">
+                <a:solidFill>
+                  <a:srgbClr val="1C3750"/>
+                </a:solidFill>
+                <a:latin typeface="Aptos Display"/>
+              </a:rPr>
+              <a:t>× P((ℓ + 1/2) / </a:t>
+            </a:r>
+            <a:r>
+              <a:rPr sz="2200" b="1" dirty="0" err="1">
+                <a:solidFill>
+                  <a:srgbClr val="1C3750"/>
+                </a:solidFill>
+                <a:latin typeface="Aptos Display"/>
+              </a:rPr>
+              <a:t>χ</a:t>
+            </a:r>
+            <a:r>
+              <a:rPr sz="2200" b="1" dirty="0">
+                <a:solidFill>
+                  <a:srgbClr val="1C3750"/>
+                </a:solidFill>
+                <a:latin typeface="Aptos Display"/>
+              </a:rPr>
+              <a:t>, z)</a:t>
+            </a:r>
+          </a:p>
+        </p:txBody>
+      </p:sp>
+      <p:pic>
+        <p:nvPicPr>
+          <p:cNvPr id="38" name="Picture 37" descr="Pk_nonlinear.png">
+            <a:extLst>
+              <a:ext uri="{FF2B5EF4-FFF2-40B4-BE49-F238E27FC236}">
+                <a16:creationId xmlns:a16="http://schemas.microsoft.com/office/drawing/2014/main" id="{B6B3D512-7F21-E7D5-C65E-360CF80CF2E8}"/>
+              </a:ext>
+            </a:extLst>
+          </p:cNvPr>
+          <p:cNvPicPr>
+            <a:picLocks noChangeAspect="1"/>
+          </p:cNvPicPr>
+          <p:nvPr/>
+        </p:nvPicPr>
+        <p:blipFill>
+          <a:blip r:embed="rId3"/>
+          <a:stretch>
+            <a:fillRect/>
+          </a:stretch>
+        </p:blipFill>
+        <p:spPr>
+          <a:xfrm>
+            <a:off x="7572745" y="3246120"/>
+            <a:ext cx="3910605" cy="2514600"/>
+          </a:xfrm>
+          <a:prstGeom prst="rect">
+            <a:avLst/>
+          </a:prstGeom>
+        </p:spPr>
+      </p:pic>
+      <p:sp>
+        <p:nvSpPr>
+          <p:cNvPr id="39" name="TextBox 38">
+            <a:extLst>
+              <a:ext uri="{FF2B5EF4-FFF2-40B4-BE49-F238E27FC236}">
+                <a16:creationId xmlns:a16="http://schemas.microsoft.com/office/drawing/2014/main" id="{C4DABC36-8001-DF67-C338-6C60BC04FC85}"/>
+              </a:ext>
+            </a:extLst>
+          </p:cNvPr>
+          <p:cNvSpPr txBox="1"/>
+          <p:nvPr/>
+        </p:nvSpPr>
+        <p:spPr>
+          <a:xfrm>
+            <a:off x="7818120" y="5760720"/>
+            <a:ext cx="3383280" cy="274320"/>
+          </a:xfrm>
+          <a:prstGeom prst="rect">
+            <a:avLst/>
+          </a:prstGeom>
+          <a:noFill/>
+        </p:spPr>
+        <p:txBody>
+          <a:bodyPr wrap="square" lIns="36576" tIns="36576" rIns="36576" bIns="36576" anchor="t">
+            <a:spAutoFit/>
+          </a:bodyPr>
+          <a:lstStyle/>
+          <a:p>
+            <a:pPr algn="ctr">
+              <a:spcAft>
+                <a:spcPts val="0"/>
+              </a:spcAft>
+            </a:pPr>
+            <a:r>
+              <a:rPr sz="1300" b="1" dirty="0">
+                <a:latin typeface="Aptos"/>
+              </a:rPr>
+              <a:t>ℓ = 10 ... 1,000  |  24 cross-spectra</a:t>
+            </a:r>
+          </a:p>
+        </p:txBody>
+      </p:sp>
+    </p:spTree>
+    <p:extLst>
+      <p:ext uri="{BB962C8B-B14F-4D97-AF65-F5344CB8AC3E}">
+        <p14:creationId xmlns:p14="http://schemas.microsoft.com/office/powerpoint/2010/main" val="2437831426"/>
+      </p:ext>
+    </p:extLst>
+  </p:cSld>
+  <p:clrMapOvr>
+    <a:masterClrMapping/>
+  </p:clrMapOvr>
+</p:sld>
+</file>
+
 <file path=ppt/slides/slide6.xml><?xml version="1.0" encoding="utf-8"?>
 <p:sld xmlns:a="http://schemas.openxmlformats.org/drawingml/2006/main" xmlns:r="http://schemas.openxmlformats.org/officeDocument/2006/relationships" xmlns:p="http://schemas.openxmlformats.org/presentationml/2006/main">
   <p:cSld>
@@ -7962,7 +8563,7 @@
           <p:cNvPr id="5" name="Slide Number Placeholder 4">
             <a:extLst>
               <a:ext uri="{FF2B5EF4-FFF2-40B4-BE49-F238E27FC236}">
-                <a16:creationId xmlns:a16="http://schemas.microsoft.com/office/drawing/2014/main" id="{E24AA21E-9992-DD87-D4E6-3B1CAD395283}"/>
+                <a16:creationId xmlns:a16="http://schemas.microsoft.com/office/drawing/2014/main" id="{AD816458-A348-5A7A-5AAE-31E7CD425E12}"/>
               </a:ext>
             </a:extLst>
           </p:cNvPr>
@@ -7988,10 +8589,10 @@
       </p:sp>
       <p:sp>
         <p:nvSpPr>
-          <p:cNvPr id="9" name="TextBox 8">
-            <a:extLst>
-              <a:ext uri="{FF2B5EF4-FFF2-40B4-BE49-F238E27FC236}">
-                <a16:creationId xmlns:a16="http://schemas.microsoft.com/office/drawing/2014/main" id="{02063184-E09F-DBCA-C58B-753DAF5840BA}"/>
+          <p:cNvPr id="23" name="TextBox 22">
+            <a:extLst>
+              <a:ext uri="{FF2B5EF4-FFF2-40B4-BE49-F238E27FC236}">
+                <a16:creationId xmlns:a16="http://schemas.microsoft.com/office/drawing/2014/main" id="{D124546F-4117-EB11-2DDD-36950DD5363B}"/>
               </a:ext>
             </a:extLst>
           </p:cNvPr>
@@ -8023,17 +8624,47 @@
               <a:rPr sz="4400" b="1" dirty="0">
                 <a:latin typeface="Aptos Display"/>
               </a:rPr>
-              <a:t>Numerical Pipeline</a:t>
-            </a:r>
-          </a:p>
-        </p:txBody>
-      </p:sp>
-      <p:sp>
-        <p:nvSpPr>
-          <p:cNvPr id="11" name="Rounded Rectangle 10">
-            <a:extLst>
-              <a:ext uri="{FF2B5EF4-FFF2-40B4-BE49-F238E27FC236}">
-                <a16:creationId xmlns:a16="http://schemas.microsoft.com/office/drawing/2014/main" id="{CAA9A0F5-CBFE-7E03-86F6-0CEA88030AA9}"/>
+              <a:t>Why FRB Auto-Correlation Is Not Enough</a:t>
+            </a:r>
+          </a:p>
+        </p:txBody>
+      </p:sp>
+      <p:pic>
+        <p:nvPicPr>
+          <p:cNvPr id="25" name="Picture 24" descr="FRB_magnetar_Cell_shallow_shotnoise.png">
+            <a:extLst>
+              <a:ext uri="{FF2B5EF4-FFF2-40B4-BE49-F238E27FC236}">
+                <a16:creationId xmlns:a16="http://schemas.microsoft.com/office/drawing/2014/main" id="{6CA37467-72CF-AE89-B058-E564C0BEC4AD}"/>
+              </a:ext>
+            </a:extLst>
+          </p:cNvPr>
+          <p:cNvPicPr>
+            <a:picLocks noChangeAspect="1"/>
+          </p:cNvPicPr>
+          <p:nvPr/>
+        </p:nvPicPr>
+        <p:blipFill>
+          <a:blip r:embed="rId3"/>
+          <a:stretch>
+            <a:fillRect/>
+          </a:stretch>
+        </p:blipFill>
+        <p:spPr>
+          <a:xfrm>
+            <a:off x="1114131" y="1527048"/>
+            <a:ext cx="6275656" cy="4480560"/>
+          </a:xfrm>
+          <a:prstGeom prst="rect">
+            <a:avLst/>
+          </a:prstGeom>
+        </p:spPr>
+      </p:pic>
+      <p:sp>
+        <p:nvSpPr>
+          <p:cNvPr id="26" name="Rounded Rectangle 25">
+            <a:extLst>
+              <a:ext uri="{FF2B5EF4-FFF2-40B4-BE49-F238E27FC236}">
+                <a16:creationId xmlns:a16="http://schemas.microsoft.com/office/drawing/2014/main" id="{E17BFBBA-CAC4-9D3A-9D18-D387EEBAD4BE}"/>
               </a:ext>
             </a:extLst>
           </p:cNvPr>
@@ -8042,8 +8673,8 @@
         </p:nvSpPr>
         <p:spPr>
           <a:xfrm>
-            <a:off x="566928" y="1691640"/>
-            <a:ext cx="1920240" cy="1280160"/>
+            <a:off x="8183879" y="1755648"/>
+            <a:ext cx="3383280" cy="3886200"/>
           </a:xfrm>
           <a:prstGeom prst="roundRect">
             <a:avLst>
@@ -8051,11 +8682,11 @@
             </a:avLst>
           </a:prstGeom>
           <a:solidFill>
-            <a:srgbClr val="FFFFFF"/>
+            <a:srgbClr val="1C3750"/>
           </a:solidFill>
           <a:ln>
             <a:solidFill>
-              <a:srgbClr val="D2D7D7"/>
+              <a:srgbClr val="1C3750"/>
             </a:solidFill>
           </a:ln>
         </p:spPr>
@@ -8084,10 +8715,10 @@
       </p:sp>
       <p:sp>
         <p:nvSpPr>
-          <p:cNvPr id="12" name="TextBox 11">
-            <a:extLst>
-              <a:ext uri="{FF2B5EF4-FFF2-40B4-BE49-F238E27FC236}">
-                <a16:creationId xmlns:a16="http://schemas.microsoft.com/office/drawing/2014/main" id="{2353D306-1D06-9EDD-8311-6D39269BDA4F}"/>
+          <p:cNvPr id="27" name="TextBox 26">
+            <a:extLst>
+              <a:ext uri="{FF2B5EF4-FFF2-40B4-BE49-F238E27FC236}">
+                <a16:creationId xmlns:a16="http://schemas.microsoft.com/office/drawing/2014/main" id="{12F82F97-6961-E226-71A6-53E62DA53AB7}"/>
               </a:ext>
             </a:extLst>
           </p:cNvPr>
@@ -8096,8 +8727,8 @@
         </p:nvSpPr>
         <p:spPr>
           <a:xfrm>
-            <a:off x="722376" y="1874519"/>
-            <a:ext cx="384048" cy="274320"/>
+            <a:off x="8485632" y="2084831"/>
+            <a:ext cx="2651760" cy="320040"/>
           </a:xfrm>
           <a:prstGeom prst="rect">
             <a:avLst/>
@@ -8116,23 +8747,23 @@
               </a:spcAft>
             </a:pPr>
             <a:r>
-              <a:rPr sz="1100" b="1">
+              <a:rPr sz="1300" b="1">
                 <a:solidFill>
-                  <a:srgbClr val="1C3750"/>
+                  <a:srgbClr val="DDA33A"/>
                 </a:solidFill>
                 <a:latin typeface="Aptos"/>
               </a:rPr>
-              <a:t>01</a:t>
-            </a:r>
-          </a:p>
-        </p:txBody>
-      </p:sp>
-      <p:sp>
-        <p:nvSpPr>
-          <p:cNvPr id="13" name="TextBox 12">
-            <a:extLst>
-              <a:ext uri="{FF2B5EF4-FFF2-40B4-BE49-F238E27FC236}">
-                <a16:creationId xmlns:a16="http://schemas.microsoft.com/office/drawing/2014/main" id="{5C8993CD-FD44-D8D7-6141-7915DCB99042}"/>
+              <a:t>SHOT NOISE</a:t>
+            </a:r>
+          </a:p>
+        </p:txBody>
+      </p:sp>
+      <p:sp>
+        <p:nvSpPr>
+          <p:cNvPr id="28" name="TextBox 27">
+            <a:extLst>
+              <a:ext uri="{FF2B5EF4-FFF2-40B4-BE49-F238E27FC236}">
+                <a16:creationId xmlns:a16="http://schemas.microsoft.com/office/drawing/2014/main" id="{D8596016-E0A3-5928-5657-95838BAC40E4}"/>
               </a:ext>
             </a:extLst>
           </p:cNvPr>
@@ -8141,8 +8772,8 @@
         </p:nvSpPr>
         <p:spPr>
           <a:xfrm>
-            <a:off x="722376" y="2212848"/>
-            <a:ext cx="1600200" cy="274320"/>
+            <a:off x="8485632" y="2670048"/>
+            <a:ext cx="2651760" cy="594360"/>
           </a:xfrm>
           <a:prstGeom prst="rect">
             <a:avLst/>
@@ -8161,23 +8792,23 @@
               </a:spcAft>
             </a:pPr>
             <a:r>
-              <a:rPr sz="1500" b="1">
+              <a:rPr sz="3000" b="1">
                 <a:solidFill>
-                  <a:srgbClr val="1C3750"/>
+                  <a:srgbClr val="FFFFFF"/>
                 </a:solidFill>
-                <a:latin typeface="Aptos"/>
-              </a:rPr>
-              <a:t>Planck 2018</a:t>
-            </a:r>
-          </a:p>
-        </p:txBody>
-      </p:sp>
-      <p:sp>
-        <p:nvSpPr>
-          <p:cNvPr id="14" name="TextBox 13">
-            <a:extLst>
-              <a:ext uri="{FF2B5EF4-FFF2-40B4-BE49-F238E27FC236}">
-                <a16:creationId xmlns:a16="http://schemas.microsoft.com/office/drawing/2014/main" id="{57823965-93A0-029E-1196-C2931958E6B7}"/>
+                <a:latin typeface="Aptos Display"/>
+              </a:rPr>
+              <a:t>Nℓ = 1 / n̄</a:t>
+            </a:r>
+          </a:p>
+        </p:txBody>
+      </p:sp>
+      <p:sp>
+        <p:nvSpPr>
+          <p:cNvPr id="29" name="TextBox 28">
+            <a:extLst>
+              <a:ext uri="{FF2B5EF4-FFF2-40B4-BE49-F238E27FC236}">
+                <a16:creationId xmlns:a16="http://schemas.microsoft.com/office/drawing/2014/main" id="{4C580DBC-8B1C-871D-EE98-D64892C33013}"/>
               </a:ext>
             </a:extLst>
           </p:cNvPr>
@@ -8186,8 +8817,8 @@
         </p:nvSpPr>
         <p:spPr>
           <a:xfrm>
-            <a:off x="722376" y="2578608"/>
-            <a:ext cx="1600200" cy="228600"/>
+            <a:off x="8485632" y="3611880"/>
+            <a:ext cx="2651760" cy="566928"/>
           </a:xfrm>
           <a:prstGeom prst="rect">
             <a:avLst/>
@@ -8206,23 +8837,23 @@
               </a:spcAft>
             </a:pPr>
             <a:r>
-              <a:rPr sz="1100" b="0">
+              <a:rPr sz="3100" b="1">
                 <a:solidFill>
-                  <a:srgbClr val="5B6771"/>
+                  <a:srgbClr val="DD5B4A"/>
                 </a:solidFill>
-                <a:latin typeface="Aptos"/>
-              </a:rPr>
-              <a:t>ΛCDM cosmology</a:t>
-            </a:r>
-          </a:p>
-        </p:txBody>
-      </p:sp>
-      <p:sp>
-        <p:nvSpPr>
-          <p:cNvPr id="15" name="TextBox 14">
-            <a:extLst>
-              <a:ext uri="{FF2B5EF4-FFF2-40B4-BE49-F238E27FC236}">
-                <a16:creationId xmlns:a16="http://schemas.microsoft.com/office/drawing/2014/main" id="{755ECB53-6089-EFB2-805E-0C86DA647475}"/>
+                <a:latin typeface="Aptos Display"/>
+              </a:rPr>
+              <a:t>~10³</a:t>
+            </a:r>
+          </a:p>
+        </p:txBody>
+      </p:sp>
+      <p:sp>
+        <p:nvSpPr>
+          <p:cNvPr id="30" name="TextBox 29">
+            <a:extLst>
+              <a:ext uri="{FF2B5EF4-FFF2-40B4-BE49-F238E27FC236}">
+                <a16:creationId xmlns:a16="http://schemas.microsoft.com/office/drawing/2014/main" id="{03F679CD-4DAD-B654-6D35-90323B8D211E}"/>
               </a:ext>
             </a:extLst>
           </p:cNvPr>
@@ -8231,107 +8862,8 @@
         </p:nvSpPr>
         <p:spPr>
           <a:xfrm>
-            <a:off x="2505456" y="2121408"/>
-            <a:ext cx="347472" cy="411480"/>
-          </a:xfrm>
-          <a:prstGeom prst="rect">
-            <a:avLst/>
-          </a:prstGeom>
-          <a:noFill/>
-        </p:spPr>
-        <p:txBody>
-          <a:bodyPr wrap="square" lIns="36576" tIns="36576" rIns="36576" bIns="36576" anchor="t">
-            <a:spAutoFit/>
-          </a:bodyPr>
-          <a:lstStyle/>
-          <a:p>
-            <a:pPr algn="ctr">
-              <a:spcAft>
-                <a:spcPts val="0"/>
-              </a:spcAft>
-            </a:pPr>
-            <a:r>
-              <a:rPr sz="2200" b="1">
-                <a:solidFill>
-                  <a:srgbClr val="D2D7D7"/>
-                </a:solidFill>
-                <a:latin typeface="Aptos"/>
-              </a:rPr>
-              <a:t>→</a:t>
-            </a:r>
-          </a:p>
-        </p:txBody>
-      </p:sp>
-      <p:sp>
-        <p:nvSpPr>
-          <p:cNvPr id="16" name="Rounded Rectangle 15">
-            <a:extLst>
-              <a:ext uri="{FF2B5EF4-FFF2-40B4-BE49-F238E27FC236}">
-                <a16:creationId xmlns:a16="http://schemas.microsoft.com/office/drawing/2014/main" id="{E2FC3EE9-D5FA-B6E9-2BE3-FE4194C0E503}"/>
-              </a:ext>
-            </a:extLst>
-          </p:cNvPr>
-          <p:cNvSpPr/>
-          <p:nvPr/>
-        </p:nvSpPr>
-        <p:spPr>
-          <a:xfrm>
-            <a:off x="2871216" y="1691640"/>
-            <a:ext cx="1920240" cy="1280160"/>
-          </a:xfrm>
-          <a:prstGeom prst="roundRect">
-            <a:avLst>
-              <a:gd name="adj" fmla="val 8000"/>
-            </a:avLst>
-          </a:prstGeom>
-          <a:solidFill>
-            <a:srgbClr val="FFFFFF"/>
-          </a:solidFill>
-          <a:ln>
-            <a:solidFill>
-              <a:srgbClr val="D2D7D7"/>
-            </a:solidFill>
-          </a:ln>
-        </p:spPr>
-        <p:style>
-          <a:lnRef idx="1">
-            <a:schemeClr val="accent1"/>
-          </a:lnRef>
-          <a:fillRef idx="3">
-            <a:schemeClr val="accent1"/>
-          </a:fillRef>
-          <a:effectRef idx="2">
-            <a:schemeClr val="accent1"/>
-          </a:effectRef>
-          <a:fontRef idx="minor">
-            <a:schemeClr val="lt1"/>
-          </a:fontRef>
-        </p:style>
-        <p:txBody>
-          <a:bodyPr rtlCol="0" anchor="ctr"/>
-          <a:lstStyle/>
-          <a:p>
-            <a:pPr algn="ctr"/>
-            <a:endParaRPr/>
-          </a:p>
-        </p:txBody>
-      </p:sp>
-      <p:sp>
-        <p:nvSpPr>
-          <p:cNvPr id="17" name="TextBox 16">
-            <a:extLst>
-              <a:ext uri="{FF2B5EF4-FFF2-40B4-BE49-F238E27FC236}">
-                <a16:creationId xmlns:a16="http://schemas.microsoft.com/office/drawing/2014/main" id="{2DDD3D45-24F2-03EA-6D17-837350F5A62C}"/>
-              </a:ext>
-            </a:extLst>
-          </p:cNvPr>
-          <p:cNvSpPr txBox="1"/>
-          <p:nvPr/>
-        </p:nvSpPr>
-        <p:spPr>
-          <a:xfrm>
-            <a:off x="3026664" y="1874519"/>
-            <a:ext cx="384048" cy="274320"/>
+            <a:off x="8485632" y="4224528"/>
+            <a:ext cx="2560320" cy="731520"/>
           </a:xfrm>
           <a:prstGeom prst="rect">
             <a:avLst/>
@@ -8350,1111 +8882,14 @@
               </a:spcAft>
             </a:pPr>
             <a:r>
-              <a:rPr sz="1100" b="1">
+              <a:rPr sz="1500" b="0">
                 <a:solidFill>
-                  <a:srgbClr val="188985"/>
+                  <a:srgbClr val="DBE4E8"/>
                 </a:solidFill>
                 <a:latin typeface="Aptos"/>
               </a:rPr>
-              <a:t>02</a:t>
-            </a:r>
-          </a:p>
-        </p:txBody>
-      </p:sp>
-      <p:sp>
-        <p:nvSpPr>
-          <p:cNvPr id="18" name="TextBox 17">
-            <a:extLst>
-              <a:ext uri="{FF2B5EF4-FFF2-40B4-BE49-F238E27FC236}">
-                <a16:creationId xmlns:a16="http://schemas.microsoft.com/office/drawing/2014/main" id="{CFFCCA75-2ED6-D00F-E1EF-358C8959BB9F}"/>
-              </a:ext>
-            </a:extLst>
-          </p:cNvPr>
-          <p:cNvSpPr txBox="1"/>
-          <p:nvPr/>
-        </p:nvSpPr>
-        <p:spPr>
-          <a:xfrm>
-            <a:off x="3026664" y="2212848"/>
-            <a:ext cx="1600200" cy="274320"/>
-          </a:xfrm>
-          <a:prstGeom prst="rect">
-            <a:avLst/>
-          </a:prstGeom>
-          <a:noFill/>
-        </p:spPr>
-        <p:txBody>
-          <a:bodyPr wrap="square" lIns="36576" tIns="36576" rIns="36576" bIns="36576" anchor="t">
-            <a:spAutoFit/>
-          </a:bodyPr>
-          <a:lstStyle/>
-          <a:p>
-            <a:pPr algn="l">
-              <a:spcAft>
-                <a:spcPts val="0"/>
-              </a:spcAft>
-            </a:pPr>
-            <a:r>
-              <a:rPr sz="1500" b="1">
-                <a:solidFill>
-                  <a:srgbClr val="1C3750"/>
-                </a:solidFill>
-                <a:latin typeface="Aptos"/>
-              </a:rPr>
-              <a:t>Matter field</a:t>
-            </a:r>
-          </a:p>
-        </p:txBody>
-      </p:sp>
-      <p:sp>
-        <p:nvSpPr>
-          <p:cNvPr id="19" name="TextBox 18">
-            <a:extLst>
-              <a:ext uri="{FF2B5EF4-FFF2-40B4-BE49-F238E27FC236}">
-                <a16:creationId xmlns:a16="http://schemas.microsoft.com/office/drawing/2014/main" id="{E8897D35-FC6A-C482-8AD3-6304B516D847}"/>
-              </a:ext>
-            </a:extLst>
-          </p:cNvPr>
-          <p:cNvSpPr txBox="1"/>
-          <p:nvPr/>
-        </p:nvSpPr>
-        <p:spPr>
-          <a:xfrm>
-            <a:off x="3026664" y="2578608"/>
-            <a:ext cx="1600200" cy="228600"/>
-          </a:xfrm>
-          <a:prstGeom prst="rect">
-            <a:avLst/>
-          </a:prstGeom>
-          <a:noFill/>
-        </p:spPr>
-        <p:txBody>
-          <a:bodyPr wrap="square" lIns="36576" tIns="36576" rIns="36576" bIns="36576" anchor="t">
-            <a:spAutoFit/>
-          </a:bodyPr>
-          <a:lstStyle/>
-          <a:p>
-            <a:pPr algn="l">
-              <a:spcAft>
-                <a:spcPts val="0"/>
-              </a:spcAft>
-            </a:pPr>
-            <a:r>
-              <a:rPr sz="1100" b="0">
-                <a:solidFill>
-                  <a:srgbClr val="5B6771"/>
-                </a:solidFill>
-                <a:latin typeface="Aptos"/>
-              </a:rPr>
-              <a:t>non-linear P(k,z)</a:t>
-            </a:r>
-          </a:p>
-        </p:txBody>
-      </p:sp>
-      <p:sp>
-        <p:nvSpPr>
-          <p:cNvPr id="20" name="TextBox 19">
-            <a:extLst>
-              <a:ext uri="{FF2B5EF4-FFF2-40B4-BE49-F238E27FC236}">
-                <a16:creationId xmlns:a16="http://schemas.microsoft.com/office/drawing/2014/main" id="{6F07F77C-5D10-185B-DD70-63C5BDEBB191}"/>
-              </a:ext>
-            </a:extLst>
-          </p:cNvPr>
-          <p:cNvSpPr txBox="1"/>
-          <p:nvPr/>
-        </p:nvSpPr>
-        <p:spPr>
-          <a:xfrm>
-            <a:off x="4809744" y="2121408"/>
-            <a:ext cx="347472" cy="411480"/>
-          </a:xfrm>
-          <a:prstGeom prst="rect">
-            <a:avLst/>
-          </a:prstGeom>
-          <a:noFill/>
-        </p:spPr>
-        <p:txBody>
-          <a:bodyPr wrap="square" lIns="36576" tIns="36576" rIns="36576" bIns="36576" anchor="t">
-            <a:spAutoFit/>
-          </a:bodyPr>
-          <a:lstStyle/>
-          <a:p>
-            <a:pPr algn="ctr">
-              <a:spcAft>
-                <a:spcPts val="0"/>
-              </a:spcAft>
-            </a:pPr>
-            <a:r>
-              <a:rPr sz="2200" b="1">
-                <a:solidFill>
-                  <a:srgbClr val="D2D7D7"/>
-                </a:solidFill>
-                <a:latin typeface="Aptos"/>
-              </a:rPr>
-              <a:t>→</a:t>
-            </a:r>
-          </a:p>
-        </p:txBody>
-      </p:sp>
-      <p:sp>
-        <p:nvSpPr>
-          <p:cNvPr id="21" name="Rounded Rectangle 20">
-            <a:extLst>
-              <a:ext uri="{FF2B5EF4-FFF2-40B4-BE49-F238E27FC236}">
-                <a16:creationId xmlns:a16="http://schemas.microsoft.com/office/drawing/2014/main" id="{B032E782-2695-8BB6-C946-54E3D5227A2C}"/>
-              </a:ext>
-            </a:extLst>
-          </p:cNvPr>
-          <p:cNvSpPr/>
-          <p:nvPr/>
-        </p:nvSpPr>
-        <p:spPr>
-          <a:xfrm>
-            <a:off x="5175504" y="1691640"/>
-            <a:ext cx="1920240" cy="1280160"/>
-          </a:xfrm>
-          <a:prstGeom prst="roundRect">
-            <a:avLst>
-              <a:gd name="adj" fmla="val 8000"/>
-            </a:avLst>
-          </a:prstGeom>
-          <a:solidFill>
-            <a:srgbClr val="FFFFFF"/>
-          </a:solidFill>
-          <a:ln>
-            <a:solidFill>
-              <a:srgbClr val="D2D7D7"/>
-            </a:solidFill>
-          </a:ln>
-        </p:spPr>
-        <p:style>
-          <a:lnRef idx="1">
-            <a:schemeClr val="accent1"/>
-          </a:lnRef>
-          <a:fillRef idx="3">
-            <a:schemeClr val="accent1"/>
-          </a:fillRef>
-          <a:effectRef idx="2">
-            <a:schemeClr val="accent1"/>
-          </a:effectRef>
-          <a:fontRef idx="minor">
-            <a:schemeClr val="lt1"/>
-          </a:fontRef>
-        </p:style>
-        <p:txBody>
-          <a:bodyPr rtlCol="0" anchor="ctr"/>
-          <a:lstStyle/>
-          <a:p>
-            <a:pPr algn="ctr"/>
-            <a:endParaRPr/>
-          </a:p>
-        </p:txBody>
-      </p:sp>
-      <p:sp>
-        <p:nvSpPr>
-          <p:cNvPr id="22" name="TextBox 21">
-            <a:extLst>
-              <a:ext uri="{FF2B5EF4-FFF2-40B4-BE49-F238E27FC236}">
-                <a16:creationId xmlns:a16="http://schemas.microsoft.com/office/drawing/2014/main" id="{49C14156-BF32-EB1B-C65E-F69B87C0BAF6}"/>
-              </a:ext>
-            </a:extLst>
-          </p:cNvPr>
-          <p:cNvSpPr txBox="1"/>
-          <p:nvPr/>
-        </p:nvSpPr>
-        <p:spPr>
-          <a:xfrm>
-            <a:off x="5330952" y="1874519"/>
-            <a:ext cx="384048" cy="274320"/>
-          </a:xfrm>
-          <a:prstGeom prst="rect">
-            <a:avLst/>
-          </a:prstGeom>
-          <a:noFill/>
-        </p:spPr>
-        <p:txBody>
-          <a:bodyPr wrap="square" lIns="36576" tIns="36576" rIns="36576" bIns="36576" anchor="t">
-            <a:spAutoFit/>
-          </a:bodyPr>
-          <a:lstStyle/>
-          <a:p>
-            <a:pPr algn="l">
-              <a:spcAft>
-                <a:spcPts val="0"/>
-              </a:spcAft>
-            </a:pPr>
-            <a:r>
-              <a:rPr sz="1100" b="1">
-                <a:solidFill>
-                  <a:srgbClr val="DD5B4A"/>
-                </a:solidFill>
-                <a:latin typeface="Aptos"/>
-              </a:rPr>
-              <a:t>03</a:t>
-            </a:r>
-          </a:p>
-        </p:txBody>
-      </p:sp>
-      <p:sp>
-        <p:nvSpPr>
-          <p:cNvPr id="23" name="TextBox 22">
-            <a:extLst>
-              <a:ext uri="{FF2B5EF4-FFF2-40B4-BE49-F238E27FC236}">
-                <a16:creationId xmlns:a16="http://schemas.microsoft.com/office/drawing/2014/main" id="{8CF2CF50-D8BD-9475-7C40-4BF6FD7DF391}"/>
-              </a:ext>
-            </a:extLst>
-          </p:cNvPr>
-          <p:cNvSpPr txBox="1"/>
-          <p:nvPr/>
-        </p:nvSpPr>
-        <p:spPr>
-          <a:xfrm>
-            <a:off x="5330952" y="2212848"/>
-            <a:ext cx="1600200" cy="274320"/>
-          </a:xfrm>
-          <a:prstGeom prst="rect">
-            <a:avLst/>
-          </a:prstGeom>
-          <a:noFill/>
-        </p:spPr>
-        <p:txBody>
-          <a:bodyPr wrap="square" lIns="36576" tIns="36576" rIns="36576" bIns="36576" anchor="t">
-            <a:spAutoFit/>
-          </a:bodyPr>
-          <a:lstStyle/>
-          <a:p>
-            <a:pPr algn="l">
-              <a:spcAft>
-                <a:spcPts val="0"/>
-              </a:spcAft>
-            </a:pPr>
-            <a:r>
-              <a:rPr sz="1500" b="1">
-                <a:solidFill>
-                  <a:srgbClr val="1C3750"/>
-                </a:solidFill>
-                <a:latin typeface="Aptos"/>
-              </a:rPr>
-              <a:t>Radial kernels</a:t>
-            </a:r>
-          </a:p>
-        </p:txBody>
-      </p:sp>
-      <p:sp>
-        <p:nvSpPr>
-          <p:cNvPr id="24" name="TextBox 23">
-            <a:extLst>
-              <a:ext uri="{FF2B5EF4-FFF2-40B4-BE49-F238E27FC236}">
-                <a16:creationId xmlns:a16="http://schemas.microsoft.com/office/drawing/2014/main" id="{8FBE7D53-13D6-947C-8171-801F678DFA4F}"/>
-              </a:ext>
-            </a:extLst>
-          </p:cNvPr>
-          <p:cNvSpPr txBox="1"/>
-          <p:nvPr/>
-        </p:nvSpPr>
-        <p:spPr>
-          <a:xfrm>
-            <a:off x="5330952" y="2578608"/>
-            <a:ext cx="1600200" cy="228600"/>
-          </a:xfrm>
-          <a:prstGeom prst="rect">
-            <a:avLst/>
-          </a:prstGeom>
-          <a:noFill/>
-        </p:spPr>
-        <p:txBody>
-          <a:bodyPr wrap="square" lIns="36576" tIns="36576" rIns="36576" bIns="36576" anchor="t">
-            <a:spAutoFit/>
-          </a:bodyPr>
-          <a:lstStyle/>
-          <a:p>
-            <a:pPr algn="l">
-              <a:spcAft>
-                <a:spcPts val="0"/>
-              </a:spcAft>
-            </a:pPr>
-            <a:r>
-              <a:rPr sz="1100" b="0">
-                <a:solidFill>
-                  <a:srgbClr val="5B6771"/>
-                </a:solidFill>
-                <a:latin typeface="Aptos"/>
-              </a:rPr>
-              <a:t>selection × bias</a:t>
-            </a:r>
-          </a:p>
-        </p:txBody>
-      </p:sp>
-      <p:sp>
-        <p:nvSpPr>
-          <p:cNvPr id="25" name="TextBox 24">
-            <a:extLst>
-              <a:ext uri="{FF2B5EF4-FFF2-40B4-BE49-F238E27FC236}">
-                <a16:creationId xmlns:a16="http://schemas.microsoft.com/office/drawing/2014/main" id="{BE7F4397-4B36-4617-DA92-CA5C44228B6B}"/>
-              </a:ext>
-            </a:extLst>
-          </p:cNvPr>
-          <p:cNvSpPr txBox="1"/>
-          <p:nvPr/>
-        </p:nvSpPr>
-        <p:spPr>
-          <a:xfrm>
-            <a:off x="7114032" y="2121408"/>
-            <a:ext cx="347472" cy="411480"/>
-          </a:xfrm>
-          <a:prstGeom prst="rect">
-            <a:avLst/>
-          </a:prstGeom>
-          <a:noFill/>
-        </p:spPr>
-        <p:txBody>
-          <a:bodyPr wrap="square" lIns="36576" tIns="36576" rIns="36576" bIns="36576" anchor="t">
-            <a:spAutoFit/>
-          </a:bodyPr>
-          <a:lstStyle/>
-          <a:p>
-            <a:pPr algn="ctr">
-              <a:spcAft>
-                <a:spcPts val="0"/>
-              </a:spcAft>
-            </a:pPr>
-            <a:r>
-              <a:rPr sz="2200" b="1">
-                <a:solidFill>
-                  <a:srgbClr val="D2D7D7"/>
-                </a:solidFill>
-                <a:latin typeface="Aptos"/>
-              </a:rPr>
-              <a:t>→</a:t>
-            </a:r>
-          </a:p>
-        </p:txBody>
-      </p:sp>
-      <p:sp>
-        <p:nvSpPr>
-          <p:cNvPr id="26" name="Rounded Rectangle 25">
-            <a:extLst>
-              <a:ext uri="{FF2B5EF4-FFF2-40B4-BE49-F238E27FC236}">
-                <a16:creationId xmlns:a16="http://schemas.microsoft.com/office/drawing/2014/main" id="{25EB2FD0-4829-6FD1-0381-412724241D80}"/>
-              </a:ext>
-            </a:extLst>
-          </p:cNvPr>
-          <p:cNvSpPr/>
-          <p:nvPr/>
-        </p:nvSpPr>
-        <p:spPr>
-          <a:xfrm>
-            <a:off x="7479792" y="1691640"/>
-            <a:ext cx="1920240" cy="1280160"/>
-          </a:xfrm>
-          <a:prstGeom prst="roundRect">
-            <a:avLst>
-              <a:gd name="adj" fmla="val 8000"/>
-            </a:avLst>
-          </a:prstGeom>
-          <a:solidFill>
-            <a:srgbClr val="FFFFFF"/>
-          </a:solidFill>
-          <a:ln>
-            <a:solidFill>
-              <a:srgbClr val="D2D7D7"/>
-            </a:solidFill>
-          </a:ln>
-        </p:spPr>
-        <p:style>
-          <a:lnRef idx="1">
-            <a:schemeClr val="accent1"/>
-          </a:lnRef>
-          <a:fillRef idx="3">
-            <a:schemeClr val="accent1"/>
-          </a:fillRef>
-          <a:effectRef idx="2">
-            <a:schemeClr val="accent1"/>
-          </a:effectRef>
-          <a:fontRef idx="minor">
-            <a:schemeClr val="lt1"/>
-          </a:fontRef>
-        </p:style>
-        <p:txBody>
-          <a:bodyPr rtlCol="0" anchor="ctr"/>
-          <a:lstStyle/>
-          <a:p>
-            <a:pPr algn="ctr"/>
-            <a:endParaRPr/>
-          </a:p>
-        </p:txBody>
-      </p:sp>
-      <p:sp>
-        <p:nvSpPr>
-          <p:cNvPr id="27" name="TextBox 26">
-            <a:extLst>
-              <a:ext uri="{FF2B5EF4-FFF2-40B4-BE49-F238E27FC236}">
-                <a16:creationId xmlns:a16="http://schemas.microsoft.com/office/drawing/2014/main" id="{EF743BDF-BE00-74E1-CEA2-413BB3084ABC}"/>
-              </a:ext>
-            </a:extLst>
-          </p:cNvPr>
-          <p:cNvSpPr txBox="1"/>
-          <p:nvPr/>
-        </p:nvSpPr>
-        <p:spPr>
-          <a:xfrm>
-            <a:off x="7635240" y="1874519"/>
-            <a:ext cx="384048" cy="274320"/>
-          </a:xfrm>
-          <a:prstGeom prst="rect">
-            <a:avLst/>
-          </a:prstGeom>
-          <a:noFill/>
-        </p:spPr>
-        <p:txBody>
-          <a:bodyPr wrap="square" lIns="36576" tIns="36576" rIns="36576" bIns="36576" anchor="t">
-            <a:spAutoFit/>
-          </a:bodyPr>
-          <a:lstStyle/>
-          <a:p>
-            <a:pPr algn="l">
-              <a:spcAft>
-                <a:spcPts val="0"/>
-              </a:spcAft>
-            </a:pPr>
-            <a:r>
-              <a:rPr sz="1100" b="1">
-                <a:solidFill>
-                  <a:srgbClr val="DDA33A"/>
-                </a:solidFill>
-                <a:latin typeface="Aptos"/>
-              </a:rPr>
-              <a:t>04</a:t>
-            </a:r>
-          </a:p>
-        </p:txBody>
-      </p:sp>
-      <p:sp>
-        <p:nvSpPr>
-          <p:cNvPr id="28" name="TextBox 27">
-            <a:extLst>
-              <a:ext uri="{FF2B5EF4-FFF2-40B4-BE49-F238E27FC236}">
-                <a16:creationId xmlns:a16="http://schemas.microsoft.com/office/drawing/2014/main" id="{BB224279-04AF-1011-738E-E1FCD3843DF0}"/>
-              </a:ext>
-            </a:extLst>
-          </p:cNvPr>
-          <p:cNvSpPr txBox="1"/>
-          <p:nvPr/>
-        </p:nvSpPr>
-        <p:spPr>
-          <a:xfrm>
-            <a:off x="7635240" y="2212848"/>
-            <a:ext cx="1600200" cy="274320"/>
-          </a:xfrm>
-          <a:prstGeom prst="rect">
-            <a:avLst/>
-          </a:prstGeom>
-          <a:noFill/>
-        </p:spPr>
-        <p:txBody>
-          <a:bodyPr wrap="square" lIns="36576" tIns="36576" rIns="36576" bIns="36576" anchor="t">
-            <a:spAutoFit/>
-          </a:bodyPr>
-          <a:lstStyle/>
-          <a:p>
-            <a:pPr algn="l">
-              <a:spcAft>
-                <a:spcPts val="0"/>
-              </a:spcAft>
-            </a:pPr>
-            <a:r>
-              <a:rPr sz="1500" b="1">
-                <a:solidFill>
-                  <a:srgbClr val="1C3750"/>
-                </a:solidFill>
-                <a:latin typeface="Aptos"/>
-              </a:rPr>
-              <a:t>Projection</a:t>
-            </a:r>
-          </a:p>
-        </p:txBody>
-      </p:sp>
-      <p:sp>
-        <p:nvSpPr>
-          <p:cNvPr id="29" name="TextBox 28">
-            <a:extLst>
-              <a:ext uri="{FF2B5EF4-FFF2-40B4-BE49-F238E27FC236}">
-                <a16:creationId xmlns:a16="http://schemas.microsoft.com/office/drawing/2014/main" id="{851C8EFB-F614-4C15-39F0-9AFE482AF5B4}"/>
-              </a:ext>
-            </a:extLst>
-          </p:cNvPr>
-          <p:cNvSpPr txBox="1"/>
-          <p:nvPr/>
-        </p:nvSpPr>
-        <p:spPr>
-          <a:xfrm>
-            <a:off x="7635240" y="2578608"/>
-            <a:ext cx="1600200" cy="228600"/>
-          </a:xfrm>
-          <a:prstGeom prst="rect">
-            <a:avLst/>
-          </a:prstGeom>
-          <a:noFill/>
-        </p:spPr>
-        <p:txBody>
-          <a:bodyPr wrap="square" lIns="36576" tIns="36576" rIns="36576" bIns="36576" anchor="t">
-            <a:spAutoFit/>
-          </a:bodyPr>
-          <a:lstStyle/>
-          <a:p>
-            <a:pPr algn="l">
-              <a:spcAft>
-                <a:spcPts val="0"/>
-              </a:spcAft>
-            </a:pPr>
-            <a:r>
-              <a:rPr sz="1100" b="0">
-                <a:solidFill>
-                  <a:srgbClr val="5B6771"/>
-                </a:solidFill>
-                <a:latin typeface="Aptos"/>
-              </a:rPr>
-              <a:t>Limber → Cℓ</a:t>
-            </a:r>
-          </a:p>
-        </p:txBody>
-      </p:sp>
-      <p:sp>
-        <p:nvSpPr>
-          <p:cNvPr id="30" name="TextBox 29">
-            <a:extLst>
-              <a:ext uri="{FF2B5EF4-FFF2-40B4-BE49-F238E27FC236}">
-                <a16:creationId xmlns:a16="http://schemas.microsoft.com/office/drawing/2014/main" id="{4F875C1E-EFD4-9070-3F7D-F5E288833486}"/>
-              </a:ext>
-            </a:extLst>
-          </p:cNvPr>
-          <p:cNvSpPr txBox="1"/>
-          <p:nvPr/>
-        </p:nvSpPr>
-        <p:spPr>
-          <a:xfrm>
-            <a:off x="9418320" y="2121408"/>
-            <a:ext cx="347472" cy="411480"/>
-          </a:xfrm>
-          <a:prstGeom prst="rect">
-            <a:avLst/>
-          </a:prstGeom>
-          <a:noFill/>
-        </p:spPr>
-        <p:txBody>
-          <a:bodyPr wrap="square" lIns="36576" tIns="36576" rIns="36576" bIns="36576" anchor="t">
-            <a:spAutoFit/>
-          </a:bodyPr>
-          <a:lstStyle/>
-          <a:p>
-            <a:pPr algn="ctr">
-              <a:spcAft>
-                <a:spcPts val="0"/>
-              </a:spcAft>
-            </a:pPr>
-            <a:r>
-              <a:rPr sz="2200" b="1">
-                <a:solidFill>
-                  <a:srgbClr val="D2D7D7"/>
-                </a:solidFill>
-                <a:latin typeface="Aptos"/>
-              </a:rPr>
-              <a:t>→</a:t>
-            </a:r>
-          </a:p>
-        </p:txBody>
-      </p:sp>
-      <p:sp>
-        <p:nvSpPr>
-          <p:cNvPr id="31" name="Rounded Rectangle 30">
-            <a:extLst>
-              <a:ext uri="{FF2B5EF4-FFF2-40B4-BE49-F238E27FC236}">
-                <a16:creationId xmlns:a16="http://schemas.microsoft.com/office/drawing/2014/main" id="{124EFA15-21C3-27B2-4754-DEDA23C73278}"/>
-              </a:ext>
-            </a:extLst>
-          </p:cNvPr>
-          <p:cNvSpPr/>
-          <p:nvPr/>
-        </p:nvSpPr>
-        <p:spPr>
-          <a:xfrm>
-            <a:off x="9784080" y="1691640"/>
-            <a:ext cx="1920240" cy="1280160"/>
-          </a:xfrm>
-          <a:prstGeom prst="roundRect">
-            <a:avLst>
-              <a:gd name="adj" fmla="val 8000"/>
-            </a:avLst>
-          </a:prstGeom>
-          <a:solidFill>
-            <a:srgbClr val="FFFFFF"/>
-          </a:solidFill>
-          <a:ln>
-            <a:solidFill>
-              <a:srgbClr val="D2D7D7"/>
-            </a:solidFill>
-          </a:ln>
-        </p:spPr>
-        <p:style>
-          <a:lnRef idx="1">
-            <a:schemeClr val="accent1"/>
-          </a:lnRef>
-          <a:fillRef idx="3">
-            <a:schemeClr val="accent1"/>
-          </a:fillRef>
-          <a:effectRef idx="2">
-            <a:schemeClr val="accent1"/>
-          </a:effectRef>
-          <a:fontRef idx="minor">
-            <a:schemeClr val="lt1"/>
-          </a:fontRef>
-        </p:style>
-        <p:txBody>
-          <a:bodyPr rtlCol="0" anchor="ctr"/>
-          <a:lstStyle/>
-          <a:p>
-            <a:pPr algn="ctr"/>
-            <a:endParaRPr/>
-          </a:p>
-        </p:txBody>
-      </p:sp>
-      <p:sp>
-        <p:nvSpPr>
-          <p:cNvPr id="32" name="TextBox 31">
-            <a:extLst>
-              <a:ext uri="{FF2B5EF4-FFF2-40B4-BE49-F238E27FC236}">
-                <a16:creationId xmlns:a16="http://schemas.microsoft.com/office/drawing/2014/main" id="{C116F9B0-0B67-321C-8252-A7B9FA726E3B}"/>
-              </a:ext>
-            </a:extLst>
-          </p:cNvPr>
-          <p:cNvSpPr txBox="1"/>
-          <p:nvPr/>
-        </p:nvSpPr>
-        <p:spPr>
-          <a:xfrm>
-            <a:off x="9939528" y="1874519"/>
-            <a:ext cx="384048" cy="274320"/>
-          </a:xfrm>
-          <a:prstGeom prst="rect">
-            <a:avLst/>
-          </a:prstGeom>
-          <a:noFill/>
-        </p:spPr>
-        <p:txBody>
-          <a:bodyPr wrap="square" lIns="36576" tIns="36576" rIns="36576" bIns="36576" anchor="t">
-            <a:spAutoFit/>
-          </a:bodyPr>
-          <a:lstStyle/>
-          <a:p>
-            <a:pPr algn="l">
-              <a:spcAft>
-                <a:spcPts val="0"/>
-              </a:spcAft>
-            </a:pPr>
-            <a:r>
-              <a:rPr sz="1100" b="1">
-                <a:solidFill>
-                  <a:srgbClr val="5C9BBD"/>
-                </a:solidFill>
-                <a:latin typeface="Aptos"/>
-              </a:rPr>
-              <a:t>05</a:t>
-            </a:r>
-          </a:p>
-        </p:txBody>
-      </p:sp>
-      <p:sp>
-        <p:nvSpPr>
-          <p:cNvPr id="33" name="TextBox 32">
-            <a:extLst>
-              <a:ext uri="{FF2B5EF4-FFF2-40B4-BE49-F238E27FC236}">
-                <a16:creationId xmlns:a16="http://schemas.microsoft.com/office/drawing/2014/main" id="{53914F12-6E9D-697F-8F75-C8B91B711F36}"/>
-              </a:ext>
-            </a:extLst>
-          </p:cNvPr>
-          <p:cNvSpPr txBox="1"/>
-          <p:nvPr/>
-        </p:nvSpPr>
-        <p:spPr>
-          <a:xfrm>
-            <a:off x="9939528" y="2212848"/>
-            <a:ext cx="1600200" cy="274320"/>
-          </a:xfrm>
-          <a:prstGeom prst="rect">
-            <a:avLst/>
-          </a:prstGeom>
-          <a:noFill/>
-        </p:spPr>
-        <p:txBody>
-          <a:bodyPr wrap="square" lIns="36576" tIns="36576" rIns="36576" bIns="36576" anchor="t">
-            <a:spAutoFit/>
-          </a:bodyPr>
-          <a:lstStyle/>
-          <a:p>
-            <a:pPr algn="l">
-              <a:spcAft>
-                <a:spcPts val="0"/>
-              </a:spcAft>
-            </a:pPr>
-            <a:r>
-              <a:rPr sz="1500" b="1">
-                <a:solidFill>
-                  <a:srgbClr val="1C3750"/>
-                </a:solidFill>
-                <a:latin typeface="Aptos"/>
-              </a:rPr>
-              <a:t>Forecast</a:t>
-            </a:r>
-          </a:p>
-        </p:txBody>
-      </p:sp>
-      <p:sp>
-        <p:nvSpPr>
-          <p:cNvPr id="34" name="TextBox 33">
-            <a:extLst>
-              <a:ext uri="{FF2B5EF4-FFF2-40B4-BE49-F238E27FC236}">
-                <a16:creationId xmlns:a16="http://schemas.microsoft.com/office/drawing/2014/main" id="{31236247-9BB3-7494-BE65-79D6F550F350}"/>
-              </a:ext>
-            </a:extLst>
-          </p:cNvPr>
-          <p:cNvSpPr txBox="1"/>
-          <p:nvPr/>
-        </p:nvSpPr>
-        <p:spPr>
-          <a:xfrm>
-            <a:off x="9939528" y="2578608"/>
-            <a:ext cx="1600200" cy="243143"/>
-          </a:xfrm>
-          <a:prstGeom prst="rect">
-            <a:avLst/>
-          </a:prstGeom>
-          <a:noFill/>
-        </p:spPr>
-        <p:txBody>
-          <a:bodyPr wrap="square" lIns="36576" tIns="36576" rIns="36576" bIns="36576" anchor="t">
-            <a:spAutoFit/>
-          </a:bodyPr>
-          <a:lstStyle/>
-          <a:p>
-            <a:pPr algn="l">
-              <a:spcAft>
-                <a:spcPts val="0"/>
-              </a:spcAft>
-            </a:pPr>
-            <a:r>
-              <a:rPr sz="1100" b="0" dirty="0">
-                <a:solidFill>
-                  <a:srgbClr val="5B6771"/>
-                </a:solidFill>
-                <a:latin typeface="Aptos"/>
-              </a:rPr>
-              <a:t>Fisher</a:t>
-            </a:r>
-          </a:p>
-        </p:txBody>
-      </p:sp>
-      <p:sp>
-        <p:nvSpPr>
-          <p:cNvPr id="35" name="Rounded Rectangle 34">
-            <a:extLst>
-              <a:ext uri="{FF2B5EF4-FFF2-40B4-BE49-F238E27FC236}">
-                <a16:creationId xmlns:a16="http://schemas.microsoft.com/office/drawing/2014/main" id="{7F7D3783-C22E-5EF7-E610-2A70B20D4A39}"/>
-              </a:ext>
-            </a:extLst>
-          </p:cNvPr>
-          <p:cNvSpPr/>
-          <p:nvPr/>
-        </p:nvSpPr>
-        <p:spPr>
-          <a:xfrm>
-            <a:off x="658368" y="3401568"/>
-            <a:ext cx="6537960" cy="2130552"/>
-          </a:xfrm>
-          <a:prstGeom prst="roundRect">
-            <a:avLst>
-              <a:gd name="adj" fmla="val 8000"/>
-            </a:avLst>
-          </a:prstGeom>
-          <a:solidFill>
-            <a:srgbClr val="E2EDF4"/>
-          </a:solidFill>
-          <a:ln>
-            <a:solidFill>
-              <a:srgbClr val="E2EDF4"/>
-            </a:solidFill>
-          </a:ln>
-        </p:spPr>
-        <p:style>
-          <a:lnRef idx="1">
-            <a:schemeClr val="accent1"/>
-          </a:lnRef>
-          <a:fillRef idx="3">
-            <a:schemeClr val="accent1"/>
-          </a:fillRef>
-          <a:effectRef idx="2">
-            <a:schemeClr val="accent1"/>
-          </a:effectRef>
-          <a:fontRef idx="minor">
-            <a:schemeClr val="lt1"/>
-          </a:fontRef>
-        </p:style>
-        <p:txBody>
-          <a:bodyPr rtlCol="0" anchor="ctr"/>
-          <a:lstStyle/>
-          <a:p>
-            <a:pPr algn="ctr"/>
-            <a:endParaRPr/>
-          </a:p>
-        </p:txBody>
-      </p:sp>
-      <p:sp>
-        <p:nvSpPr>
-          <p:cNvPr id="36" name="TextBox 35">
-            <a:extLst>
-              <a:ext uri="{FF2B5EF4-FFF2-40B4-BE49-F238E27FC236}">
-                <a16:creationId xmlns:a16="http://schemas.microsoft.com/office/drawing/2014/main" id="{A7C6E892-FD91-A527-98E2-B044B1074F27}"/>
-              </a:ext>
-            </a:extLst>
-          </p:cNvPr>
-          <p:cNvSpPr txBox="1"/>
-          <p:nvPr/>
-        </p:nvSpPr>
-        <p:spPr>
-          <a:xfrm>
-            <a:off x="960120" y="3703320"/>
-            <a:ext cx="1920240" cy="274320"/>
-          </a:xfrm>
-          <a:prstGeom prst="rect">
-            <a:avLst/>
-          </a:prstGeom>
-          <a:noFill/>
-        </p:spPr>
-        <p:txBody>
-          <a:bodyPr wrap="square" lIns="36576" tIns="36576" rIns="36576" bIns="36576" anchor="t">
-            <a:spAutoFit/>
-          </a:bodyPr>
-          <a:lstStyle/>
-          <a:p>
-            <a:pPr algn="l">
-              <a:spcAft>
-                <a:spcPts val="0"/>
-              </a:spcAft>
-            </a:pPr>
-            <a:r>
-              <a:rPr sz="1100" b="1">
-                <a:solidFill>
-                  <a:srgbClr val="5C9BBD"/>
-                </a:solidFill>
-                <a:latin typeface="Aptos"/>
-              </a:rPr>
-              <a:t>LIMBER PROJECTION</a:t>
-            </a:r>
-          </a:p>
-        </p:txBody>
-      </p:sp>
-      <p:sp>
-        <p:nvSpPr>
-          <p:cNvPr id="37" name="TextBox 36">
-            <a:extLst>
-              <a:ext uri="{FF2B5EF4-FFF2-40B4-BE49-F238E27FC236}">
-                <a16:creationId xmlns:a16="http://schemas.microsoft.com/office/drawing/2014/main" id="{59475D02-0163-82B5-352D-38596B45D924}"/>
-              </a:ext>
-            </a:extLst>
-          </p:cNvPr>
-          <p:cNvSpPr txBox="1"/>
-          <p:nvPr/>
-        </p:nvSpPr>
-        <p:spPr>
-          <a:xfrm>
-            <a:off x="960119" y="4160520"/>
-            <a:ext cx="7883843" cy="412421"/>
-          </a:xfrm>
-          <a:prstGeom prst="rect">
-            <a:avLst/>
-          </a:prstGeom>
-          <a:noFill/>
-        </p:spPr>
-        <p:txBody>
-          <a:bodyPr wrap="square" lIns="36576" tIns="36576" rIns="36576" bIns="36576" anchor="t">
-            <a:spAutoFit/>
-          </a:bodyPr>
-          <a:lstStyle/>
-          <a:p>
-            <a:pPr algn="l">
-              <a:spcAft>
-                <a:spcPts val="0"/>
-              </a:spcAft>
-            </a:pPr>
-            <a:r>
-              <a:rPr sz="2200" b="1" dirty="0">
-                <a:solidFill>
-                  <a:srgbClr val="1C3750"/>
-                </a:solidFill>
-                <a:latin typeface="Aptos Display"/>
-              </a:rPr>
-              <a:t>Cℓᴬᴮ ≈ ∫ </a:t>
-            </a:r>
-            <a:r>
-              <a:rPr sz="2200" b="1" dirty="0" err="1">
-                <a:solidFill>
-                  <a:srgbClr val="1C3750"/>
-                </a:solidFill>
-                <a:latin typeface="Aptos Display"/>
-              </a:rPr>
-              <a:t>dχ</a:t>
-            </a:r>
-            <a:r>
-              <a:rPr sz="2200" b="1" dirty="0">
-                <a:solidFill>
-                  <a:srgbClr val="1C3750"/>
-                </a:solidFill>
-                <a:latin typeface="Aptos Display"/>
-              </a:rPr>
-              <a:t> / χ²  Wᴬ(</a:t>
-            </a:r>
-            <a:r>
-              <a:rPr sz="2200" b="1" dirty="0" err="1">
-                <a:solidFill>
-                  <a:srgbClr val="1C3750"/>
-                </a:solidFill>
-                <a:latin typeface="Aptos Display"/>
-              </a:rPr>
-              <a:t>χ</a:t>
-            </a:r>
-            <a:r>
-              <a:rPr sz="2200" b="1" dirty="0">
-                <a:solidFill>
-                  <a:srgbClr val="1C3750"/>
-                </a:solidFill>
-                <a:latin typeface="Aptos Display"/>
-              </a:rPr>
-              <a:t>) Wᴮ(</a:t>
-            </a:r>
-            <a:r>
-              <a:rPr sz="2200" b="1" dirty="0" err="1">
-                <a:solidFill>
-                  <a:srgbClr val="1C3750"/>
-                </a:solidFill>
-                <a:latin typeface="Aptos Display"/>
-              </a:rPr>
-              <a:t>χ</a:t>
-            </a:r>
-            <a:r>
-              <a:rPr sz="2200" b="1" dirty="0">
-                <a:solidFill>
-                  <a:srgbClr val="1C3750"/>
-                </a:solidFill>
-                <a:latin typeface="Aptos Display"/>
-              </a:rPr>
-              <a:t>)</a:t>
-            </a:r>
-            <a:r>
-              <a:rPr lang="nl-NL" sz="2200" b="1" dirty="0">
-                <a:solidFill>
-                  <a:srgbClr val="1C3750"/>
-                </a:solidFill>
-                <a:latin typeface="Aptos Display"/>
-              </a:rPr>
-              <a:t> </a:t>
-            </a:r>
-            <a:r>
-              <a:rPr sz="2200" b="1" dirty="0">
-                <a:solidFill>
-                  <a:srgbClr val="1C3750"/>
-                </a:solidFill>
-                <a:latin typeface="Aptos Display"/>
-              </a:rPr>
-              <a:t>× P((ℓ + 1/2) / </a:t>
-            </a:r>
-            <a:r>
-              <a:rPr sz="2200" b="1" dirty="0" err="1">
-                <a:solidFill>
-                  <a:srgbClr val="1C3750"/>
-                </a:solidFill>
-                <a:latin typeface="Aptos Display"/>
-              </a:rPr>
-              <a:t>χ</a:t>
-            </a:r>
-            <a:r>
-              <a:rPr sz="2200" b="1" dirty="0">
-                <a:solidFill>
-                  <a:srgbClr val="1C3750"/>
-                </a:solidFill>
-                <a:latin typeface="Aptos Display"/>
-              </a:rPr>
-              <a:t>, z)</a:t>
-            </a:r>
-          </a:p>
-        </p:txBody>
-      </p:sp>
-      <p:pic>
-        <p:nvPicPr>
-          <p:cNvPr id="38" name="Picture 37" descr="Pk_nonlinear.png">
-            <a:extLst>
-              <a:ext uri="{FF2B5EF4-FFF2-40B4-BE49-F238E27FC236}">
-                <a16:creationId xmlns:a16="http://schemas.microsoft.com/office/drawing/2014/main" id="{B6B3D512-7F21-E7D5-C65E-360CF80CF2E8}"/>
-              </a:ext>
-            </a:extLst>
-          </p:cNvPr>
-          <p:cNvPicPr>
-            <a:picLocks noChangeAspect="1"/>
-          </p:cNvPicPr>
-          <p:nvPr/>
-        </p:nvPicPr>
-        <p:blipFill>
-          <a:blip r:embed="rId3"/>
-          <a:stretch>
-            <a:fillRect/>
-          </a:stretch>
-        </p:blipFill>
-        <p:spPr>
-          <a:xfrm>
-            <a:off x="7572745" y="3246120"/>
-            <a:ext cx="3910605" cy="2514600"/>
-          </a:xfrm>
-          <a:prstGeom prst="rect">
-            <a:avLst/>
-          </a:prstGeom>
-        </p:spPr>
-      </p:pic>
-      <p:sp>
-        <p:nvSpPr>
-          <p:cNvPr id="39" name="TextBox 38">
-            <a:extLst>
-              <a:ext uri="{FF2B5EF4-FFF2-40B4-BE49-F238E27FC236}">
-                <a16:creationId xmlns:a16="http://schemas.microsoft.com/office/drawing/2014/main" id="{C4DABC36-8001-DF67-C338-6C60BC04FC85}"/>
-              </a:ext>
-            </a:extLst>
-          </p:cNvPr>
-          <p:cNvSpPr txBox="1"/>
-          <p:nvPr/>
-        </p:nvSpPr>
-        <p:spPr>
-          <a:xfrm>
-            <a:off x="7818120" y="5760720"/>
-            <a:ext cx="3383280" cy="274320"/>
-          </a:xfrm>
-          <a:prstGeom prst="rect">
-            <a:avLst/>
-          </a:prstGeom>
-          <a:noFill/>
-        </p:spPr>
-        <p:txBody>
-          <a:bodyPr wrap="square" lIns="36576" tIns="36576" rIns="36576" bIns="36576" anchor="t">
-            <a:spAutoFit/>
-          </a:bodyPr>
-          <a:lstStyle/>
-          <a:p>
-            <a:pPr algn="ctr">
-              <a:spcAft>
-                <a:spcPts val="0"/>
-              </a:spcAft>
-            </a:pPr>
-            <a:r>
-              <a:rPr sz="1300" b="1" dirty="0">
-                <a:latin typeface="Aptos"/>
-              </a:rPr>
-              <a:t>ℓ = 10 ... 1,000  |  24 cross-spectra</a:t>
+              <a:t>above the clustering signal
+in the shallow survey</a:t>
             </a:r>
           </a:p>
         </p:txBody>
@@ -9462,7 +8897,7 @@
     </p:spTree>
     <p:extLst>
       <p:ext uri="{BB962C8B-B14F-4D97-AF65-F5344CB8AC3E}">
-        <p14:creationId xmlns:p14="http://schemas.microsoft.com/office/powerpoint/2010/main" val="2437831426"/>
+        <p14:creationId xmlns:p14="http://schemas.microsoft.com/office/powerpoint/2010/main" val="2505361259"/>
       </p:ext>
     </p:extLst>
   </p:cSld>
@@ -9494,7 +8929,7 @@
           <p:cNvPr id="5" name="Slide Number Placeholder 4">
             <a:extLst>
               <a:ext uri="{FF2B5EF4-FFF2-40B4-BE49-F238E27FC236}">
-                <a16:creationId xmlns:a16="http://schemas.microsoft.com/office/drawing/2014/main" id="{AD816458-A348-5A7A-5AAE-31E7CD425E12}"/>
+                <a16:creationId xmlns:a16="http://schemas.microsoft.com/office/drawing/2014/main" id="{BF709D5D-86DB-3381-9BD8-186814DDE89F}"/>
               </a:ext>
             </a:extLst>
           </p:cNvPr>
@@ -9520,10 +8955,10 @@
       </p:sp>
       <p:sp>
         <p:nvSpPr>
-          <p:cNvPr id="23" name="TextBox 22">
-            <a:extLst>
-              <a:ext uri="{FF2B5EF4-FFF2-40B4-BE49-F238E27FC236}">
-                <a16:creationId xmlns:a16="http://schemas.microsoft.com/office/drawing/2014/main" id="{D124546F-4117-EB11-2DDD-36950DD5363B}"/>
+          <p:cNvPr id="9" name="TextBox 8">
+            <a:extLst>
+              <a:ext uri="{FF2B5EF4-FFF2-40B4-BE49-F238E27FC236}">
+                <a16:creationId xmlns:a16="http://schemas.microsoft.com/office/drawing/2014/main" id="{D0B585E0-EA20-F822-AAAC-BD6A6F49F356}"/>
               </a:ext>
             </a:extLst>
           </p:cNvPr>
@@ -9552,20 +8987,20 @@
               </a:spcAft>
             </a:pPr>
             <a:r>
-              <a:rPr sz="4400" b="1" dirty="0">
+              <a:rPr sz="4400" b="1">
                 <a:latin typeface="Aptos Display"/>
               </a:rPr>
-              <a:t>Why FRB Auto-Correlation Is Not Enough</a:t>
+              <a:t>Tomographic Cross-Signal</a:t>
             </a:r>
           </a:p>
         </p:txBody>
       </p:sp>
       <p:pic>
         <p:nvPicPr>
-          <p:cNvPr id="25" name="Picture 24" descr="FRB_magnetar_Cell_shallow_shotnoise.png">
-            <a:extLst>
-              <a:ext uri="{FF2B5EF4-FFF2-40B4-BE49-F238E27FC236}">
-                <a16:creationId xmlns:a16="http://schemas.microsoft.com/office/drawing/2014/main" id="{6CA37467-72CF-AE89-B058-E564C0BEC4AD}"/>
+          <p:cNvPr id="11" name="Picture 10" descr="survey_magnetar_all_bins.png">
+            <a:extLst>
+              <a:ext uri="{FF2B5EF4-FFF2-40B4-BE49-F238E27FC236}">
+                <a16:creationId xmlns:a16="http://schemas.microsoft.com/office/drawing/2014/main" id="{73E1AA69-9303-5135-558B-2BC4D9A7B929}"/>
               </a:ext>
             </a:extLst>
           </p:cNvPr>
@@ -9582,8 +9017,8 @@
         </p:blipFill>
         <p:spPr>
           <a:xfrm>
-            <a:off x="1114131" y="1527048"/>
-            <a:ext cx="6275656" cy="4480560"/>
+            <a:off x="973726" y="1444752"/>
+            <a:ext cx="7333707" cy="4892040"/>
           </a:xfrm>
           <a:prstGeom prst="rect">
             <a:avLst/>
@@ -9592,10 +9027,10 @@
       </p:pic>
       <p:sp>
         <p:nvSpPr>
-          <p:cNvPr id="26" name="Rounded Rectangle 25">
-            <a:extLst>
-              <a:ext uri="{FF2B5EF4-FFF2-40B4-BE49-F238E27FC236}">
-                <a16:creationId xmlns:a16="http://schemas.microsoft.com/office/drawing/2014/main" id="{E17BFBBA-CAC4-9D3A-9D18-D387EEBAD4BE}"/>
+          <p:cNvPr id="12" name="Rounded Rectangle 11">
+            <a:extLst>
+              <a:ext uri="{FF2B5EF4-FFF2-40B4-BE49-F238E27FC236}">
+                <a16:creationId xmlns:a16="http://schemas.microsoft.com/office/drawing/2014/main" id="{F6374BB0-6870-5DF8-D208-BE4E276022C7}"/>
               </a:ext>
             </a:extLst>
           </p:cNvPr>
@@ -9604,8 +9039,8 @@
         </p:nvSpPr>
         <p:spPr>
           <a:xfrm>
-            <a:off x="8183879" y="1755648"/>
-            <a:ext cx="3383280" cy="3886200"/>
+            <a:off x="8942832" y="1691640"/>
+            <a:ext cx="2606040" cy="4370832"/>
           </a:xfrm>
           <a:prstGeom prst="roundRect">
             <a:avLst>
@@ -9613,11 +9048,11 @@
             </a:avLst>
           </a:prstGeom>
           <a:solidFill>
-            <a:srgbClr val="1C3750"/>
+            <a:srgbClr val="FFFFFF"/>
           </a:solidFill>
           <a:ln>
             <a:solidFill>
-              <a:srgbClr val="1C3750"/>
+              <a:srgbClr val="D2D7D7"/>
             </a:solidFill>
           </a:ln>
         </p:spPr>
@@ -9646,10 +9081,10 @@
       </p:sp>
       <p:sp>
         <p:nvSpPr>
-          <p:cNvPr id="27" name="TextBox 26">
-            <a:extLst>
-              <a:ext uri="{FF2B5EF4-FFF2-40B4-BE49-F238E27FC236}">
-                <a16:creationId xmlns:a16="http://schemas.microsoft.com/office/drawing/2014/main" id="{12F82F97-6961-E226-71A6-53E62DA53AB7}"/>
+          <p:cNvPr id="13" name="TextBox 12">
+            <a:extLst>
+              <a:ext uri="{FF2B5EF4-FFF2-40B4-BE49-F238E27FC236}">
+                <a16:creationId xmlns:a16="http://schemas.microsoft.com/office/drawing/2014/main" id="{81AA7831-2848-34FA-8FB9-FB6862D7949E}"/>
               </a:ext>
             </a:extLst>
           </p:cNvPr>
@@ -9658,8 +9093,8 @@
         </p:nvSpPr>
         <p:spPr>
           <a:xfrm>
-            <a:off x="8485632" y="2084831"/>
-            <a:ext cx="2651760" cy="320040"/>
+            <a:off x="9253728" y="1965960"/>
+            <a:ext cx="1920240" cy="502920"/>
           </a:xfrm>
           <a:prstGeom prst="rect">
             <a:avLst/>
@@ -9678,23 +9113,23 @@
               </a:spcAft>
             </a:pPr>
             <a:r>
-              <a:rPr sz="1300" b="1">
+              <a:rPr sz="3000" b="1">
                 <a:solidFill>
-                  <a:srgbClr val="DDA33A"/>
+                  <a:srgbClr val="188985"/>
                 </a:solidFill>
-                <a:latin typeface="Aptos"/>
-              </a:rPr>
-              <a:t>SHOT NOISE</a:t>
-            </a:r>
-          </a:p>
-        </p:txBody>
-      </p:sp>
-      <p:sp>
-        <p:nvSpPr>
-          <p:cNvPr id="28" name="TextBox 27">
-            <a:extLst>
-              <a:ext uri="{FF2B5EF4-FFF2-40B4-BE49-F238E27FC236}">
-                <a16:creationId xmlns:a16="http://schemas.microsoft.com/office/drawing/2014/main" id="{D8596016-E0A3-5928-5657-95838BAC40E4}"/>
+                <a:latin typeface="Aptos Display"/>
+              </a:rPr>
+              <a:t>24</a:t>
+            </a:r>
+          </a:p>
+        </p:txBody>
+      </p:sp>
+      <p:sp>
+        <p:nvSpPr>
+          <p:cNvPr id="14" name="TextBox 13">
+            <a:extLst>
+              <a:ext uri="{FF2B5EF4-FFF2-40B4-BE49-F238E27FC236}">
+                <a16:creationId xmlns:a16="http://schemas.microsoft.com/office/drawing/2014/main" id="{AAC5297C-1F90-DB43-E71D-4100A644F39A}"/>
               </a:ext>
             </a:extLst>
           </p:cNvPr>
@@ -9703,8 +9138,8 @@
         </p:nvSpPr>
         <p:spPr>
           <a:xfrm>
-            <a:off x="8485632" y="2670048"/>
-            <a:ext cx="2651760" cy="594360"/>
+            <a:off x="9253728" y="2523744"/>
+            <a:ext cx="1920240" cy="256032"/>
           </a:xfrm>
           <a:prstGeom prst="rect">
             <a:avLst/>
@@ -9723,23 +9158,75 @@
               </a:spcAft>
             </a:pPr>
             <a:r>
-              <a:rPr sz="3000" b="1">
+              <a:rPr sz="1100" b="1">
                 <a:solidFill>
-                  <a:srgbClr val="FFFFFF"/>
+                  <a:srgbClr val="5B6771"/>
                 </a:solidFill>
-                <a:latin typeface="Aptos Display"/>
-              </a:rPr>
-              <a:t>Nℓ = 1 / n̄</a:t>
-            </a:r>
-          </a:p>
-        </p:txBody>
-      </p:sp>
-      <p:sp>
-        <p:nvSpPr>
-          <p:cNvPr id="29" name="TextBox 28">
-            <a:extLst>
-              <a:ext uri="{FF2B5EF4-FFF2-40B4-BE49-F238E27FC236}">
-                <a16:creationId xmlns:a16="http://schemas.microsoft.com/office/drawing/2014/main" id="{4C580DBC-8B1C-871D-EE98-D64892C33013}"/>
+                <a:latin typeface="Aptos"/>
+              </a:rPr>
+              <a:t>CROSS-SPECTRA</a:t>
+            </a:r>
+          </a:p>
+        </p:txBody>
+      </p:sp>
+      <p:sp>
+        <p:nvSpPr>
+          <p:cNvPr id="15" name="Rectangle 14">
+            <a:extLst>
+              <a:ext uri="{FF2B5EF4-FFF2-40B4-BE49-F238E27FC236}">
+                <a16:creationId xmlns:a16="http://schemas.microsoft.com/office/drawing/2014/main" id="{AF5CD867-BF80-BD2E-B30A-066CA16DC78E}"/>
+              </a:ext>
+            </a:extLst>
+          </p:cNvPr>
+          <p:cNvSpPr/>
+          <p:nvPr/>
+        </p:nvSpPr>
+        <p:spPr>
+          <a:xfrm>
+            <a:off x="9253728" y="3063240"/>
+            <a:ext cx="1645920" cy="36576"/>
+          </a:xfrm>
+          <a:prstGeom prst="rect">
+            <a:avLst/>
+          </a:prstGeom>
+          <a:solidFill>
+            <a:srgbClr val="D2D7D7"/>
+          </a:solidFill>
+          <a:ln>
+            <a:solidFill>
+              <a:srgbClr val="D2D7D7"/>
+            </a:solidFill>
+          </a:ln>
+        </p:spPr>
+        <p:style>
+          <a:lnRef idx="1">
+            <a:schemeClr val="accent1"/>
+          </a:lnRef>
+          <a:fillRef idx="3">
+            <a:schemeClr val="accent1"/>
+          </a:fillRef>
+          <a:effectRef idx="2">
+            <a:schemeClr val="accent1"/>
+          </a:effectRef>
+          <a:fontRef idx="minor">
+            <a:schemeClr val="lt1"/>
+          </a:fontRef>
+        </p:style>
+        <p:txBody>
+          <a:bodyPr rtlCol="0" anchor="ctr"/>
+          <a:lstStyle/>
+          <a:p>
+            <a:pPr algn="ctr"/>
+            <a:endParaRPr/>
+          </a:p>
+        </p:txBody>
+      </p:sp>
+      <p:sp>
+        <p:nvSpPr>
+          <p:cNvPr id="16" name="TextBox 15">
+            <a:extLst>
+              <a:ext uri="{FF2B5EF4-FFF2-40B4-BE49-F238E27FC236}">
+                <a16:creationId xmlns:a16="http://schemas.microsoft.com/office/drawing/2014/main" id="{D956DFA8-E32D-A45C-E215-D8DDA09A7216}"/>
               </a:ext>
             </a:extLst>
           </p:cNvPr>
@@ -9748,8 +9235,8 @@
         </p:nvSpPr>
         <p:spPr>
           <a:xfrm>
-            <a:off x="8485632" y="3611880"/>
-            <a:ext cx="2651760" cy="566928"/>
+            <a:off x="9253728" y="3364992"/>
+            <a:ext cx="914400" cy="228600"/>
           </a:xfrm>
           <a:prstGeom prst="rect">
             <a:avLst/>
@@ -9768,23 +9255,23 @@
               </a:spcAft>
             </a:pPr>
             <a:r>
-              <a:rPr sz="3100" b="1">
+              <a:rPr sz="1100" b="1">
                 <a:solidFill>
                   <a:srgbClr val="DD5B4A"/>
                 </a:solidFill>
-                <a:latin typeface="Aptos Display"/>
-              </a:rPr>
-              <a:t>~10³</a:t>
-            </a:r>
-          </a:p>
-        </p:txBody>
-      </p:sp>
-      <p:sp>
-        <p:nvSpPr>
-          <p:cNvPr id="30" name="TextBox 29">
-            <a:extLst>
-              <a:ext uri="{FF2B5EF4-FFF2-40B4-BE49-F238E27FC236}">
-                <a16:creationId xmlns:a16="http://schemas.microsoft.com/office/drawing/2014/main" id="{03F679CD-4DAD-B654-6D35-90323B8D211E}"/>
+                <a:latin typeface="Aptos"/>
+              </a:rPr>
+              <a:t>LOW z</a:t>
+            </a:r>
+          </a:p>
+        </p:txBody>
+      </p:sp>
+      <p:sp>
+        <p:nvSpPr>
+          <p:cNvPr id="17" name="TextBox 16">
+            <a:extLst>
+              <a:ext uri="{FF2B5EF4-FFF2-40B4-BE49-F238E27FC236}">
+                <a16:creationId xmlns:a16="http://schemas.microsoft.com/office/drawing/2014/main" id="{860331BD-3FD2-E680-60B1-0DCE33D37791}"/>
               </a:ext>
             </a:extLst>
           </p:cNvPr>
@@ -9793,8 +9280,8 @@
         </p:nvSpPr>
         <p:spPr>
           <a:xfrm>
-            <a:off x="8485632" y="4224528"/>
-            <a:ext cx="2560320" cy="731520"/>
+            <a:off x="9253728" y="3675887"/>
+            <a:ext cx="1783080" cy="566928"/>
           </a:xfrm>
           <a:prstGeom prst="rect">
             <a:avLst/>
@@ -9815,12 +9302,103 @@
             <a:r>
               <a:rPr sz="1500" b="0">
                 <a:solidFill>
-                  <a:srgbClr val="DBE4E8"/>
+                  <a:srgbClr val="182331"/>
                 </a:solidFill>
                 <a:latin typeface="Aptos"/>
               </a:rPr>
-              <a:t>above the clustering signal
-in the shallow survey</a:t>
+              <a:t>Shallow survey
+has more signal</a:t>
+            </a:r>
+          </a:p>
+        </p:txBody>
+      </p:sp>
+      <p:sp>
+        <p:nvSpPr>
+          <p:cNvPr id="18" name="TextBox 17">
+            <a:extLst>
+              <a:ext uri="{FF2B5EF4-FFF2-40B4-BE49-F238E27FC236}">
+                <a16:creationId xmlns:a16="http://schemas.microsoft.com/office/drawing/2014/main" id="{6992626B-C2F8-84C7-FFE1-FC645F13AB76}"/>
+              </a:ext>
+            </a:extLst>
+          </p:cNvPr>
+          <p:cNvSpPr txBox="1"/>
+          <p:nvPr/>
+        </p:nvSpPr>
+        <p:spPr>
+          <a:xfrm>
+            <a:off x="9253728" y="4498848"/>
+            <a:ext cx="914400" cy="228600"/>
+          </a:xfrm>
+          <a:prstGeom prst="rect">
+            <a:avLst/>
+          </a:prstGeom>
+          <a:noFill/>
+        </p:spPr>
+        <p:txBody>
+          <a:bodyPr wrap="square" lIns="36576" tIns="36576" rIns="36576" bIns="36576" anchor="t">
+            <a:spAutoFit/>
+          </a:bodyPr>
+          <a:lstStyle/>
+          <a:p>
+            <a:pPr algn="l">
+              <a:spcAft>
+                <a:spcPts val="0"/>
+              </a:spcAft>
+            </a:pPr>
+            <a:r>
+              <a:rPr sz="1100" b="1">
+                <a:solidFill>
+                  <a:srgbClr val="188985"/>
+                </a:solidFill>
+                <a:latin typeface="Aptos"/>
+              </a:rPr>
+              <a:t>HIGH z</a:t>
+            </a:r>
+          </a:p>
+        </p:txBody>
+      </p:sp>
+      <p:sp>
+        <p:nvSpPr>
+          <p:cNvPr id="19" name="TextBox 18">
+            <a:extLst>
+              <a:ext uri="{FF2B5EF4-FFF2-40B4-BE49-F238E27FC236}">
+                <a16:creationId xmlns:a16="http://schemas.microsoft.com/office/drawing/2014/main" id="{09E20AC4-1FF7-9464-C6CB-B8A914831E2D}"/>
+              </a:ext>
+            </a:extLst>
+          </p:cNvPr>
+          <p:cNvSpPr txBox="1"/>
+          <p:nvPr/>
+        </p:nvSpPr>
+        <p:spPr>
+          <a:xfrm>
+            <a:off x="9253728" y="4809744"/>
+            <a:ext cx="1783080" cy="566928"/>
+          </a:xfrm>
+          <a:prstGeom prst="rect">
+            <a:avLst/>
+          </a:prstGeom>
+          <a:noFill/>
+        </p:spPr>
+        <p:txBody>
+          <a:bodyPr wrap="square" lIns="36576" tIns="36576" rIns="36576" bIns="36576" anchor="t">
+            <a:spAutoFit/>
+          </a:bodyPr>
+          <a:lstStyle/>
+          <a:p>
+            <a:pPr algn="l">
+              <a:spcAft>
+                <a:spcPts val="0"/>
+              </a:spcAft>
+            </a:pPr>
+            <a:r>
+              <a:rPr sz="1500" b="0">
+                <a:solidFill>
+                  <a:srgbClr val="182331"/>
+                </a:solidFill>
+                <a:latin typeface="Aptos"/>
+              </a:rPr>
+              <a:t>Deep survey
+retains information</a:t>
             </a:r>
           </a:p>
         </p:txBody>
@@ -9828,7 +9406,7 @@
     </p:spTree>
     <p:extLst>
       <p:ext uri="{BB962C8B-B14F-4D97-AF65-F5344CB8AC3E}">
-        <p14:creationId xmlns:p14="http://schemas.microsoft.com/office/powerpoint/2010/main" val="2505361259"/>
+        <p14:creationId xmlns:p14="http://schemas.microsoft.com/office/powerpoint/2010/main" val="3032097602"/>
       </p:ext>
     </p:extLst>
   </p:cSld>
@@ -9860,7 +9438,7 @@
           <p:cNvPr id="5" name="Slide Number Placeholder 4">
             <a:extLst>
               <a:ext uri="{FF2B5EF4-FFF2-40B4-BE49-F238E27FC236}">
-                <a16:creationId xmlns:a16="http://schemas.microsoft.com/office/drawing/2014/main" id="{BF709D5D-86DB-3381-9BD8-186814DDE89F}"/>
+                <a16:creationId xmlns:a16="http://schemas.microsoft.com/office/drawing/2014/main" id="{31F8CDD4-E0E8-E1B3-68A0-EFCC5CFC2647}"/>
               </a:ext>
             </a:extLst>
           </p:cNvPr>
@@ -9886,10 +9464,10 @@
       </p:sp>
       <p:sp>
         <p:nvSpPr>
-          <p:cNvPr id="9" name="TextBox 8">
-            <a:extLst>
-              <a:ext uri="{FF2B5EF4-FFF2-40B4-BE49-F238E27FC236}">
-                <a16:creationId xmlns:a16="http://schemas.microsoft.com/office/drawing/2014/main" id="{D0B585E0-EA20-F822-AAAC-BD6A6F49F356}"/>
+          <p:cNvPr id="11" name="TextBox 10">
+            <a:extLst>
+              <a:ext uri="{FF2B5EF4-FFF2-40B4-BE49-F238E27FC236}">
+                <a16:creationId xmlns:a16="http://schemas.microsoft.com/office/drawing/2014/main" id="{18E263C1-D3C0-49EE-4485-CEF3524028DD}"/>
               </a:ext>
             </a:extLst>
           </p:cNvPr>
@@ -9918,50 +9496,20 @@
               </a:spcAft>
             </a:pPr>
             <a:r>
-              <a:rPr sz="4400" b="1">
+              <a:rPr sz="4400" b="1" dirty="0">
                 <a:latin typeface="Aptos Display"/>
               </a:rPr>
-              <a:t>Tomographic Cross-Signal</a:t>
-            </a:r>
-          </a:p>
-        </p:txBody>
-      </p:sp>
-      <p:pic>
-        <p:nvPicPr>
-          <p:cNvPr id="11" name="Picture 10" descr="survey_magnetar_all_bins.png">
-            <a:extLst>
-              <a:ext uri="{FF2B5EF4-FFF2-40B4-BE49-F238E27FC236}">
-                <a16:creationId xmlns:a16="http://schemas.microsoft.com/office/drawing/2014/main" id="{73E1AA69-9303-5135-558B-2BC4D9A7B929}"/>
-              </a:ext>
-            </a:extLst>
-          </p:cNvPr>
-          <p:cNvPicPr>
-            <a:picLocks noChangeAspect="1"/>
-          </p:cNvPicPr>
-          <p:nvPr/>
-        </p:nvPicPr>
-        <p:blipFill>
-          <a:blip r:embed="rId3"/>
-          <a:stretch>
-            <a:fillRect/>
-          </a:stretch>
-        </p:blipFill>
-        <p:spPr>
-          <a:xfrm>
-            <a:off x="973726" y="1444752"/>
-            <a:ext cx="7333707" cy="4892040"/>
-          </a:xfrm>
-          <a:prstGeom prst="rect">
-            <a:avLst/>
-          </a:prstGeom>
-        </p:spPr>
-      </p:pic>
-      <p:sp>
-        <p:nvSpPr>
-          <p:cNvPr id="12" name="Rounded Rectangle 11">
-            <a:extLst>
-              <a:ext uri="{FF2B5EF4-FFF2-40B4-BE49-F238E27FC236}">
-                <a16:creationId xmlns:a16="http://schemas.microsoft.com/office/drawing/2014/main" id="{F6374BB0-6870-5DF8-D208-BE4E276022C7}"/>
+              <a:t>Cross-Correlation Enables the Measurement</a:t>
+            </a:r>
+          </a:p>
+        </p:txBody>
+      </p:sp>
+      <p:sp>
+        <p:nvSpPr>
+          <p:cNvPr id="14" name="Rounded Rectangle 13">
+            <a:extLst>
+              <a:ext uri="{FF2B5EF4-FFF2-40B4-BE49-F238E27FC236}">
+                <a16:creationId xmlns:a16="http://schemas.microsoft.com/office/drawing/2014/main" id="{62BAC528-5D70-72B7-BE5D-8B01986A390A}"/>
               </a:ext>
             </a:extLst>
           </p:cNvPr>
@@ -9970,8 +9518,8 @@
         </p:nvSpPr>
         <p:spPr>
           <a:xfrm>
-            <a:off x="8942832" y="1691640"/>
-            <a:ext cx="2606040" cy="4370832"/>
+            <a:off x="8156448" y="1664208"/>
+            <a:ext cx="2880360" cy="960120"/>
           </a:xfrm>
           <a:prstGeom prst="roundRect">
             <a:avLst>
@@ -10012,10 +9560,10 @@
       </p:sp>
       <p:sp>
         <p:nvSpPr>
-          <p:cNvPr id="13" name="TextBox 12">
-            <a:extLst>
-              <a:ext uri="{FF2B5EF4-FFF2-40B4-BE49-F238E27FC236}">
-                <a16:creationId xmlns:a16="http://schemas.microsoft.com/office/drawing/2014/main" id="{81AA7831-2848-34FA-8FB9-FB6862D7949E}"/>
+          <p:cNvPr id="15" name="TextBox 14">
+            <a:extLst>
+              <a:ext uri="{FF2B5EF4-FFF2-40B4-BE49-F238E27FC236}">
+                <a16:creationId xmlns:a16="http://schemas.microsoft.com/office/drawing/2014/main" id="{35BBD5FD-728F-B613-A8A0-50D777A4626E}"/>
               </a:ext>
             </a:extLst>
           </p:cNvPr>
@@ -10024,8 +9572,8 @@
         </p:nvSpPr>
         <p:spPr>
           <a:xfrm>
-            <a:off x="9253728" y="1965960"/>
-            <a:ext cx="1920240" cy="502920"/>
+            <a:off x="8321040" y="1792224"/>
+            <a:ext cx="2551176" cy="384048"/>
           </a:xfrm>
           <a:prstGeom prst="rect">
             <a:avLst/>
@@ -10044,23 +9592,23 @@
               </a:spcAft>
             </a:pPr>
             <a:r>
-              <a:rPr sz="3000" b="1">
+              <a:rPr sz="2400" b="1">
                 <a:solidFill>
-                  <a:srgbClr val="188985"/>
+                  <a:srgbClr val="DD5B4A"/>
                 </a:solidFill>
                 <a:latin typeface="Aptos Display"/>
               </a:rPr>
-              <a:t>24</a:t>
-            </a:r>
-          </a:p>
-        </p:txBody>
-      </p:sp>
-      <p:sp>
-        <p:nvSpPr>
-          <p:cNvPr id="14" name="TextBox 13">
-            <a:extLst>
-              <a:ext uri="{FF2B5EF4-FFF2-40B4-BE49-F238E27FC236}">
-                <a16:creationId xmlns:a16="http://schemas.microsoft.com/office/drawing/2014/main" id="{AAC5297C-1F90-DB43-E71D-4100A644F39A}"/>
+              <a:t>17-51×</a:t>
+            </a:r>
+          </a:p>
+        </p:txBody>
+      </p:sp>
+      <p:sp>
+        <p:nvSpPr>
+          <p:cNvPr id="16" name="TextBox 15">
+            <a:extLst>
+              <a:ext uri="{FF2B5EF4-FFF2-40B4-BE49-F238E27FC236}">
+                <a16:creationId xmlns:a16="http://schemas.microsoft.com/office/drawing/2014/main" id="{9B451DCF-2D15-1B39-D497-7F764AD71C61}"/>
               </a:ext>
             </a:extLst>
           </p:cNvPr>
@@ -10069,8 +9617,8 @@
         </p:nvSpPr>
         <p:spPr>
           <a:xfrm>
-            <a:off x="9253728" y="2523744"/>
-            <a:ext cx="1920240" cy="256032"/>
+            <a:off x="8321040" y="2231136"/>
+            <a:ext cx="2551176" cy="227755"/>
           </a:xfrm>
           <a:prstGeom prst="rect">
             <a:avLst/>
@@ -10089,23 +9637,41 @@
               </a:spcAft>
             </a:pPr>
             <a:r>
-              <a:rPr sz="1100" b="1">
+              <a:rPr sz="1000" b="1" dirty="0">
                 <a:solidFill>
                   <a:srgbClr val="5B6771"/>
                 </a:solidFill>
                 <a:latin typeface="Aptos"/>
               </a:rPr>
-              <a:t>CROSS-SPECTRA</a:t>
-            </a:r>
-          </a:p>
-        </p:txBody>
-      </p:sp>
-      <p:sp>
-        <p:nvSpPr>
-          <p:cNvPr id="15" name="Rectangle 14">
-            <a:extLst>
-              <a:ext uri="{FF2B5EF4-FFF2-40B4-BE49-F238E27FC236}">
-                <a16:creationId xmlns:a16="http://schemas.microsoft.com/office/drawing/2014/main" id="{AF5CD867-BF80-BD2E-B30A-066CA16DC78E}"/>
+              <a:t>SMALLER </a:t>
+            </a:r>
+            <a:r>
+              <a:rPr lang="nl-NL" sz="1000" b="1" dirty="0">
+                <a:solidFill>
+                  <a:srgbClr val="5B6771"/>
+                </a:solidFill>
+                <a:latin typeface="Aptos"/>
+              </a:rPr>
+              <a:t>1 Sigma</a:t>
+            </a:r>
+            <a:r>
+              <a:rPr sz="1000" b="1" dirty="0">
+                <a:solidFill>
+                  <a:srgbClr val="5B6771"/>
+                </a:solidFill>
+                <a:latin typeface="Aptos"/>
+              </a:rPr>
+              <a:t> ERRORS</a:t>
+            </a:r>
+          </a:p>
+        </p:txBody>
+      </p:sp>
+      <p:sp>
+        <p:nvSpPr>
+          <p:cNvPr id="17" name="Rounded Rectangle 16">
+            <a:extLst>
+              <a:ext uri="{FF2B5EF4-FFF2-40B4-BE49-F238E27FC236}">
+                <a16:creationId xmlns:a16="http://schemas.microsoft.com/office/drawing/2014/main" id="{B17FCBE5-3016-4668-3DDF-9F2E67B3069D}"/>
               </a:ext>
             </a:extLst>
           </p:cNvPr>
@@ -10114,14 +9680,16 @@
         </p:nvSpPr>
         <p:spPr>
           <a:xfrm>
-            <a:off x="9253728" y="3063240"/>
-            <a:ext cx="1645920" cy="36576"/>
-          </a:xfrm>
-          <a:prstGeom prst="rect">
-            <a:avLst/>
+            <a:off x="8156448" y="2865040"/>
+            <a:ext cx="2880360" cy="960120"/>
+          </a:xfrm>
+          <a:prstGeom prst="roundRect">
+            <a:avLst>
+              <a:gd name="adj" fmla="val 8000"/>
+            </a:avLst>
           </a:prstGeom>
           <a:solidFill>
-            <a:srgbClr val="D2D7D7"/>
+            <a:srgbClr val="FFFFFF"/>
           </a:solidFill>
           <a:ln>
             <a:solidFill>
@@ -10147,17 +9715,26 @@
           <a:bodyPr rtlCol="0" anchor="ctr"/>
           <a:lstStyle/>
           <a:p>
-            <a:pPr algn="ctr"/>
-            <a:endParaRPr/>
-          </a:p>
-        </p:txBody>
-      </p:sp>
-      <p:sp>
-        <p:nvSpPr>
-          <p:cNvPr id="16" name="TextBox 15">
-            <a:extLst>
-              <a:ext uri="{FF2B5EF4-FFF2-40B4-BE49-F238E27FC236}">
-                <a16:creationId xmlns:a16="http://schemas.microsoft.com/office/drawing/2014/main" id="{D956DFA8-E32D-A45C-E215-D8DDA09A7216}"/>
+            <a:pPr algn="ctr">
+              <a:spcAft>
+                <a:spcPts val="0"/>
+              </a:spcAft>
+            </a:pPr>
+            <a:endParaRPr lang="en-GB" b="1" dirty="0">
+              <a:solidFill>
+                <a:srgbClr val="188985"/>
+              </a:solidFill>
+              <a:latin typeface="Aptos Display"/>
+            </a:endParaRPr>
+          </a:p>
+        </p:txBody>
+      </p:sp>
+      <p:sp>
+        <p:nvSpPr>
+          <p:cNvPr id="18" name="TextBox 17">
+            <a:extLst>
+              <a:ext uri="{FF2B5EF4-FFF2-40B4-BE49-F238E27FC236}">
+                <a16:creationId xmlns:a16="http://schemas.microsoft.com/office/drawing/2014/main" id="{1C31CC1C-0BB1-7538-A53D-EE40EDA73128}"/>
               </a:ext>
             </a:extLst>
           </p:cNvPr>
@@ -10166,8 +9743,8 @@
         </p:nvSpPr>
         <p:spPr>
           <a:xfrm>
-            <a:off x="9253728" y="3364992"/>
-            <a:ext cx="914400" cy="228600"/>
+            <a:off x="8321040" y="2871216"/>
+            <a:ext cx="2551176" cy="384048"/>
           </a:xfrm>
           <a:prstGeom prst="rect">
             <a:avLst/>
@@ -10186,23 +9763,23 @@
               </a:spcAft>
             </a:pPr>
             <a:r>
-              <a:rPr sz="1100" b="1">
+              <a:rPr sz="2400" b="1">
                 <a:solidFill>
-                  <a:srgbClr val="DD5B4A"/>
+                  <a:srgbClr val="188985"/>
                 </a:solidFill>
-                <a:latin typeface="Aptos"/>
-              </a:rPr>
-              <a:t>LOW z</a:t>
-            </a:r>
-          </a:p>
-        </p:txBody>
-      </p:sp>
-      <p:sp>
-        <p:nvSpPr>
-          <p:cNvPr id="17" name="TextBox 16">
-            <a:extLst>
-              <a:ext uri="{FF2B5EF4-FFF2-40B4-BE49-F238E27FC236}">
-                <a16:creationId xmlns:a16="http://schemas.microsoft.com/office/drawing/2014/main" id="{860331BD-3FD2-E680-60B1-0DCE33D37791}"/>
+                <a:latin typeface="Aptos Display"/>
+              </a:rPr>
+              <a:t>61-449×</a:t>
+            </a:r>
+          </a:p>
+        </p:txBody>
+      </p:sp>
+      <p:sp>
+        <p:nvSpPr>
+          <p:cNvPr id="19" name="TextBox 18">
+            <a:extLst>
+              <a:ext uri="{FF2B5EF4-FFF2-40B4-BE49-F238E27FC236}">
+                <a16:creationId xmlns:a16="http://schemas.microsoft.com/office/drawing/2014/main" id="{FDB5AF31-EEA6-DEA8-1099-0D2CFBC2FF80}"/>
               </a:ext>
             </a:extLst>
           </p:cNvPr>
@@ -10211,8 +9788,8 @@
         </p:nvSpPr>
         <p:spPr>
           <a:xfrm>
-            <a:off x="9253728" y="3675887"/>
-            <a:ext cx="1783080" cy="566928"/>
+            <a:off x="8321040" y="3383280"/>
+            <a:ext cx="2551176" cy="227755"/>
           </a:xfrm>
           <a:prstGeom prst="rect">
             <a:avLst/>
@@ -10231,24 +9808,128 @@
               </a:spcAft>
             </a:pPr>
             <a:r>
-              <a:rPr sz="1500" b="0">
+              <a:rPr sz="1000" b="1" dirty="0">
                 <a:solidFill>
-                  <a:srgbClr val="182331"/>
+                  <a:srgbClr val="5B6771"/>
                 </a:solidFill>
                 <a:latin typeface="Aptos"/>
               </a:rPr>
-              <a:t>Shallow survey
-has more signal</a:t>
-            </a:r>
-          </a:p>
-        </p:txBody>
-      </p:sp>
-      <p:sp>
-        <p:nvSpPr>
-          <p:cNvPr id="18" name="TextBox 17">
-            <a:extLst>
-              <a:ext uri="{FF2B5EF4-FFF2-40B4-BE49-F238E27FC236}">
-                <a16:creationId xmlns:a16="http://schemas.microsoft.com/office/drawing/2014/main" id="{6992626B-C2F8-84C7-FFE1-FC645F13AB76}"/>
+              <a:t>LARGER FIGURE OF MERIT</a:t>
+            </a:r>
+            <a:r>
+              <a:rPr lang="nl-NL" sz="1000" b="1" dirty="0">
+                <a:solidFill>
+                  <a:srgbClr val="5B6771"/>
+                </a:solidFill>
+                <a:latin typeface="Aptos"/>
+              </a:rPr>
+              <a:t> (1/</a:t>
+            </a:r>
+            <a:r>
+              <a:rPr lang="nl-NL" sz="1000" b="1" dirty="0" err="1">
+                <a:solidFill>
+                  <a:srgbClr val="5B6771"/>
+                </a:solidFill>
+                <a:latin typeface="Aptos"/>
+              </a:rPr>
+              <a:t>det</a:t>
+            </a:r>
+            <a:r>
+              <a:rPr lang="nl-NL" sz="1000" b="1" dirty="0">
+                <a:solidFill>
+                  <a:srgbClr val="5B6771"/>
+                </a:solidFill>
+                <a:latin typeface="Aptos"/>
+              </a:rPr>
+              <a:t>{</a:t>
+            </a:r>
+            <a:r>
+              <a:rPr lang="nl-NL" sz="1000" b="1" dirty="0" err="1">
+                <a:solidFill>
+                  <a:srgbClr val="5B6771"/>
+                </a:solidFill>
+                <a:latin typeface="Aptos"/>
+              </a:rPr>
+              <a:t>cov</a:t>
+            </a:r>
+            <a:r>
+              <a:rPr lang="nl-NL" sz="1000" b="1" dirty="0">
+                <a:solidFill>
+                  <a:srgbClr val="5B6771"/>
+                </a:solidFill>
+                <a:latin typeface="Aptos"/>
+              </a:rPr>
+              <a:t>})</a:t>
+            </a:r>
+            <a:endParaRPr sz="1000" b="1" dirty="0">
+              <a:solidFill>
+                <a:srgbClr val="5B6771"/>
+              </a:solidFill>
+              <a:latin typeface="Aptos"/>
+            </a:endParaRPr>
+          </a:p>
+        </p:txBody>
+      </p:sp>
+      <p:sp>
+        <p:nvSpPr>
+          <p:cNvPr id="20" name="Rounded Rectangle 19">
+            <a:extLst>
+              <a:ext uri="{FF2B5EF4-FFF2-40B4-BE49-F238E27FC236}">
+                <a16:creationId xmlns:a16="http://schemas.microsoft.com/office/drawing/2014/main" id="{C2B4AB02-D563-84EA-F2FA-AF5497B76069}"/>
+              </a:ext>
+            </a:extLst>
+          </p:cNvPr>
+          <p:cNvSpPr/>
+          <p:nvPr/>
+        </p:nvSpPr>
+        <p:spPr>
+          <a:xfrm>
+            <a:off x="8156448" y="4087368"/>
+            <a:ext cx="2880360" cy="1645920"/>
+          </a:xfrm>
+          <a:prstGeom prst="roundRect">
+            <a:avLst>
+              <a:gd name="adj" fmla="val 8000"/>
+            </a:avLst>
+          </a:prstGeom>
+          <a:solidFill>
+            <a:srgbClr val="1C3750"/>
+          </a:solidFill>
+          <a:ln>
+            <a:solidFill>
+              <a:srgbClr val="1C3750"/>
+            </a:solidFill>
+          </a:ln>
+        </p:spPr>
+        <p:style>
+          <a:lnRef idx="1">
+            <a:schemeClr val="accent1"/>
+          </a:lnRef>
+          <a:fillRef idx="3">
+            <a:schemeClr val="accent1"/>
+          </a:fillRef>
+          <a:effectRef idx="2">
+            <a:schemeClr val="accent1"/>
+          </a:effectRef>
+          <a:fontRef idx="minor">
+            <a:schemeClr val="lt1"/>
+          </a:fontRef>
+        </p:style>
+        <p:txBody>
+          <a:bodyPr rtlCol="0" anchor="ctr"/>
+          <a:lstStyle/>
+          <a:p>
+            <a:pPr algn="ctr"/>
+            <a:endParaRPr/>
+          </a:p>
+        </p:txBody>
+      </p:sp>
+      <p:sp>
+        <p:nvSpPr>
+          <p:cNvPr id="21" name="TextBox 20">
+            <a:extLst>
+              <a:ext uri="{FF2B5EF4-FFF2-40B4-BE49-F238E27FC236}">
+                <a16:creationId xmlns:a16="http://schemas.microsoft.com/office/drawing/2014/main" id="{F01A6443-C023-BB51-9633-D1150C460E03}"/>
               </a:ext>
             </a:extLst>
           </p:cNvPr>
@@ -10257,8 +9938,8 @@
         </p:nvSpPr>
         <p:spPr>
           <a:xfrm>
-            <a:off x="9253728" y="4498848"/>
-            <a:ext cx="914400" cy="228600"/>
+            <a:off x="8394192" y="4334256"/>
+            <a:ext cx="2377440" cy="237744"/>
           </a:xfrm>
           <a:prstGeom prst="rect">
             <a:avLst/>
@@ -10279,21 +9960,21 @@
             <a:r>
               <a:rPr sz="1100" b="1">
                 <a:solidFill>
-                  <a:srgbClr val="188985"/>
+                  <a:srgbClr val="DDA33A"/>
                 </a:solidFill>
                 <a:latin typeface="Aptos"/>
               </a:rPr>
-              <a:t>HIGH z</a:t>
-            </a:r>
-          </a:p>
-        </p:txBody>
-      </p:sp>
-      <p:sp>
-        <p:nvSpPr>
-          <p:cNvPr id="19" name="TextBox 18">
-            <a:extLst>
-              <a:ext uri="{FF2B5EF4-FFF2-40B4-BE49-F238E27FC236}">
-                <a16:creationId xmlns:a16="http://schemas.microsoft.com/office/drawing/2014/main" id="{09E20AC4-1FF7-9464-C6CB-B8A914831E2D}"/>
+              <a:t>KiDS result</a:t>
+            </a:r>
+          </a:p>
+        </p:txBody>
+      </p:sp>
+      <p:sp>
+        <p:nvSpPr>
+          <p:cNvPr id="22" name="TextBox 21">
+            <a:extLst>
+              <a:ext uri="{FF2B5EF4-FFF2-40B4-BE49-F238E27FC236}">
+                <a16:creationId xmlns:a16="http://schemas.microsoft.com/office/drawing/2014/main" id="{4D0B1D77-911D-5464-ABCE-61E816142375}"/>
               </a:ext>
             </a:extLst>
           </p:cNvPr>
@@ -10302,8 +9983,8 @@
         </p:nvSpPr>
         <p:spPr>
           <a:xfrm>
-            <a:off x="9253728" y="4809744"/>
-            <a:ext cx="1783080" cy="566928"/>
+            <a:off x="8234172" y="4611784"/>
+            <a:ext cx="3081528" cy="597087"/>
           </a:xfrm>
           <a:prstGeom prst="rect">
             <a:avLst/>
@@ -10322,22 +10003,97 @@
               </a:spcAft>
             </a:pPr>
             <a:r>
-              <a:rPr sz="1500" b="0">
+              <a:rPr sz="1700" b="1" dirty="0">
                 <a:solidFill>
-                  <a:srgbClr val="182331"/>
+                  <a:srgbClr val="FFFFFF"/>
                 </a:solidFill>
                 <a:latin typeface="Aptos"/>
               </a:rPr>
-              <a:t>Deep survey
-retains information</a:t>
-            </a:r>
-          </a:p>
-        </p:txBody>
-      </p:sp>
+              <a:t>Bias becomes measurable,
+but the models still overlap.</a:t>
+            </a:r>
+          </a:p>
+        </p:txBody>
+      </p:sp>
+      <p:sp>
+        <p:nvSpPr>
+          <p:cNvPr id="23" name="TextBox 22">
+            <a:extLst>
+              <a:ext uri="{FF2B5EF4-FFF2-40B4-BE49-F238E27FC236}">
+                <a16:creationId xmlns:a16="http://schemas.microsoft.com/office/drawing/2014/main" id="{82FFEE8E-351F-302A-3CAF-19F102649FE0}"/>
+              </a:ext>
+            </a:extLst>
+          </p:cNvPr>
+          <p:cNvSpPr txBox="1"/>
+          <p:nvPr/>
+        </p:nvSpPr>
+        <p:spPr>
+          <a:xfrm>
+            <a:off x="8430768" y="5320444"/>
+            <a:ext cx="2331720" cy="243143"/>
+          </a:xfrm>
+          <a:prstGeom prst="rect">
+            <a:avLst/>
+          </a:prstGeom>
+          <a:noFill/>
+        </p:spPr>
+        <p:txBody>
+          <a:bodyPr wrap="square" lIns="36576" tIns="36576" rIns="36576" bIns="36576" anchor="t">
+            <a:spAutoFit/>
+          </a:bodyPr>
+          <a:lstStyle/>
+          <a:p>
+            <a:pPr algn="l">
+              <a:spcAft>
+                <a:spcPts val="0"/>
+              </a:spcAft>
+            </a:pPr>
+            <a:r>
+              <a:rPr sz="1100" b="0" dirty="0">
+                <a:solidFill>
+                  <a:srgbClr val="C4D3DA"/>
+                </a:solidFill>
+                <a:latin typeface="Aptos"/>
+              </a:rPr>
+              <a:t>Only 3.3% sky overlap</a:t>
+            </a:r>
+          </a:p>
+        </p:txBody>
+      </p:sp>
+      <p:pic>
+        <p:nvPicPr>
+          <p:cNvPr id="3" name="Picture 2">
+            <a:extLst>
+              <a:ext uri="{FF2B5EF4-FFF2-40B4-BE49-F238E27FC236}">
+                <a16:creationId xmlns:a16="http://schemas.microsoft.com/office/drawing/2014/main" id="{C1A01015-9570-616C-C767-947ADB0A51AE}"/>
+              </a:ext>
+            </a:extLst>
+          </p:cNvPr>
+          <p:cNvPicPr>
+            <a:picLocks noChangeAspect="1"/>
+          </p:cNvPicPr>
+          <p:nvPr/>
+        </p:nvPicPr>
+        <p:blipFill>
+          <a:blip r:embed="rId3"/>
+          <a:stretch>
+            <a:fillRect/>
+          </a:stretch>
+        </p:blipFill>
+        <p:spPr>
+          <a:xfrm>
+            <a:off x="1045029" y="1449534"/>
+            <a:ext cx="5919107" cy="4932590"/>
+          </a:xfrm>
+          <a:prstGeom prst="rect">
+            <a:avLst/>
+          </a:prstGeom>
+        </p:spPr>
+      </p:pic>
     </p:spTree>
     <p:extLst>
       <p:ext uri="{BB962C8B-B14F-4D97-AF65-F5344CB8AC3E}">
-        <p14:creationId xmlns:p14="http://schemas.microsoft.com/office/powerpoint/2010/main" val="3032097602"/>
+        <p14:creationId xmlns:p14="http://schemas.microsoft.com/office/powerpoint/2010/main" val="1651782072"/>
       </p:ext>
     </p:extLst>
   </p:cSld>
@@ -10369,7 +10125,7 @@
           <p:cNvPr id="5" name="Slide Number Placeholder 4">
             <a:extLst>
               <a:ext uri="{FF2B5EF4-FFF2-40B4-BE49-F238E27FC236}">
-                <a16:creationId xmlns:a16="http://schemas.microsoft.com/office/drawing/2014/main" id="{31F8CDD4-E0E8-E1B3-68A0-EFCC5CFC2647}"/>
+                <a16:creationId xmlns:a16="http://schemas.microsoft.com/office/drawing/2014/main" id="{F0C56DF0-A3B7-DBDE-36A3-9CF51387443A}"/>
               </a:ext>
             </a:extLst>
           </p:cNvPr>
@@ -10395,10 +10151,10 @@
       </p:sp>
       <p:sp>
         <p:nvSpPr>
-          <p:cNvPr id="11" name="TextBox 10">
-            <a:extLst>
-              <a:ext uri="{FF2B5EF4-FFF2-40B4-BE49-F238E27FC236}">
-                <a16:creationId xmlns:a16="http://schemas.microsoft.com/office/drawing/2014/main" id="{18E263C1-D3C0-49EE-4485-CEF3524028DD}"/>
+          <p:cNvPr id="6" name="TextBox 5">
+            <a:extLst>
+              <a:ext uri="{FF2B5EF4-FFF2-40B4-BE49-F238E27FC236}">
+                <a16:creationId xmlns:a16="http://schemas.microsoft.com/office/drawing/2014/main" id="{1866AF25-CB5E-4CFE-6C8C-364BCF1A4F62}"/>
               </a:ext>
             </a:extLst>
           </p:cNvPr>
@@ -10430,17 +10186,29 @@
               <a:rPr sz="4400" b="1" dirty="0">
                 <a:latin typeface="Aptos Display"/>
               </a:rPr>
-              <a:t>Cross-Correlation Enables the Measurement</a:t>
-            </a:r>
-          </a:p>
-        </p:txBody>
-      </p:sp>
-      <p:sp>
-        <p:nvSpPr>
-          <p:cNvPr id="14" name="Rounded Rectangle 13">
-            <a:extLst>
-              <a:ext uri="{FF2B5EF4-FFF2-40B4-BE49-F238E27FC236}">
-                <a16:creationId xmlns:a16="http://schemas.microsoft.com/office/drawing/2014/main" id="{62BAC528-5D70-72B7-BE5D-8B01986A390A}"/>
+              <a:t>From </a:t>
+            </a:r>
+            <a:r>
+              <a:rPr sz="4400" b="1" dirty="0" err="1">
+                <a:latin typeface="Aptos Display"/>
+              </a:rPr>
+              <a:t>KiDS</a:t>
+            </a:r>
+            <a:r>
+              <a:rPr sz="4400" b="1" dirty="0">
+                <a:latin typeface="Aptos Display"/>
+              </a:rPr>
+              <a:t> to LSST</a:t>
+            </a:r>
+          </a:p>
+        </p:txBody>
+      </p:sp>
+      <p:sp>
+        <p:nvSpPr>
+          <p:cNvPr id="9" name="Rounded Rectangle 8">
+            <a:extLst>
+              <a:ext uri="{FF2B5EF4-FFF2-40B4-BE49-F238E27FC236}">
+                <a16:creationId xmlns:a16="http://schemas.microsoft.com/office/drawing/2014/main" id="{2D87BFD9-2651-B57C-2138-07541E89D091}"/>
               </a:ext>
             </a:extLst>
           </p:cNvPr>
@@ -10449,8 +10217,8 @@
         </p:nvSpPr>
         <p:spPr>
           <a:xfrm>
-            <a:off x="8156448" y="1664208"/>
-            <a:ext cx="2880360" cy="960120"/>
+            <a:off x="8092440" y="1664208"/>
+            <a:ext cx="3337560" cy="4434840"/>
           </a:xfrm>
           <a:prstGeom prst="roundRect">
             <a:avLst>
@@ -10491,10 +10259,10 @@
       </p:sp>
       <p:sp>
         <p:nvSpPr>
-          <p:cNvPr id="15" name="TextBox 14">
-            <a:extLst>
-              <a:ext uri="{FF2B5EF4-FFF2-40B4-BE49-F238E27FC236}">
-                <a16:creationId xmlns:a16="http://schemas.microsoft.com/office/drawing/2014/main" id="{35BBD5FD-728F-B613-A8A0-50D777A4626E}"/>
+          <p:cNvPr id="10" name="TextBox 9">
+            <a:extLst>
+              <a:ext uri="{FF2B5EF4-FFF2-40B4-BE49-F238E27FC236}">
+                <a16:creationId xmlns:a16="http://schemas.microsoft.com/office/drawing/2014/main" id="{3A74D675-7303-571B-2043-43DA51EFAB8F}"/>
               </a:ext>
             </a:extLst>
           </p:cNvPr>
@@ -10503,8 +10271,8 @@
         </p:nvSpPr>
         <p:spPr>
           <a:xfrm>
-            <a:off x="8321040" y="1792224"/>
-            <a:ext cx="2551176" cy="384048"/>
+            <a:off x="8394192" y="1938528"/>
+            <a:ext cx="2560320" cy="256032"/>
           </a:xfrm>
           <a:prstGeom prst="rect">
             <a:avLst/>
@@ -10523,23 +10291,23 @@
               </a:spcAft>
             </a:pPr>
             <a:r>
-              <a:rPr sz="2400" b="1">
+              <a:rPr sz="1100" b="1">
                 <a:solidFill>
-                  <a:srgbClr val="DD5B4A"/>
+                  <a:srgbClr val="5B6771"/>
                 </a:solidFill>
-                <a:latin typeface="Aptos Display"/>
-              </a:rPr>
-              <a:t>17-51×</a:t>
-            </a:r>
-          </a:p>
-        </p:txBody>
-      </p:sp>
-      <p:sp>
-        <p:nvSpPr>
-          <p:cNvPr id="16" name="TextBox 15">
-            <a:extLst>
-              <a:ext uri="{FF2B5EF4-FFF2-40B4-BE49-F238E27FC236}">
-                <a16:creationId xmlns:a16="http://schemas.microsoft.com/office/drawing/2014/main" id="{9B451DCF-2D15-1B39-D497-7F764AD71C61}"/>
+                <a:latin typeface="Aptos"/>
+              </a:rPr>
+              <a:t>SURVEY SCALE</a:t>
+            </a:r>
+          </a:p>
+        </p:txBody>
+      </p:sp>
+      <p:sp>
+        <p:nvSpPr>
+          <p:cNvPr id="11" name="TextBox 10">
+            <a:extLst>
+              <a:ext uri="{FF2B5EF4-FFF2-40B4-BE49-F238E27FC236}">
+                <a16:creationId xmlns:a16="http://schemas.microsoft.com/office/drawing/2014/main" id="{AD30205B-C647-A939-1509-C1D2284235AA}"/>
               </a:ext>
             </a:extLst>
           </p:cNvPr>
@@ -10548,8 +10316,8 @@
         </p:nvSpPr>
         <p:spPr>
           <a:xfrm>
-            <a:off x="8321040" y="2231136"/>
-            <a:ext cx="2551176" cy="227755"/>
+            <a:off x="8394192" y="2359152"/>
+            <a:ext cx="2651760" cy="457200"/>
           </a:xfrm>
           <a:prstGeom prst="rect">
             <a:avLst/>
@@ -10557,7 +10325,7 @@
           <a:noFill/>
         </p:spPr>
         <p:txBody>
-          <a:bodyPr wrap="square" lIns="36576" tIns="36576" rIns="36576" bIns="36576" anchor="t">
+          <a:bodyPr wrap="square" lIns="27432" tIns="18288" rIns="27432" bIns="18288">
             <a:spAutoFit/>
           </a:bodyPr>
           <a:lstStyle/>
@@ -10568,41 +10336,122 @@
               </a:spcAft>
             </a:pPr>
             <a:r>
-              <a:rPr sz="1000" b="1" dirty="0">
+              <a:rPr sz="2300" b="1">
+                <a:solidFill>
+                  <a:srgbClr val="1C3750"/>
+                </a:solidFill>
+                <a:latin typeface="Aptos"/>
+              </a:rPr>
+              <a:t>1,347</a:t>
+            </a:r>
+            <a:r>
+              <a:rPr sz="2300" b="0">
                 <a:solidFill>
                   <a:srgbClr val="5B6771"/>
                 </a:solidFill>
                 <a:latin typeface="Aptos"/>
               </a:rPr>
-              <a:t>SMALLER </a:t>
-            </a:r>
-            <a:r>
-              <a:rPr lang="nl-NL" sz="1000" b="1" dirty="0">
+              <a:t> → </a:t>
+            </a:r>
+            <a:r>
+              <a:rPr sz="2300" b="1">
+                <a:solidFill>
+                  <a:srgbClr val="188985"/>
+                </a:solidFill>
+                <a:latin typeface="Aptos"/>
+              </a:rPr>
+              <a:t>18,000</a:t>
+            </a:r>
+            <a:r>
+              <a:rPr sz="2300" b="0">
                 <a:solidFill>
                   <a:srgbClr val="5B6771"/>
                 </a:solidFill>
                 <a:latin typeface="Aptos"/>
               </a:rPr>
-              <a:t>1 Sigma</a:t>
-            </a:r>
-            <a:r>
-              <a:rPr sz="1000" b="1" dirty="0">
+              <a:t> deg²</a:t>
+            </a:r>
+          </a:p>
+        </p:txBody>
+      </p:sp>
+      <p:sp>
+        <p:nvSpPr>
+          <p:cNvPr id="12" name="TextBox 11">
+            <a:extLst>
+              <a:ext uri="{FF2B5EF4-FFF2-40B4-BE49-F238E27FC236}">
+                <a16:creationId xmlns:a16="http://schemas.microsoft.com/office/drawing/2014/main" id="{8F65297E-7921-B4E1-0879-EBA3B1A67208}"/>
+              </a:ext>
+            </a:extLst>
+          </p:cNvPr>
+          <p:cNvSpPr txBox="1"/>
+          <p:nvPr/>
+        </p:nvSpPr>
+        <p:spPr>
+          <a:xfrm>
+            <a:off x="8394192" y="2880360"/>
+            <a:ext cx="2651760" cy="457200"/>
+          </a:xfrm>
+          <a:prstGeom prst="rect">
+            <a:avLst/>
+          </a:prstGeom>
+          <a:noFill/>
+        </p:spPr>
+        <p:txBody>
+          <a:bodyPr wrap="square" lIns="27432" tIns="18288" rIns="27432" bIns="18288">
+            <a:spAutoFit/>
+          </a:bodyPr>
+          <a:lstStyle/>
+          <a:p>
+            <a:pPr algn="l">
+              <a:spcAft>
+                <a:spcPts val="0"/>
+              </a:spcAft>
+            </a:pPr>
+            <a:r>
+              <a:rPr sz="2300" b="1">
+                <a:solidFill>
+                  <a:srgbClr val="1C3750"/>
+                </a:solidFill>
+                <a:latin typeface="Aptos"/>
+              </a:rPr>
+              <a:t>6</a:t>
+            </a:r>
+            <a:r>
+              <a:rPr sz="2300" b="0">
                 <a:solidFill>
                   <a:srgbClr val="5B6771"/>
                 </a:solidFill>
                 <a:latin typeface="Aptos"/>
               </a:rPr>
-              <a:t> ERRORS</a:t>
-            </a:r>
-          </a:p>
-        </p:txBody>
-      </p:sp>
-      <p:sp>
-        <p:nvSpPr>
-          <p:cNvPr id="17" name="Rounded Rectangle 16">
-            <a:extLst>
-              <a:ext uri="{FF2B5EF4-FFF2-40B4-BE49-F238E27FC236}">
-                <a16:creationId xmlns:a16="http://schemas.microsoft.com/office/drawing/2014/main" id="{B17FCBE5-3016-4668-3DDF-9F2E67B3069D}"/>
+              <a:t> → </a:t>
+            </a:r>
+            <a:r>
+              <a:rPr sz="2300" b="1">
+                <a:solidFill>
+                  <a:srgbClr val="188985"/>
+                </a:solidFill>
+                <a:latin typeface="Aptos"/>
+              </a:rPr>
+              <a:t>10</a:t>
+            </a:r>
+            <a:r>
+              <a:rPr sz="2300" b="0">
+                <a:solidFill>
+                  <a:srgbClr val="5B6771"/>
+                </a:solidFill>
+                <a:latin typeface="Aptos"/>
+              </a:rPr>
+              <a:t> bins</a:t>
+            </a:r>
+          </a:p>
+        </p:txBody>
+      </p:sp>
+      <p:sp>
+        <p:nvSpPr>
+          <p:cNvPr id="13" name="Rectangle 12">
+            <a:extLst>
+              <a:ext uri="{FF2B5EF4-FFF2-40B4-BE49-F238E27FC236}">
+                <a16:creationId xmlns:a16="http://schemas.microsoft.com/office/drawing/2014/main" id="{B5DCD1CA-029B-8549-B729-8FB4814016D3}"/>
               </a:ext>
             </a:extLst>
           </p:cNvPr>
@@ -10611,16 +10460,14 @@
         </p:nvSpPr>
         <p:spPr>
           <a:xfrm>
-            <a:off x="8156448" y="2865040"/>
-            <a:ext cx="2880360" cy="960120"/>
-          </a:xfrm>
-          <a:prstGeom prst="roundRect">
-            <a:avLst>
-              <a:gd name="adj" fmla="val 8000"/>
-            </a:avLst>
+            <a:off x="8394192" y="3529584"/>
+            <a:ext cx="2423160" cy="36576"/>
+          </a:xfrm>
+          <a:prstGeom prst="rect">
+            <a:avLst/>
           </a:prstGeom>
           <a:solidFill>
-            <a:srgbClr val="FFFFFF"/>
+            <a:srgbClr val="D2D7D7"/>
           </a:solidFill>
           <a:ln>
             <a:solidFill>
@@ -10646,26 +10493,17 @@
           <a:bodyPr rtlCol="0" anchor="ctr"/>
           <a:lstStyle/>
           <a:p>
-            <a:pPr algn="ctr">
-              <a:spcAft>
-                <a:spcPts val="0"/>
-              </a:spcAft>
-            </a:pPr>
-            <a:endParaRPr lang="en-GB" b="1" dirty="0">
-              <a:solidFill>
-                <a:srgbClr val="188985"/>
-              </a:solidFill>
-              <a:latin typeface="Aptos Display"/>
-            </a:endParaRPr>
-          </a:p>
-        </p:txBody>
-      </p:sp>
-      <p:sp>
-        <p:nvSpPr>
-          <p:cNvPr id="18" name="TextBox 17">
-            <a:extLst>
-              <a:ext uri="{FF2B5EF4-FFF2-40B4-BE49-F238E27FC236}">
-                <a16:creationId xmlns:a16="http://schemas.microsoft.com/office/drawing/2014/main" id="{1C31CC1C-0BB1-7538-A53D-EE40EDA73128}"/>
+            <a:pPr algn="ctr"/>
+            <a:endParaRPr/>
+          </a:p>
+        </p:txBody>
+      </p:sp>
+      <p:sp>
+        <p:nvSpPr>
+          <p:cNvPr id="14" name="TextBox 13">
+            <a:extLst>
+              <a:ext uri="{FF2B5EF4-FFF2-40B4-BE49-F238E27FC236}">
+                <a16:creationId xmlns:a16="http://schemas.microsoft.com/office/drawing/2014/main" id="{86647549-33DD-242D-4064-9A623E372E41}"/>
               </a:ext>
             </a:extLst>
           </p:cNvPr>
@@ -10674,8 +10512,8 @@
         </p:nvSpPr>
         <p:spPr>
           <a:xfrm>
-            <a:off x="8321040" y="2871216"/>
-            <a:ext cx="2551176" cy="384048"/>
+            <a:off x="8394192" y="3822191"/>
+            <a:ext cx="2377440" cy="256032"/>
           </a:xfrm>
           <a:prstGeom prst="rect">
             <a:avLst/>
@@ -10694,23 +10532,23 @@
               </a:spcAft>
             </a:pPr>
             <a:r>
-              <a:rPr sz="2400" b="1">
+              <a:rPr sz="1100" b="1">
                 <a:solidFill>
-                  <a:srgbClr val="188985"/>
+                  <a:srgbClr val="DD5B4A"/>
                 </a:solidFill>
-                <a:latin typeface="Aptos Display"/>
-              </a:rPr>
-              <a:t>61-449×</a:t>
-            </a:r>
-          </a:p>
-        </p:txBody>
-      </p:sp>
-      <p:sp>
-        <p:nvSpPr>
-          <p:cNvPr id="19" name="TextBox 18">
-            <a:extLst>
-              <a:ext uri="{FF2B5EF4-FFF2-40B4-BE49-F238E27FC236}">
-                <a16:creationId xmlns:a16="http://schemas.microsoft.com/office/drawing/2014/main" id="{FDB5AF31-EEA6-DEA8-1099-0D2CFBC2FF80}"/>
+                <a:latin typeface="Aptos"/>
+              </a:rPr>
+              <a:t>DEEP MAGNETAR</a:t>
+            </a:r>
+          </a:p>
+        </p:txBody>
+      </p:sp>
+      <p:sp>
+        <p:nvSpPr>
+          <p:cNvPr id="15" name="TextBox 14">
+            <a:extLst>
+              <a:ext uri="{FF2B5EF4-FFF2-40B4-BE49-F238E27FC236}">
+                <a16:creationId xmlns:a16="http://schemas.microsoft.com/office/drawing/2014/main" id="{75A2CE20-BB79-53D1-7469-10C98F243867}"/>
               </a:ext>
             </a:extLst>
           </p:cNvPr>
@@ -10719,8 +10557,8 @@
         </p:nvSpPr>
         <p:spPr>
           <a:xfrm>
-            <a:off x="8321040" y="3383280"/>
-            <a:ext cx="2551176" cy="227755"/>
+            <a:off x="8394192" y="4224528"/>
+            <a:ext cx="2468880" cy="335476"/>
           </a:xfrm>
           <a:prstGeom prst="rect">
             <a:avLst/>
@@ -10739,62 +10577,35 @@
               </a:spcAft>
             </a:pPr>
             <a:r>
-              <a:rPr sz="1000" b="1" dirty="0">
+              <a:rPr sz="1700" b="1" dirty="0" err="1">
                 <a:solidFill>
-                  <a:srgbClr val="5B6771"/>
+                  <a:srgbClr val="1C3750"/>
                 </a:solidFill>
                 <a:latin typeface="Aptos"/>
               </a:rPr>
-              <a:t>LARGER FIGURE OF MERIT</a:t>
-            </a:r>
-            <a:r>
-              <a:rPr lang="nl-NL" sz="1000" b="1" dirty="0">
+              <a:t>σ</a:t>
+            </a:r>
+            <a:r>
+              <a:rPr sz="1700" b="1" dirty="0">
                 <a:solidFill>
-                  <a:srgbClr val="5B6771"/>
+                  <a:srgbClr val="1C3750"/>
                 </a:solidFill>
                 <a:latin typeface="Aptos"/>
               </a:rPr>
-              <a:t> (1/</a:t>
-            </a:r>
-            <a:r>
-              <a:rPr lang="nl-NL" sz="1000" b="1" dirty="0" err="1">
+              <a:t>(b₀)  1.27 → 0.</a:t>
+            </a:r>
+            <a:r>
+              <a:rPr lang="nl-NL" sz="1700" b="1" dirty="0">
                 <a:solidFill>
-                  <a:srgbClr val="5B6771"/>
+                  <a:srgbClr val="1C3750"/>
                 </a:solidFill>
                 <a:latin typeface="Aptos"/>
               </a:rPr>
-              <a:t>det</a:t>
-            </a:r>
-            <a:r>
-              <a:rPr lang="nl-NL" sz="1000" b="1" dirty="0">
-                <a:solidFill>
-                  <a:srgbClr val="5B6771"/>
-                </a:solidFill>
-                <a:latin typeface="Aptos"/>
-              </a:rPr>
-              <a:t>{</a:t>
-            </a:r>
-            <a:r>
-              <a:rPr lang="nl-NL" sz="1000" b="1" dirty="0" err="1">
-                <a:solidFill>
-                  <a:srgbClr val="5B6771"/>
-                </a:solidFill>
-                <a:latin typeface="Aptos"/>
-              </a:rPr>
-              <a:t>cov</a:t>
-            </a:r>
-            <a:r>
-              <a:rPr lang="nl-NL" sz="1000" b="1" dirty="0">
-                <a:solidFill>
-                  <a:srgbClr val="5B6771"/>
-                </a:solidFill>
-                <a:latin typeface="Aptos"/>
-              </a:rPr>
-              <a:t>})</a:t>
-            </a:r>
-            <a:endParaRPr sz="1000" b="1" dirty="0">
+              <a:t>43</a:t>
+            </a:r>
+            <a:endParaRPr sz="1700" b="1" dirty="0">
               <a:solidFill>
-                <a:srgbClr val="5B6771"/>
+                <a:srgbClr val="1C3750"/>
               </a:solidFill>
               <a:latin typeface="Aptos"/>
             </a:endParaRPr>
@@ -10803,64 +10614,10 @@
       </p:sp>
       <p:sp>
         <p:nvSpPr>
-          <p:cNvPr id="20" name="Rounded Rectangle 19">
-            <a:extLst>
-              <a:ext uri="{FF2B5EF4-FFF2-40B4-BE49-F238E27FC236}">
-                <a16:creationId xmlns:a16="http://schemas.microsoft.com/office/drawing/2014/main" id="{C2B4AB02-D563-84EA-F2FA-AF5497B76069}"/>
-              </a:ext>
-            </a:extLst>
-          </p:cNvPr>
-          <p:cNvSpPr/>
-          <p:nvPr/>
-        </p:nvSpPr>
-        <p:spPr>
-          <a:xfrm>
-            <a:off x="8156448" y="4087368"/>
-            <a:ext cx="2880360" cy="1645920"/>
-          </a:xfrm>
-          <a:prstGeom prst="roundRect">
-            <a:avLst>
-              <a:gd name="adj" fmla="val 8000"/>
-            </a:avLst>
-          </a:prstGeom>
-          <a:solidFill>
-            <a:srgbClr val="1C3750"/>
-          </a:solidFill>
-          <a:ln>
-            <a:solidFill>
-              <a:srgbClr val="1C3750"/>
-            </a:solidFill>
-          </a:ln>
-        </p:spPr>
-        <p:style>
-          <a:lnRef idx="1">
-            <a:schemeClr val="accent1"/>
-          </a:lnRef>
-          <a:fillRef idx="3">
-            <a:schemeClr val="accent1"/>
-          </a:fillRef>
-          <a:effectRef idx="2">
-            <a:schemeClr val="accent1"/>
-          </a:effectRef>
-          <a:fontRef idx="minor">
-            <a:schemeClr val="lt1"/>
-          </a:fontRef>
-        </p:style>
-        <p:txBody>
-          <a:bodyPr rtlCol="0" anchor="ctr"/>
-          <a:lstStyle/>
-          <a:p>
-            <a:pPr algn="ctr"/>
-            <a:endParaRPr/>
-          </a:p>
-        </p:txBody>
-      </p:sp>
-      <p:sp>
-        <p:nvSpPr>
-          <p:cNvPr id="21" name="TextBox 20">
-            <a:extLst>
-              <a:ext uri="{FF2B5EF4-FFF2-40B4-BE49-F238E27FC236}">
-                <a16:creationId xmlns:a16="http://schemas.microsoft.com/office/drawing/2014/main" id="{F01A6443-C023-BB51-9633-D1150C460E03}"/>
+          <p:cNvPr id="16" name="TextBox 15">
+            <a:extLst>
+              <a:ext uri="{FF2B5EF4-FFF2-40B4-BE49-F238E27FC236}">
+                <a16:creationId xmlns:a16="http://schemas.microsoft.com/office/drawing/2014/main" id="{8D8984B3-23E2-49A2-A37D-4A27483E5125}"/>
               </a:ext>
             </a:extLst>
           </p:cNvPr>
@@ -10869,8 +10626,8 @@
         </p:nvSpPr>
         <p:spPr>
           <a:xfrm>
-            <a:off x="8394192" y="4334256"/>
-            <a:ext cx="2377440" cy="237744"/>
+            <a:off x="8394192" y="4681728"/>
+            <a:ext cx="2468880" cy="335476"/>
           </a:xfrm>
           <a:prstGeom prst="rect">
             <a:avLst/>
@@ -10889,23 +10646,65 @@
               </a:spcAft>
             </a:pPr>
             <a:r>
-              <a:rPr sz="1100" b="1">
+              <a:rPr sz="1700" b="1" dirty="0" err="1">
                 <a:solidFill>
-                  <a:srgbClr val="DDA33A"/>
+                  <a:srgbClr val="1C3750"/>
                 </a:solidFill>
                 <a:latin typeface="Aptos"/>
               </a:rPr>
-              <a:t>KiDS result</a:t>
-            </a:r>
-          </a:p>
-        </p:txBody>
-      </p:sp>
-      <p:sp>
-        <p:nvSpPr>
-          <p:cNvPr id="22" name="TextBox 21">
-            <a:extLst>
-              <a:ext uri="{FF2B5EF4-FFF2-40B4-BE49-F238E27FC236}">
-                <a16:creationId xmlns:a16="http://schemas.microsoft.com/office/drawing/2014/main" id="{4D0B1D77-911D-5464-ABCE-61E816142375}"/>
+              <a:t>FoM</a:t>
+            </a:r>
+            <a:r>
+              <a:rPr sz="1700" b="1" dirty="0">
+                <a:solidFill>
+                  <a:srgbClr val="1C3750"/>
+                </a:solidFill>
+                <a:latin typeface="Aptos"/>
+              </a:rPr>
+              <a:t>     1.59 → </a:t>
+            </a:r>
+            <a:r>
+              <a:rPr lang="nl-NL" sz="1700" b="1" dirty="0">
+                <a:solidFill>
+                  <a:srgbClr val="1C3750"/>
+                </a:solidFill>
+                <a:latin typeface="Aptos"/>
+              </a:rPr>
+              <a:t>1</a:t>
+            </a:r>
+            <a:r>
+              <a:rPr sz="1700" b="1" dirty="0">
+                <a:solidFill>
+                  <a:srgbClr val="1C3750"/>
+                </a:solidFill>
+                <a:latin typeface="Aptos"/>
+              </a:rPr>
+              <a:t>4</a:t>
+            </a:r>
+            <a:r>
+              <a:rPr lang="nl-NL" sz="1700" b="1" dirty="0">
+                <a:solidFill>
+                  <a:srgbClr val="1C3750"/>
+                </a:solidFill>
+                <a:latin typeface="Aptos"/>
+              </a:rPr>
+              <a:t>.56</a:t>
+            </a:r>
+            <a:endParaRPr sz="1700" b="1" dirty="0">
+              <a:solidFill>
+                <a:srgbClr val="1C3750"/>
+              </a:solidFill>
+              <a:latin typeface="Aptos"/>
+            </a:endParaRPr>
+          </a:p>
+        </p:txBody>
+      </p:sp>
+      <p:sp>
+        <p:nvSpPr>
+          <p:cNvPr id="17" name="TextBox 16">
+            <a:extLst>
+              <a:ext uri="{FF2B5EF4-FFF2-40B4-BE49-F238E27FC236}">
+                <a16:creationId xmlns:a16="http://schemas.microsoft.com/office/drawing/2014/main" id="{E76781B5-0ABB-1222-4905-65CA122120A5}"/>
               </a:ext>
             </a:extLst>
           </p:cNvPr>
@@ -10914,8 +10713,8 @@
         </p:nvSpPr>
         <p:spPr>
           <a:xfrm>
-            <a:off x="8234172" y="4611784"/>
-            <a:ext cx="3081528" cy="597087"/>
+            <a:off x="8394192" y="5285232"/>
+            <a:ext cx="2423160" cy="320040"/>
           </a:xfrm>
           <a:prstGeom prst="rect">
             <a:avLst/>
@@ -10934,59 +10733,13 @@
               </a:spcAft>
             </a:pPr>
             <a:r>
-              <a:rPr sz="1700" b="1" dirty="0">
+              <a:rPr sz="1400" b="1">
                 <a:solidFill>
-                  <a:srgbClr val="FFFFFF"/>
+                  <a:srgbClr val="188985"/>
                 </a:solidFill>
                 <a:latin typeface="Aptos"/>
               </a:rPr>
-              <a:t>Bias becomes measurable,
-but the models still overlap.</a:t>
-            </a:r>
-          </a:p>
-        </p:txBody>
-      </p:sp>
-      <p:sp>
-        <p:nvSpPr>
-          <p:cNvPr id="23" name="TextBox 22">
-            <a:extLst>
-              <a:ext uri="{FF2B5EF4-FFF2-40B4-BE49-F238E27FC236}">
-                <a16:creationId xmlns:a16="http://schemas.microsoft.com/office/drawing/2014/main" id="{82FFEE8E-351F-302A-3CAF-19F102649FE0}"/>
-              </a:ext>
-            </a:extLst>
-          </p:cNvPr>
-          <p:cNvSpPr txBox="1"/>
-          <p:nvPr/>
-        </p:nvSpPr>
-        <p:spPr>
-          <a:xfrm>
-            <a:off x="8430768" y="5320444"/>
-            <a:ext cx="2331720" cy="243143"/>
-          </a:xfrm>
-          <a:prstGeom prst="rect">
-            <a:avLst/>
-          </a:prstGeom>
-          <a:noFill/>
-        </p:spPr>
-        <p:txBody>
-          <a:bodyPr wrap="square" lIns="36576" tIns="36576" rIns="36576" bIns="36576" anchor="t">
-            <a:spAutoFit/>
-          </a:bodyPr>
-          <a:lstStyle/>
-          <a:p>
-            <a:pPr algn="l">
-              <a:spcAft>
-                <a:spcPts val="0"/>
-              </a:spcAft>
-            </a:pPr>
-            <a:r>
-              <a:rPr sz="1100" b="0" dirty="0">
-                <a:solidFill>
-                  <a:srgbClr val="C4D3DA"/>
-                </a:solidFill>
-                <a:latin typeface="Aptos"/>
-              </a:rPr>
-              <a:t>Only 3.3% sky overlap</a:t>
+              <a:t>Models separate at 1σ</a:t>
             </a:r>
           </a:p>
         </p:txBody>
@@ -10996,7 +10749,7 @@
           <p:cNvPr id="3" name="Picture 2">
             <a:extLst>
               <a:ext uri="{FF2B5EF4-FFF2-40B4-BE49-F238E27FC236}">
-                <a16:creationId xmlns:a16="http://schemas.microsoft.com/office/drawing/2014/main" id="{C1A01015-9570-616C-C767-947ADB0A51AE}"/>
+                <a16:creationId xmlns:a16="http://schemas.microsoft.com/office/drawing/2014/main" id="{F326BDE6-6959-0A62-DECC-667916F4CBE1}"/>
               </a:ext>
             </a:extLst>
           </p:cNvPr>
@@ -11013,8 +10766,8 @@
         </p:blipFill>
         <p:spPr>
           <a:xfrm>
-            <a:off x="1045029" y="1449534"/>
-            <a:ext cx="5919107" cy="4932590"/>
+            <a:off x="838200" y="1346209"/>
+            <a:ext cx="6085005" cy="5070838"/>
           </a:xfrm>
           <a:prstGeom prst="rect">
             <a:avLst/>
@@ -11024,7 +10777,7 @@
     </p:spTree>
     <p:extLst>
       <p:ext uri="{BB962C8B-B14F-4D97-AF65-F5344CB8AC3E}">
-        <p14:creationId xmlns:p14="http://schemas.microsoft.com/office/powerpoint/2010/main" val="1651782072"/>
+        <p14:creationId xmlns:p14="http://schemas.microsoft.com/office/powerpoint/2010/main" val="3609588216"/>
       </p:ext>
     </p:extLst>
   </p:cSld>
